--- a/presentation/token_cost_main.pptx
+++ b/presentation/token_cost_main.pptx
@@ -523,27 +523,27 @@
           <a:lstStyle/>
           <a:p>
             <a:r>
-              <a:t>2026-09-20 정정판</a:t>
-            </a:r>
-          </a:p>
-          <a:p>
-            <a:r>
-              <a:t>영어 활용 · KISS/DRY/YAGNI · 설명 최소화 · 결정된 스펙 주입</a:t>
-            </a:r>
-          </a:p>
-          <a:p>
-            <a:r>
-              <a:t>불필요한 출력·사고·재전송을 줄이면 비용을 낮출 수 있다.</a:t>
-            </a:r>
-          </a:p>
-          <a:p>
-            <a:r>
-              <a:t>이 자료는 실측, 로그 재계산, 비용 시나리오를 구분한다.</a:t>
-            </a:r>
-          </a:p>
-          <a:p>
-            <a:r>
-              <a:t>근거: github.com/giyeop-cody/token-cost-lab · docs/CORRECTIONS.md</a:t>
+              <a:t>인사와 함께 오늘 목표를 한 줄로 말한다: "같은 결과물을 더 싸게 사는 방법".</a:t>
+            </a:r>
+          </a:p>
+          <a:p>
+            <a:r>
+              <a:t>세 가지 청구 항목(입력·출력·사고)을 미리 짚어 두면 뒤의 숫자가 이해된다.</a:t>
+            </a:r>
+          </a:p>
+          <a:p>
+            <a:r>
+              <a:t>숫자의 성격(실측/재계산/가정)을 먼저 밝힌다 — 질문이 몰리지 않는다.</a:t>
+            </a:r>
+          </a:p>
+          <a:p>
+            <a:r>
+              <a:t>근거: github.com/giyeop-cody/token-cost-lab</a:t>
+            </a:r>
+          </a:p>
+          <a:p>
+            <a:r>
+              <a:t>증거 범위: 발표 · 2026-09-20</a:t>
             </a:r>
           </a:p>
         </p:txBody>
@@ -613,32 +613,27 @@
           <a:lstStyle/>
           <a:p>
             <a:r>
-              <a:t>통계 구현 교정</a:t>
-            </a:r>
-          </a:p>
-          <a:p>
-            <a:r>
-              <a:t>reason / 문자당 / 기존 단가: 정규근사 6.08e-10 → Welch 4.02e-07</a:t>
-            </a:r>
-          </a:p>
-          <a:p>
-            <a:r>
-              <a:t>평균 차이의 표준오차를 표본에서 추정하므로 정규분포보다 꼬리가 두꺼운 t분포를 사용.</a:t>
-            </a:r>
-          </a:p>
-          <a:p>
-            <a:r>
-              <a:t>p = 2 × t.sf(|t|, df). 1-CDF는 작은 꼬리에서 정밀도를 잃을 수 있다.</a:t>
-            </a:r>
-          </a:p>
-          <a:p>
-            <a:r>
-              <a:t>p값은 수정해야 한다. 유의성의 소멸을 뜻하지는 않는다.</a:t>
-            </a:r>
-          </a:p>
-          <a:p>
-            <a:r>
-              <a:t>근거: tools/stats_test.py · scipy.stats.ttest_ind(equal_var=False) 회귀 대조</a:t>
+              <a:t>캐시는 프리픽스를 단위로 매칭한다. 앞부분이 한 글자만 달라도 전액을 다시 낸다.</a:t>
+            </a:r>
+          </a:p>
+          <a:p>
+            <a:r>
+              <a:t>히트율 0%에서는 쓰기 프리미엄만 계속 물어 캐시 없음($8.55)보다 비싸진다($10.05).</a:t>
+            </a:r>
+          </a:p>
+          <a:p>
+            <a:r>
+              <a:t>반대로 히트율이 40%만 넘어도 이미 이득이다. 그래서 '켜고, 적중률을 본다'가 순서다.</a:t>
+            </a:r>
+          </a:p>
+          <a:p>
+            <a:r>
+              <a:t>근거: experiments/exp03_prompt_caching.py</a:t>
+            </a:r>
+          </a:p>
+          <a:p>
+            <a:r>
+              <a:t>증거 범위: 비용 시나리오</a:t>
             </a:r>
           </a:p>
         </p:txBody>
@@ -708,32 +703,32 @@
           <a:lstStyle/>
           <a:p>
             <a:r>
-              <a:t>유의성 ≠ 의미량·추론 품질 증명</a:t>
-            </a:r>
-          </a:p>
-          <a:p>
-            <a:r>
-              <a:t>explain 호출당: p = 1.60e-03</a:t>
-            </a:r>
-          </a:p>
-          <a:p>
-            <a:r>
-              <a:t>explain 문자당: p = 3.00e-10</a:t>
-            </a:r>
-          </a:p>
-          <a:p>
-            <a:r>
-              <a:t>reason 호출당: p = 7.80e-04</a:t>
-            </a:r>
-          </a:p>
-          <a:p>
-            <a:r>
-              <a:t>reason 문자당: p = 4.02e-07 — 모두 기존 $1.25/$10 단가. 반복 호출의 조건부 검정.</a:t>
-            </a:r>
-          </a:p>
-          <a:p>
-            <a:r>
-              <a:t>근거: results/live_lang_thinking.jsonl (80 rows) · tools/stats_test.py</a:t>
+              <a:t>같은 12,000토큰을 매번 보내던 세션을 절반으로 줄이고 캐시까지 걸었을 때의 산술이다.</a:t>
+            </a:r>
+          </a:p>
+          <a:p>
+            <a:r>
+              <a:t>압축률과 정확도는 작업별로 다르다. 지시·수용 기준을 지우면 요구사항이 바뀐다.</a:t>
+            </a:r>
+          </a:p>
+          <a:p>
+            <a:r>
+              <a:t>압축기 실행 비용과 지연도 손익에 포함해야 한다. 짧은 프롬프트는 압축이 손해일 수 있다.</a:t>
+            </a:r>
+          </a:p>
+          <a:p>
+            <a:r>
+              <a:t>압축 자체의 지연·품질 손실은 이 계산 밖이다.</a:t>
+            </a:r>
+          </a:p>
+          <a:p>
+            <a:r>
+              <a:t>근거: experiments/exp09_dry.py</a:t>
+            </a:r>
+          </a:p>
+          <a:p>
+            <a:r>
+              <a:t>증거 범위: 비용 시나리오</a:t>
             </a:r>
           </a:p>
         </p:txBody>
@@ -803,32 +798,27 @@
           <a:lstStyle/>
           <a:p>
             <a:r>
-              <a:t>실무 권장 / 조건부 효과</a:t>
-            </a:r>
-          </a:p>
-          <a:p>
-            <a:r>
-              <a:t>① 영어는 토큰 효율과 추론 정확도에 유리할 수 있다. 사용자에게는 필요한 언어로 답한다.</a:t>
-            </a:r>
-          </a:p>
-          <a:p>
-            <a:r>
-              <a:t>② KISS/DRY/YAGNI: 불필요한 코드·전체 재출력·재작업을 줄인다.</a:t>
-            </a:r>
-          </a:p>
-          <a:p>
-            <a:r>
-              <a:t>③ 설명 길이와 사고 예산을 과제에 맞춘다. 정확도 게이트를 함께 둔다.</a:t>
-            </a:r>
-          </a:p>
-          <a:p>
-            <a:r>
-              <a:t>④ 스펙에 결정을 먼저 적는다. 스펙 작성 비용과 실제 재작업 변화를 함께 잰다.</a:t>
-            </a:r>
-          </a:p>
-          <a:p>
-            <a:r>
-              <a:t>근거: README.md · SOURCES.md</a:t>
+              <a:t>20턴 세션에 캐싱만 걸면 $1.91(+17%) — 이력 누적은 그대로 남기 때문이다.</a:t>
+            </a:r>
+          </a:p>
+          <a:p>
+            <a:r>
+              <a:t>요약은 품질에 영향을 준다. 압축 과정에서 잃는 정보가 재작업을 만들면 절감이 상쇄된다.</a:t>
+            </a:r>
+          </a:p>
+          <a:p>
+            <a:r>
+              <a:t>주기를 바꿔 가며 재작업률과 총비용을 함께 측정할 것을 권한다.</a:t>
+            </a:r>
+          </a:p>
+          <a:p>
+            <a:r>
+              <a:t>근거: experiments/exp04_agent_loop_sdd.py</a:t>
+            </a:r>
+          </a:p>
+          <a:p>
+            <a:r>
+              <a:t>증거 범위: 비용 시나리오</a:t>
             </a:r>
           </a:p>
         </p:txBody>
@@ -898,27 +888,27 @@
           <a:lstStyle/>
           <a:p>
             <a:r>
-              <a:t>비용 시나리오</a:t>
-            </a:r>
-          </a:p>
-          <a:p>
-            <a:r>
-              <a:t>10회 수정에서 출력만 50,000 → 3,000으로 줄인다는 가정이면 94% 절감.</a:t>
-            </a:r>
-          </a:p>
-          <a:p>
-            <a:r>
-              <a:t>실제 패치가 적용되고 테스트를 통과해야 절감이 성립한다.</a:t>
-            </a:r>
-          </a:p>
-          <a:p>
-            <a:r>
-              <a:t>생성 토큰 감소를 개발 시간·품질 동등성의 실측으로 바꾸어 말하지 않는다.</a:t>
-            </a:r>
-          </a:p>
-          <a:p>
-            <a:r>
-              <a:t>근거: experiments/exp09_dry.py §A</a:t>
+              <a:t>같은 툴 작업량을 가정하고 메인·자식·요약 비용을 모두 합산한 값이다.</a:t>
+            </a:r>
+          </a:p>
+          <a:p>
+            <a:r>
+              <a:t>서브에이전트는 요약 품질과 실패·재시도 특성이 다르다. 비용만으로 우열을 단정하지 않는다.</a:t>
+            </a:r>
+          </a:p>
+          <a:p>
+            <a:r>
+              <a:t>과거의 -87%는 자식·요약을 빼고 계산한 값이어서 전체 절감으로 쓰지 않는다.</a:t>
+            </a:r>
+          </a:p>
+          <a:p>
+            <a:r>
+              <a:t>근거: experiments/exp11_tool_output_bloat.py</a:t>
+            </a:r>
+          </a:p>
+          <a:p>
+            <a:r>
+              <a:t>증거 범위: 전체 시스템 비용 시나리오</a:t>
             </a:r>
           </a:p>
         </p:txBody>
@@ -988,27 +978,27 @@
           <a:lstStyle/>
           <a:p>
             <a:r>
-              <a:t>같은 가정의 2×2 비용 비교</a:t>
-            </a:r>
-          </a:p>
-          <a:p>
-            <a:r>
-              <a:t>Sonnet 단가, 프리픽스 12,000, 100회: 첫 쓰기 + 이후 99회 캐시 읽기.</a:t>
-            </a:r>
-          </a:p>
-          <a:p>
-            <a:r>
-              <a:t>원문 캐시 $0.4014 / 절반 압축 + 캐시 $0.2007.</a:t>
-            </a:r>
-          </a:p>
-          <a:p>
-            <a:r>
-              <a:t>압축 비용·품질·최소 길이·TTL 조건을 만족해야 한다. 요약 생성 비용은 이 표 밖이다.</a:t>
-            </a:r>
-          </a:p>
-          <a:p>
-            <a:r>
-              <a:t>근거: experiments/exp09_dry.py §B</a:t>
+              <a:t>벤치마크에서 잡은 임계값을 그대로 프로덕션에 쓰면 절감이 과대 추정된다.</a:t>
+            </a:r>
+          </a:p>
+          <a:p>
+            <a:r>
+              <a:t>저볼륨에서는 라우팅 오버헤드가 절감을 상쇄한다. 반복률과 볼륨을 먼저 본다.</a:t>
+            </a:r>
+          </a:p>
+          <a:p>
+            <a:r>
+              <a:t>라우터 오류율·검출률은 이 저장소에서 측정하지 않았다. 참조 구현의 회귀 테스트만 있다.</a:t>
+            </a:r>
+          </a:p>
+          <a:p>
+            <a:r>
+              <a:t>근거: experiments/exp06_other_levers.py</a:t>
+            </a:r>
+          </a:p>
+          <a:p>
+            <a:r>
+              <a:t>증거 범위: 시나리오 (10,000콜)</a:t>
             </a:r>
           </a:p>
         </p:txBody>
@@ -1078,27 +1068,27 @@
           <a:lstStyle/>
           <a:p>
             <a:r>
-              <a:t>비용 시나리오 / exp02</a:t>
-            </a:r>
-          </a:p>
-          <a:p>
-            <a:r>
-              <a:t>출력 단가가 더 높으면, 짧은 출력 대신 조금 긴 입력이 유리할 수 있다.</a:t>
-            </a:r>
-          </a:p>
-          <a:p>
-            <a:r>
-              <a:t>입력이 늘어난 만큼 출력을 실제로 줄였는지 usage로 확인한다.</a:t>
-            </a:r>
-          </a:p>
-          <a:p>
-            <a:r>
-              <a:t>‘입력 3배·비용 66% 절감’은 exp02의 특정 토큰 가정이지 보편 실측률이 아니다.</a:t>
-            </a:r>
-          </a:p>
-          <a:p>
-            <a:r>
-              <a:t>근거: experiments/exp02_output_to_input.py</a:t>
+              <a:t>토큰 수는 그대로이고 지원 서비스에서 가격을 줄이는 레버다.</a:t>
+            </a:r>
+          </a:p>
+          <a:p>
+            <a:r>
+              <a:t>실시간 UI, 대화형 코딩 에이전트처럼 대기 화면이 있는 작업에는 쓸 수 없다.</a:t>
+            </a:r>
+          </a:p>
+          <a:p>
+            <a:r>
+              <a:t>지연·실패 처리·지원 조건(요청 수 상한, 결과 보관 기간)을 확인해야 한다.</a:t>
+            </a:r>
+          </a:p>
+          <a:p>
+            <a:r>
+              <a:t>근거: experiments/exp06_other_levers.py</a:t>
+            </a:r>
+          </a:p>
+          <a:p>
+            <a:r>
+              <a:t>증거 범위: 가격표 + 시나리오</a:t>
             </a:r>
           </a:p>
         </p:txBody>
@@ -1168,32 +1158,27 @@
           <a:lstStyle/>
           <a:p>
             <a:r>
-              <a:t>역사적 시나리오 / 수정 시나리오</a:t>
-            </a:r>
-          </a:p>
-          <a:p>
-            <a:r>
-              <a:t>기존: A 6턴 / B 2턴, 출력 확대 2.9배, effort 0.35, 한국어 사고 승수 1.44 등 가정.</a:t>
-            </a:r>
-          </a:p>
-          <a:p>
-            <a:r>
-              <a:t>기본: 사고 언어 승수는 1.0, 최소 길이 미달 캐싱은 미적용.</a:t>
-            </a:r>
-          </a:p>
-          <a:p>
-            <a:r>
-              <a:t>두 조건 모두 일부 실파일 인코딩이 포함된 비용 모형. 실제 품질 동등 A/B가 아니다.</a:t>
-            </a:r>
-          </a:p>
-          <a:p>
-            <a:r>
-              <a:t>python demo/compare_personas.py --scenario legacy 로 기존 발표 수치 재현.</a:t>
-            </a:r>
-          </a:p>
-          <a:p>
-            <a:r>
-              <a:t>근거: demo/results.json · demo/results_current.json</a:t>
+              <a:t>두 조건 모두 추정 usage와 가정으로 만든 비용 모형이다. 실제 정책 A/B가 아니다.</a:t>
+            </a:r>
+          </a:p>
+          <a:p>
+            <a:r>
+              <a:t>품질 동등성이나 완료 작업당 절감률은 검증하지 않았다.</a:t>
+            </a:r>
+          </a:p>
+          <a:p>
+            <a:r>
+              <a:t>기존 20.8배는 역사적 가정(사고 언어 승수 1.44, 캐시 최소 길이 무시)으로 보존한다.</a:t>
+            </a:r>
+          </a:p>
+          <a:p>
+            <a:r>
+              <a:t>근거: demo/compare_personas.py</a:t>
+            </a:r>
+          </a:p>
+          <a:p>
+            <a:r>
+              <a:t>증거 범위: 시나리오</a:t>
             </a:r>
           </a:p>
         </p:txBody>
@@ -1263,32 +1248,27 @@
           <a:lstStyle/>
           <a:p>
             <a:r>
-              <a:t>추정 usage의 비용 재계산</a:t>
-            </a:r>
-          </a:p>
-          <a:p>
-            <a:r>
-              <a:t>고정 usage 추정치 + GPT-5 단가: $0.07135 → $0.06540</a:t>
-            </a:r>
-          </a:p>
-          <a:p>
-            <a:r>
-              <a:t>토큰 합계 7,868 → 8,010 (+1.8%). 실제 청구 usage가 아니라 세션 추정치다.</a:t>
-            </a:r>
-          </a:p>
-          <a:p>
-            <a:r>
-              <a:t>캐시 적격성 미확인. 모든 추정 입력을 신규 입력으로 환산하면 -8.1%.</a:t>
-            </a:r>
-          </a:p>
-          <a:p>
-            <a:r>
-              <a:t>Spec은 Vibe 결과를 역산. 백지 스펙 비용·재작업 감소·품질 동등성을 검증한 것은 아니다.</a:t>
-            </a:r>
-          </a:p>
-          <a:p>
-            <a:r>
-              <a:t>근거: demo/vibe_vs_spec/usage.json · verify_ac.py</a:t>
+              <a:t>각 레버의 절감률을 순서대로 곱한 값이다. 실제 도입에서는 서로 겹치는 부분이 생긴다.</a:t>
+            </a:r>
+          </a:p>
+          <a:p>
+            <a:r>
+              <a:t>검증된 상한도 아니다. 자기 데이터로 A/B를 돌려 확정해야 한다.</a:t>
+            </a:r>
+          </a:p>
+          <a:p>
+            <a:r>
+              <a:t>발표에서는 '이론적 상한'이라는 표현보다 '순차 가정의 산술'이라고 말한다.</a:t>
+            </a:r>
+          </a:p>
+          <a:p>
+            <a:r>
+              <a:t>근거: experiments/exp06_other_levers.py</a:t>
+            </a:r>
+          </a:p>
+          <a:p>
+            <a:r>
+              <a:t>증거 범위: 순차 시나리오</a:t>
             </a:r>
           </a:p>
         </p:txBody>
@@ -1358,27 +1338,27 @@
           <a:lstStyle/>
           <a:p>
             <a:r>
-              <a:t>외부 보고의 범위 제한</a:t>
-            </a:r>
-          </a:p>
-          <a:p>
-            <a:r>
-              <a:t>Spec-Kit +97~109%: OpenSpec 대비 두 사례의 외부 블로그 보고. 둘 다 SDD 접근.</a:t>
-            </a:r>
-          </a:p>
-          <a:p>
-            <a:r>
-              <a:t>ETH AGENTS.md 연구: 저장소 컨텍스트 파일 조건. 모든 짧은 스펙이 손해라는 실험 아님.</a:t>
-            </a:r>
-          </a:p>
-          <a:p>
-            <a:r>
-              <a:t>짧고 필요한 요구사항만 쓰라는 실무 원칙은 유지하되 효과를 직접 측정한다.</a:t>
-            </a:r>
-          </a:p>
-          <a:p>
-            <a:r>
-              <a:t>근거: SOURCES.md §4 · arxiv.org/html/2602.11988v1</a:t>
+              <a:t>비교는 자동(-1) 대 미지정이다. 명시적 0과 섞으면 결론이 달라진다.</a:t>
+            </a:r>
+          </a:p>
+          <a:p>
+            <a:r>
+              <a:t>±$0.05 허용오차 통과는 미지정 6/6 · 명시적 0은 5/6이다. 정확한 숫자 채점으로는 3/6이 된다 — 동등성 증명이 아니다.</a:t>
+            </a:r>
+          </a:p>
+          <a:p>
+            <a:r>
+              <a:t>구모델의 thinkingBudget 로그는 역사적 관측으로 보존한다. 현재 API는 thinkingLevel을 쓴다.</a:t>
+            </a:r>
+          </a:p>
+          <a:p>
+            <a:r>
+              <a:t>근거: results/thinking_sweep.jsonl (30 rows)</a:t>
+            </a:r>
+          </a:p>
+          <a:p>
+            <a:r>
+              <a:t>증거 범위: 저장 API 로그 재계산</a:t>
             </a:r>
           </a:p>
         </p:txBody>
@@ -1448,27 +1428,32 @@
           <a:lstStyle/>
           <a:p>
             <a:r>
-              <a:t>참조 구현 + 반례 회귀 테스트</a:t>
-            </a:r>
-          </a:p>
-          <a:p>
-            <a:r>
-              <a:t>설계·구현·설명 목적을 파일·검색·변환 같은 부수 단어보다 먼저 본다.</a:t>
-            </a:r>
-          </a:p>
-          <a:p>
-            <a:r>
-              <a:t>구성한 반례 테스트는 회귀 검증이지 실사용 오류율 추정이 아니다.</a:t>
-            </a:r>
-          </a:p>
-          <a:p>
-            <a:r>
-              <a:t>기본 tier 단가는 모델의 공식 가격이 아니라 명시적 비용 시나리오다.</a:t>
-            </a:r>
-          </a:p>
-          <a:p>
-            <a:r>
-              <a:t>근거: agent_setup/router.py · tests/test_regressions.py</a:t>
+              <a:t>실제 청구 usage가 아니라 세션 추정치다. 절대값과 상대 차이 모두 추정 오차가 있다.</a:t>
+            </a:r>
+          </a:p>
+          <a:p>
+            <a:r>
+              <a:t>캐시 적격성은 확인하지 않았다. 전부 신규 입력으로 환산한 값도 함께 공개한다.</a:t>
+            </a:r>
+          </a:p>
+          <a:p>
+            <a:r>
+              <a:t>Spec 산출물은 Vibe 결과를 역산한 것이다. 백지 스펙 작성 비용과 재작업 감소는 통제하지 않았다.</a:t>
+            </a:r>
+          </a:p>
+          <a:p>
+            <a:r>
+              <a:t>표본 1쌍의 사례이며 일반화하지 않는다.</a:t>
+            </a:r>
+          </a:p>
+          <a:p>
+            <a:r>
+              <a:t>근거: demo/vibe_vs_spec/README.md</a:t>
+            </a:r>
+          </a:p>
+          <a:p>
+            <a:r>
+              <a:t>증거 범위: 추정 usage 재계산</a:t>
             </a:r>
           </a:p>
         </p:txBody>
@@ -1538,32 +1523,27 @@
           <a:lstStyle/>
           <a:p>
             <a:r>
-              <a:t>검증 범위</a:t>
-            </a:r>
-          </a:p>
-          <a:p>
-            <a:r>
-              <a:t>API 저장 로그: 80건 언어 비교 + 30건 사고 예산 스윕</a:t>
-            </a:r>
-          </a:p>
-          <a:p>
-            <a:r>
-              <a:t>새 로컬 실측: 대응 번역문 1,012쌍의 토크나이저 인코딩</a:t>
-            </a:r>
-          </a:p>
-          <a:p>
-            <a:r>
-              <a:t>브라우저·mock: 코드 동작 검증 / 비용 시나리오: 정책 효과 실측 아님</a:t>
-            </a:r>
-          </a:p>
-          <a:p>
-            <a:r>
-              <a:t>이번 정정의 새 유료 API 호출은 0회다.</a:t>
-            </a:r>
-          </a:p>
-          <a:p>
-            <a:r>
-              <a:t>근거: results/audit_metrics.json · tests/</a:t>
+              <a:t>다섯 원칙을 한 장으로 선요약한다. 청중이 결론을 미리 알고 들으면 뒤가 훨씬 빨리 이해된다.</a:t>
+            </a:r>
+          </a:p>
+          <a:p>
+            <a:r>
+              <a:t>원칙은 유지한다는 점을 명확히 한다. 오늘 바뀌는 것은 원칙이 아니라 숫자의 조건과 증거다.</a:t>
+            </a:r>
+          </a:p>
+          <a:p>
+            <a:r>
+              <a:t>질문이 나오면 "뒤에서 근거와 한계를 함께 말한다"고 안내하고 넘어간다.</a:t>
+            </a:r>
+          </a:p>
+          <a:p>
+            <a:r>
+              <a:t>근거: README.md</a:t>
+            </a:r>
+          </a:p>
+          <a:p>
+            <a:r>
+              <a:t>증거 범위: 결론 요약</a:t>
             </a:r>
           </a:p>
         </p:txBody>
@@ -1633,32 +1613,32 @@
           <a:lstStyle/>
           <a:p>
             <a:r>
-              <a:t>오프라인 회귀·변조 테스트</a:t>
-            </a:r>
-          </a:p>
-          <a:p>
-            <a:r>
-              <a:t>슬라이드 240 → 999 변조를 거부: 실제 PPTX의 모든 텍스트와 생성 근거를 대조.</a:t>
-            </a:r>
-          </a:p>
-          <a:p>
-            <a:r>
-              <a:t>모바일 1열 → 2열 변조, 동작 없는 메모 HTML을 브라우저 AC가 거부.</a:t>
-            </a:r>
-          </a:p>
-          <a:p>
-            <a:r>
-              <a:t>실패 assertion은 exit 1. shell pipefail로 파이프 뒤에서도 실패를 보존.</a:t>
-            </a:r>
-          </a:p>
-          <a:p>
-            <a:r>
-              <a:t>mock은 요청 구조·계산 검증일 뿐 새 live 측정으로 소개하지 않는다.</a:t>
-            </a:r>
-          </a:p>
-          <a:p>
-            <a:r>
-              <a:t>근거: tests/ · tools/verify_deck.py · tools/browser_ac.py</a:t>
+              <a:t>문자열 검사는 동작을 보증하지 않는다. 그래서 실제 브라우저 렌더링을 검사한다.</a:t>
+            </a:r>
+          </a:p>
+          <a:p>
+            <a:r>
+              <a:t>변조 반례(모바일을 2열로 바꾼 HTML)를 넣어 검사가 실제로 실패하는지도 확인했다.</a:t>
+            </a:r>
+          </a:p>
+          <a:p>
+            <a:r>
+              <a:t>브라우저가 없으면 PASS가 아니라 UNVERIFIED로 종료한다. 검사 항목 수는 실행 로그에 있다.</a:t>
+            </a:r>
+          </a:p>
+          <a:p>
+            <a:r>
+              <a:t>디자인 선호와 품질 동등성은 검증 대상이 아니다.</a:t>
+            </a:r>
+          </a:p>
+          <a:p>
+            <a:r>
+              <a:t>근거: demo/vibe_vs_spec/verify_ac.py</a:t>
+            </a:r>
+          </a:p>
+          <a:p>
+            <a:r>
+              <a:t>증거 범위: 실동작 검사 (Chromium)</a:t>
             </a:r>
           </a:p>
         </p:txBody>
@@ -1728,32 +1708,27 @@
           <a:lstStyle/>
           <a:p>
             <a:r>
-              <a:t>재현 자료</a:t>
-            </a:r>
-          </a:p>
-          <a:p>
-            <a:r>
-              <a:t>results/audit_metrics.json: 저장 로그 통계 + 로컬 측정 + 시나리오를 분리한 지표.</a:t>
-            </a:r>
-          </a:p>
-          <a:p>
-            <a:r>
-              <a:t>docs/CORRECTIONS.md: 무엇을 유지하고 무엇을 바꿨는지 상세 설명.</a:t>
-            </a:r>
-          </a:p>
-          <a:p>
-            <a:r>
-              <a:t>SOURCES.md: 공식 단가, 논문 표, 외부 케이스의 비교 조건.</a:t>
-            </a:r>
-          </a:p>
-          <a:p>
-            <a:r>
-              <a:t>원본 110행은 보존. 없는 원자료를 재측정 없이 만들어 넣지 않는다.</a:t>
-            </a:r>
-          </a:p>
-          <a:p>
-            <a:r>
-              <a:t>근거: python tools/reproduce_audit.py · python tools/verify_deck.py</a:t>
+              <a:t>난이도는 되돌리기 쉬운 순서이기도 하다. 앞의 3개는 설정 변경으로 시작할 수 있다.</a:t>
+            </a:r>
+          </a:p>
+          <a:p>
+            <a:r>
+              <a:t>라우팅과 시맨틱 캐시는 품질 측정 도구가 있어야 안전하다.</a:t>
+            </a:r>
+          </a:p>
+          <a:p>
+            <a:r>
+              <a:t>우선순위 표에 적힌 조건(모델별 최소 프리픽스 길이 등)을 실제로 확인하고 켠다.</a:t>
+            </a:r>
+          </a:p>
+          <a:p>
+            <a:r>
+              <a:t>근거: experiments/exp06_other_levers.py</a:t>
+            </a:r>
+          </a:p>
+          <a:p>
+            <a:r>
+              <a:t>증거 범위: 적용 순서</a:t>
             </a:r>
           </a:p>
         </p:txBody>
@@ -1823,27 +1798,27 @@
           <a:lstStyle/>
           <a:p>
             <a:r>
-              <a:t>다음 실행</a:t>
-            </a:r>
-          </a:p>
-          <a:p>
-            <a:r>
-              <a:t>주장은 유지한다: 불필요한 생성·사고·재전송은 줄일 가치가 있다.</a:t>
-            </a:r>
-          </a:p>
-          <a:p>
-            <a:r>
-              <a:t>배수는 모델·단가·과제·시나리오에 붙여 말한다. 절감만으로 품질을 대신하지 않는다.</a:t>
-            </a:r>
-          </a:p>
-          <a:p>
-            <a:r>
-              <a:t>정확도·재작업·총비용을 함께 측정해 실제 배포 정책을 선택한다.</a:t>
+              <a:t>오늘 배운 것을 다 적용하지 말고 되돌리기 쉬운 것 하나만 켜고 재측정한다.</a:t>
+            </a:r>
+          </a:p>
+          <a:p>
+            <a:r>
+              <a:t>절감률은 자기 데이터에서 나온 값이어야 한다. 이 자료의 숫자는 출발점이다.</a:t>
+            </a:r>
+          </a:p>
+          <a:p>
+            <a:r>
+              <a:t>발표 자료의 근거·한계·정정 이력은 저장소 문서에 그대로 남아 있다.</a:t>
             </a:r>
           </a:p>
           <a:p>
             <a:r>
               <a:t>근거: github.com/giyeop-cody/token-cost-lab</a:t>
+            </a:r>
+          </a:p>
+          <a:p>
+            <a:r>
+              <a:t>증거 범위: 마무리</a:t>
             </a:r>
           </a:p>
         </p:txBody>
@@ -1913,32 +1888,27 @@
           <a:lstStyle/>
           <a:p>
             <a:r>
-              <a:t>공식 가격 확인: 2026-09-20</a:t>
-            </a:r>
-          </a:p>
-          <a:p>
-            <a:r>
-              <a:t>Gemini 3.1 Flash-Lite · Standard text · USD / 1M tokens</a:t>
-            </a:r>
-          </a:p>
-          <a:p>
-            <a:r>
-              <a:t>출력에는 thoughtsTokenCount + candidatesTokenCount를 포함한다.</a:t>
-            </a:r>
-          </a:p>
-          <a:p>
-            <a:r>
-              <a:t>기존 $1.25/$10은 발표 환산 가정으로 보존한다. Flash-Lite 공식 과거 가격이라는 뜻은 아니다.</a:t>
-            </a:r>
-          </a:p>
-          <a:p>
-            <a:r>
-              <a:t>usage × 리스트 단가는 청구서가 아니다. 무료 티어·계약·세금·도구료는 별도.</a:t>
-            </a:r>
-          </a:p>
-          <a:p>
-            <a:r>
-              <a:t>근거: ai.google.dev/gemini-api/docs/pricing · lab/pricing.py</a:t>
+              <a:t>입력은 한 번에 병렬 처리되고 출력은 한 토큰씩 생성되기 때문에 단가가 다르다.</a:t>
+            </a:r>
+          </a:p>
+          <a:p>
+            <a:r>
+              <a:t>캐시 읽기 단가는 입력의 0.1배 수준(모델별로 다름)이다. 이 비대칭이 오늘 전략의 근거다.</a:t>
+            </a:r>
+          </a:p>
+          <a:p>
+            <a:r>
+              <a:t>가격은 공개 리스트 기준이며 계약·무료 티어·세금·도구 비용은 별도다. 실제 청구서로 검증해야 한다.</a:t>
+            </a:r>
+          </a:p>
+          <a:p>
+            <a:r>
+              <a:t>근거: experiments/exp02_output_to_input.py</a:t>
+            </a:r>
+          </a:p>
+          <a:p>
+            <a:r>
+              <a:t>증거 범위: 가격표 실측</a:t>
             </a:r>
           </a:p>
         </p:txBody>
@@ -2008,32 +1978,32 @@
           <a:lstStyle/>
           <a:p>
             <a:r>
-              <a:t>새 로컬 토크나이저 실측</a:t>
-            </a:r>
-          </a:p>
-          <a:p>
-            <a:r>
-              <a:t>o200k_base: EN 26,873 → KO 39,566</a:t>
-            </a:r>
-          </a:p>
-          <a:p>
-            <a:r>
-              <a:t>cl100k_base: EN 27,182 → KO 64,338</a:t>
-            </a:r>
-          </a:p>
-          <a:p>
-            <a:r>
-              <a:t>FLORES-200 devtest의 대응 번역 1,012쌍 전부를 문장별 인코딩, 토큰 합계의 비율.</a:t>
-            </a:r>
-          </a:p>
-          <a:p>
-            <a:r>
-              <a:t>동일 단가에서의 토큰 비용 이점을 지지한다. Gemini·Claude 배수로 옮기지 않는다.</a:t>
-            </a:r>
-          </a:p>
-          <a:p>
-            <a:r>
-              <a:t>근거: tools/parallel_tokenizer_bench.py · FLORES-200 devtest · NLLB Team (2022)</a:t>
+              <a:t>숫자는 토큰 합계의 비율이다. 대응 번역문이므로 '같은 내용'이라는 전제가 성립한다.</a:t>
+            </a:r>
+          </a:p>
+          <a:p>
+            <a:r>
+              <a:t>이 배수를 그대로 비용으로 환산하지 않는다. 실제 비용은 생성 길이와 사고량이 함께 결정한다.</a:t>
+            </a:r>
+          </a:p>
+          <a:p>
+            <a:r>
+              <a:t>반례도 있다: 모델·과제·언어별로 효과가 다르다. 자기 워크로드로 다시 측정하는 것이 결론이다.</a:t>
+            </a:r>
+          </a:p>
+          <a:p>
+            <a:r>
+              <a:t>답변 언어를 바꾸라고 말하는 것이 아니라, 내부 추론 단계에서 영어 활용을 권하는 것이다.</a:t>
+            </a:r>
+          </a:p>
+          <a:p>
+            <a:r>
+              <a:t>근거: tools/parallel_tokenizer_bench.py · FLORES-200 devtest</a:t>
+            </a:r>
+          </a:p>
+          <a:p>
+            <a:r>
+              <a:t>증거 범위: 로컬 토크나이저 실측</a:t>
             </a:r>
           </a:p>
         </p:txBody>
@@ -2103,27 +2073,27 @@
           <a:lstStyle/>
           <a:p>
             <a:r>
-              <a:t>문자 수 실측 / 해석 제한</a:t>
-            </a:r>
-          </a:p>
-          <a:p>
-            <a:r>
-              <a:t>대응 번역문인데 한국어 문자는 약 절반이다.</a:t>
-            </a:r>
-          </a:p>
-          <a:p>
-            <a:r>
-              <a:t>$/1,000자는 문자 단위 지표이며 언어 간 의미량을 맞춘 지표가 아니다.</a:t>
-            </a:r>
-          </a:p>
-          <a:p>
-            <a:r>
-              <a:t>‘한국어가 일을 덜 했다’는 결론은 글자 수만으로 낼 수 없다.</a:t>
-            </a:r>
-          </a:p>
-          <a:p>
-            <a:r>
-              <a:t>근거: tools/parallel_tokenizer_bench.py · FLORES-200 devtest · NLLB Team (2022)</a:t>
+              <a:t>같은 결과물을 세 가지 설명 스타일로 생성해 인코딩 토큰을 측정한 값이다(보통 90토큰, 장황 342토큰).</a:t>
+            </a:r>
+          </a:p>
+          <a:p>
+            <a:r>
+              <a:t>품질·정확도 동등성을 별도로 검정한 것은 아니다. 어려운 작업에서는 설명이 검증에 필요할 수 있다.</a:t>
+            </a:r>
+          </a:p>
+          <a:p>
+            <a:r>
+              <a:t>발표에서는 '실무 기준선은 자기 작업에서 재측정'을 반드시 덧붙인다.</a:t>
+            </a:r>
+          </a:p>
+          <a:p>
+            <a:r>
+              <a:t>근거: experiments/exp05_verbosity_effort.py</a:t>
+            </a:r>
+          </a:p>
+          <a:p>
+            <a:r>
+              <a:t>증거 범위: 인코딩 실측</a:t>
             </a:r>
           </a:p>
         </p:txBody>
@@ -2193,32 +2163,27 @@
           <a:lstStyle/>
           <a:p>
             <a:r>
-              <a:t>저장 API usage 재계산</a:t>
-            </a:r>
-          </a:p>
-          <a:p>
-            <a:r>
-              <a:t>reason / Standard: KO/EN 호출당 0.729×</a:t>
-            </a:r>
-          </a:p>
-          <a:p>
-            <a:r>
-              <a:t>reason / 기존 환산: 호출당 0.728×, 문자당 1.36×</a:t>
-            </a:r>
-          </a:p>
-          <a:p>
-            <a:r>
-              <a:t>같은 입력 과제라도 생성 내용·답의 품질·추론 언어까지 같다고 확인하지 않았다.</a:t>
-            </a:r>
-          </a:p>
-          <a:p>
-            <a:r>
-              <a:t>실험은 과제 2개 × 언어 2개 × 20회 반복이다. 일반 언어 벤치마크가 아니다.</a:t>
-            </a:r>
-          </a:p>
-          <a:p>
-            <a:r>
-              <a:t>근거: results/live_lang_thinking.jsonl (80 rows) · tools/stats_test.py</a:t>
+              <a:t>사고 토큰은 눈에 안 보이지만 출력 단가로 청구된다. 단계별 비용은 사고량 가정의 시나리오다.</a:t>
+            </a:r>
+          </a:p>
+          <a:p>
+            <a:r>
+              <a:t>effort를 낮추면 어려운 작업의 정확도가 떨어질 수 있다. '전부 낮춰라'가 아니라 '작업에 맞춰라'다.</a:t>
+            </a:r>
+          </a:p>
+          <a:p>
+            <a:r>
+              <a:t>정확도 게이트를 함께 두고 배분표를 만들 것을 권한다.</a:t>
+            </a:r>
+          </a:p>
+          <a:p>
+            <a:r>
+              <a:t>근거: experiments/exp05_verbosity_effort.py</a:t>
+            </a:r>
+          </a:p>
+          <a:p>
+            <a:r>
+              <a:t>증거 범위: 시나리오 (사고 토큰 가정)</a:t>
             </a:r>
           </a:p>
         </p:txBody>
@@ -2288,32 +2253,27 @@
           <a:lstStyle/>
           <a:p>
             <a:r>
-              <a:t>외부 연구 결과 / 자체 재현 아님</a:t>
-            </a:r>
-          </a:p>
-          <a:p>
-            <a:r>
-              <a:t>Language Matters (2025), 표 1: 한국어 MATH-500 입력, 영어 / 한국어 prefilling</a:t>
-            </a:r>
-          </a:p>
-          <a:p>
-            <a:r>
-              <a:t>평가한 네 모델 평균. 모델별 차이가 크며 모든 모델·도메인의 우위는 아니다.</a:t>
-            </a:r>
-          </a:p>
-          <a:p>
-            <a:r>
-              <a:t>저장소의 사고 토큰 수가 많다는 사실만으로 ‘더 깊거나 정확하다’고 증명하지 않는다.</a:t>
-            </a:r>
-          </a:p>
-          <a:p>
-            <a:r>
-              <a:t>영어 활용 권장은 유지하되 자기 과제의 정확도·비용으로 확인한다.</a:t>
-            </a:r>
-          </a:p>
-          <a:p>
-            <a:r>
-              <a:t>근거: arxiv.org/html/2505.17407v1#S4.T1 · SOURCES.md</a:t>
+              <a:t>40턴→12턴 감소는 모델의 입력 가정이지 관측이 아니다. 실제 턴 감소는 미측정이다.</a:t>
+            </a:r>
+          </a:p>
+          <a:p>
+            <a:r>
+              <a:t>예열 캐시를 가정하면 71.0%가 나오지만, 기본값은 사이클마다 첫 쓰기 비용을 포함한 68.7%다.</a:t>
+            </a:r>
+          </a:p>
+          <a:p>
+            <a:r>
+              <a:t>외부 반례: 저장소 컨텍스트 파일을 자동 생성하면 비용이 늘고 성공률이 떨어진 조건도 보고됐다. 결론은 '짧고 결정만'.</a:t>
+            </a:r>
+          </a:p>
+          <a:p>
+            <a:r>
+              <a:t>근거: experiments/exp04_agent_loop_sdd.py</a:t>
+            </a:r>
+          </a:p>
+          <a:p>
+            <a:r>
+              <a:t>증거 범위: 비용 시나리오 (턴 가정)</a:t>
             </a:r>
           </a:p>
         </p:txBody>
@@ -2383,32 +2343,27 @@
           <a:lstStyle/>
           <a:p>
             <a:r>
-              <a:t>저장 로그 + 두 단가의 재계산</a:t>
-            </a:r>
-          </a:p>
-          <a:p>
-            <a:r>
-              <a:t>자동(-1) / 미지정 비교. 같은 문제를 조건당 6번 실행한 저장 로그.</a:t>
-            </a:r>
-          </a:p>
-          <a:p>
-            <a:r>
-              <a:t>±$0.05 허용오차 통과는 각각 6/6. 일반 정확도의 동등성 증명은 아니다.</a:t>
-            </a:r>
-          </a:p>
-          <a:p>
-            <a:r>
-              <a:t>자동 / 명시적 0은 Standard 195.97배. 명시적 0은 5/6.</a:t>
-            </a:r>
-          </a:p>
-          <a:p>
-            <a:r>
-              <a:t>240배 메시지는 기존 환산 단가라는 조건을 붙여 유지한다.</a:t>
-            </a:r>
-          </a:p>
-          <a:p>
-            <a:r>
-              <a:t>근거: results/thinking_sweep.jsonl (30 rows) · tools/thinking_sweep.py</a:t>
+              <a:t>에이전트 비용은 턴 수의 2차 함수다. '한 번 더 물어보기'가 싼 행동이 아니다.</a:t>
+            </a:r>
+          </a:p>
+          <a:p>
+            <a:r>
+              <a:t>추상화 레이어 3개를 미리 만든 경우 20턴 세션에서 추가 재전송 비용 $0.270이 붙는다(가정).</a:t>
+            </a:r>
+          </a:p>
+          <a:p>
+            <a:r>
+              <a:t>턴을 줄이는 가장 확실한 수단은 요구사항을 먼저 확정하는 것이다.</a:t>
+            </a:r>
+          </a:p>
+          <a:p>
+            <a:r>
+              <a:t>근거: experiments/exp04_agent_loop_sdd.py</a:t>
+            </a:r>
+          </a:p>
+          <a:p>
+            <a:r>
+              <a:t>증거 범위: 비용 시나리오</a:t>
             </a:r>
           </a:p>
         </p:txBody>
@@ -2478,32 +2433,27 @@
           <a:lstStyle/>
           <a:p>
             <a:r>
-              <a:t>채점 기준·표본 한계 공개</a:t>
-            </a:r>
-          </a:p>
-          <a:p>
-            <a:r>
-              <a:t>순서: 미지정 / 명시적 0 / 512 / 2048 / 자동(-1), ±$0.05 기준</a:t>
-            </a:r>
-          </a:p>
-          <a:p>
-            <a:r>
-              <a:t>정확히 $38.016 기준은 각각 6/6 · 5/6 · 1/6 · 4/6 · 3/6.</a:t>
-            </a:r>
-          </a:p>
-          <a:p>
-            <a:r>
-              <a:t>6/6의 Wilson 95% 구간도 약 61–100%다. 동등성 검정이 아니다.</a:t>
-            </a:r>
-          </a:p>
-          <a:p>
-            <a:r>
-              <a:t>512 조건은 모두 STOP, 사고 127–154 토큰. ‘예산에 잘려 오답’이라는 원인은 미확인.</a:t>
-            </a:r>
-          </a:p>
-          <a:p>
-            <a:r>
-              <a:t>근거: results/thinking_sweep.jsonl (30 rows) · tools/thinking_sweep.py</a:t>
+              <a:t>고정 20,000 + 가변 1,000 + 출력 1,500, Sonnet 단가, 100콜 조건의 계산이다.</a:t>
+            </a:r>
+          </a:p>
+          <a:p>
+            <a:r>
+              <a:t>히트율은 가정값이다. 실제 값은 자기 usage의 cache_read 필드로 측정해야 한다.</a:t>
+            </a:r>
+          </a:p>
+          <a:p>
+            <a:r>
+              <a:t>저장료·TTL·최소 길이는 모델별로 다르다. 미확인 기준은 할인 가정을 하지 않는다.</a:t>
+            </a:r>
+          </a:p>
+          <a:p>
+            <a:r>
+              <a:t>근거: experiments/exp03_prompt_caching.py</a:t>
+            </a:r>
+          </a:p>
+          <a:p>
+            <a:r>
+              <a:t>증거 범위: 비용 시나리오 (100콜)</a:t>
             </a:r>
           </a:p>
         </p:txBody>
@@ -5627,7 +5577,7 @@
                 <a:ea typeface="NanumGothic"/>
                 <a:cs typeface="NanumGothic"/>
               </a:rPr>
-              <a:t>2026-09-20 정정판</a:t>
+              <a:t>발표 · 2026-09-20</a:t>
             </a:r>
           </a:p>
         </p:txBody>
@@ -5699,7 +5649,7 @@
                 <a:ea typeface="NanumGothic"/>
                 <a:cs typeface="NanumGothic"/>
               </a:rPr>
-              <a:t>주장은 유지. 근거는 정확하게.</a:t>
+              <a:t>같은 결과물, 다른 청구서</a:t>
             </a:r>
           </a:p>
         </p:txBody>
@@ -5735,7 +5685,7 @@
                 <a:ea typeface="NanumGothic"/>
                 <a:cs typeface="NanumGothic"/>
               </a:rPr>
-              <a:t>영어 활용 · KISS/DRY/YAGNI · 설명 최소화 · 결정된 스펙 주입</a:t>
+              <a:t>모델은 세 가지로 청구한다 — 입력 · 출력 · 사고</a:t>
             </a:r>
           </a:p>
         </p:txBody>
@@ -5771,7 +5721,7 @@
                 <a:ea typeface="NanumGothic"/>
                 <a:cs typeface="NanumGothic"/>
               </a:rPr>
-              <a:t>불필요한 출력·사고·재전송을 줄이면 비용을 낮출 수 있다.</a:t>
+              <a:t>오늘은 그 청구서를 줄이는 습관 다섯 가지를 다룬다</a:t>
             </a:r>
           </a:p>
         </p:txBody>
@@ -5807,7 +5757,7 @@
                 <a:ea typeface="NanumGothic"/>
                 <a:cs typeface="NanumGothic"/>
               </a:rPr>
-              <a:t>이 자료는 실측, 로그 재계산, 비용 시나리오를 구분한다.</a:t>
+              <a:t>숫자는 실측 · 로그 재계산 · 가정 시나리오를 구분해 말한다</a:t>
             </a:r>
           </a:p>
         </p:txBody>
@@ -5843,7 +5793,7 @@
                 <a:ea typeface="NanumGothic"/>
                 <a:cs typeface="NanumGothic"/>
               </a:rPr>
-              <a:t>github.com/giyeop-cody/token-cost-lab · docs/CORRECTIONS.md</a:t>
+              <a:t>github.com/giyeop-cody/token-cost-lab</a:t>
             </a:r>
           </a:p>
         </p:txBody>
@@ -6020,7 +5970,7 @@
                 <a:ea typeface="NanumGothic"/>
                 <a:cs typeface="NanumGothic"/>
               </a:rPr>
-              <a:t>통계 구현 교정</a:t>
+              <a:t>비용 시나리오</a:t>
             </a:r>
           </a:p>
         </p:txBody>
@@ -6056,7 +6006,7 @@
                 <a:ea typeface="NanumGothic"/>
                 <a:cs typeface="NanumGothic"/>
               </a:rPr>
-              <a:t>Welch 검정은 t분포를 쓴다</a:t>
+              <a:t>캐시를 깨는 한 줄</a:t>
             </a:r>
           </a:p>
         </p:txBody>
@@ -6092,7 +6042,7 @@
                 <a:ea typeface="NanumGothic"/>
                 <a:cs typeface="NanumGothic"/>
               </a:rPr>
-              <a:t>t = 6.188 · 자유도 = 35.713</a:t>
+              <a:t>$10.05 (17.5% 더 지출)</a:t>
             </a:r>
           </a:p>
         </p:txBody>
@@ -6128,7 +6078,7 @@
                 <a:ea typeface="NanumGothic"/>
                 <a:cs typeface="NanumGothic"/>
               </a:rPr>
-              <a:t>reason / 문자당 / 기존 단가: 정규근사 6.08e-10 → Welch 4.02e-07</a:t>
+              <a:t>맨 앞의 타임스탬프·요청 ID는 매번 미스로 만든다</a:t>
             </a:r>
           </a:p>
         </p:txBody>
@@ -6164,7 +6114,7 @@
                 <a:ea typeface="NanumGothic"/>
                 <a:cs typeface="NanumGothic"/>
               </a:rPr>
-              <a:t>평균 차이의 표준오차를 표본에서 추정하므로 정규분포보다 꼬리가 두꺼운 t분포를 사용.</a:t>
+              <a:t>변하는 값은 반드시 뒤로 보낸다</a:t>
             </a:r>
           </a:p>
         </p:txBody>
@@ -6200,50 +6150,14 @@
                 <a:ea typeface="NanumGothic"/>
                 <a:cs typeface="NanumGothic"/>
               </a:rPr>
-              <a:t>p = 2 × t.sf(|t|, df). 1-CDF는 작은 꼬리에서 정밀도를 잃을 수 있다.</a:t>
-            </a:r>
-          </a:p>
-        </p:txBody>
-      </p:sp>
-      <p:sp>
-        <p:nvSpPr>
-          <p:cNvPr id="10" name="audit:body-3"/>
-          <p:cNvSpPr txBox="1"/>
-          <p:nvPr/>
-        </p:nvSpPr>
-        <p:spPr>
-          <a:xfrm>
-            <a:off x="777240" y="4782312"/>
-            <a:ext cx="10652760" cy="612648"/>
-          </a:xfrm>
-          <a:prstGeom prst="rect">
-            <a:avLst/>
-          </a:prstGeom>
-          <a:noFill/>
-        </p:spPr>
-        <p:txBody>
-          <a:bodyPr wrap="square" lIns="0" rIns="0" tIns="0" bIns="0">
-            <a:spAutoFit/>
-          </a:bodyPr>
-          <a:lstStyle/>
-          <a:p>
-            <a:r>
-              <a:rPr sz="1750" b="0">
-                <a:solidFill>
-                  <a:srgbClr val="ECF1F6"/>
-                </a:solidFill>
-                <a:latin typeface="NanumGothic"/>
-                <a:ea typeface="NanumGothic"/>
-                <a:cs typeface="NanumGothic"/>
-              </a:rPr>
-              <a:t>p값은 수정해야 한다. 유의성의 소멸을 뜻하지는 않는다.</a:t>
-            </a:r>
-          </a:p>
-        </p:txBody>
-      </p:sp>
-      <p:sp>
-        <p:nvSpPr>
-          <p:cNvPr id="11" name="audit:source"/>
+              <a:t>미스 상태의 캐싱은 안 쓰느니만 못하다</a:t>
+            </a:r>
+          </a:p>
+        </p:txBody>
+      </p:sp>
+      <p:sp>
+        <p:nvSpPr>
+          <p:cNvPr id="10" name="audit:source"/>
           <p:cNvSpPr txBox="1"/>
           <p:nvPr/>
         </p:nvSpPr>
@@ -6272,14 +6186,14 @@
                 <a:ea typeface="NanumGothic"/>
                 <a:cs typeface="NanumGothic"/>
               </a:rPr>
-              <a:t>tools/stats_test.py · scipy.stats.ttest_ind(equal_var=False) 회귀 대조</a:t>
-            </a:r>
-          </a:p>
-        </p:txBody>
-      </p:sp>
-      <p:sp>
-        <p:nvSpPr>
-          <p:cNvPr id="12" name="audit:footer"/>
+              <a:t>experiments/exp03_prompt_caching.py</a:t>
+            </a:r>
+          </a:p>
+        </p:txBody>
+      </p:sp>
+      <p:sp>
+        <p:nvSpPr>
+          <p:cNvPr id="11" name="audit:footer"/>
           <p:cNvSpPr txBox="1"/>
           <p:nvPr/>
         </p:nvSpPr>
@@ -6449,7 +6363,7 @@
                 <a:ea typeface="NanumGothic"/>
                 <a:cs typeface="NanumGothic"/>
               </a:rPr>
-              <a:t>유의성 ≠ 의미량·추론 품질 증명</a:t>
+              <a:t>비용 시나리오</a:t>
             </a:r>
           </a:p>
         </p:txBody>
@@ -6485,7 +6399,7 @@
                 <a:ea typeface="NanumGothic"/>
                 <a:cs typeface="NanumGothic"/>
               </a:rPr>
-              <a:t>교정 후에도 비용 차이의 유의성은 유지</a:t>
+              <a:t>압축과 캐싱은 대체재가 아니다</a:t>
             </a:r>
           </a:p>
         </p:txBody>
@@ -6521,7 +6435,7 @@
                 <a:ea typeface="NanumGothic"/>
                 <a:cs typeface="NanumGothic"/>
               </a:rPr>
-              <a:t>네 비교 모두 Bonferroni(4) 통과</a:t>
+              <a:t>$0.4014 → $0.2007 (94% 절감)</a:t>
             </a:r>
           </a:p>
         </p:txBody>
@@ -6557,7 +6471,7 @@
                 <a:ea typeface="NanumGothic"/>
                 <a:cs typeface="NanumGothic"/>
               </a:rPr>
-              <a:t>explain 호출당: p = 1.60e-03</a:t>
+              <a:t>그냥 캐싱 $0.4014 vs 절반 요약 $1.8000</a:t>
             </a:r>
           </a:p>
         </p:txBody>
@@ -6593,7 +6507,7 @@
                 <a:ea typeface="NanumGothic"/>
                 <a:cs typeface="NanumGothic"/>
               </a:rPr>
-              <a:t>explain 문자당: p = 3.00e-10</a:t>
+              <a:t>지울 수 있는 반복은 지우고, 지울 수 없는 반복은 고정해 캐시에 태운다</a:t>
             </a:r>
           </a:p>
         </p:txBody>
@@ -6629,50 +6543,14 @@
                 <a:ea typeface="NanumGothic"/>
                 <a:cs typeface="NanumGothic"/>
               </a:rPr>
-              <a:t>reason 호출당: p = 7.80e-04</a:t>
-            </a:r>
-          </a:p>
-        </p:txBody>
-      </p:sp>
-      <p:sp>
-        <p:nvSpPr>
-          <p:cNvPr id="10" name="audit:body-3"/>
-          <p:cNvSpPr txBox="1"/>
-          <p:nvPr/>
-        </p:nvSpPr>
-        <p:spPr>
-          <a:xfrm>
-            <a:off x="777240" y="4782312"/>
-            <a:ext cx="10652760" cy="612648"/>
-          </a:xfrm>
-          <a:prstGeom prst="rect">
-            <a:avLst/>
-          </a:prstGeom>
-          <a:noFill/>
-        </p:spPr>
-        <p:txBody>
-          <a:bodyPr wrap="square" lIns="0" rIns="0" tIns="0" bIns="0">
-            <a:spAutoFit/>
-          </a:bodyPr>
-          <a:lstStyle/>
-          <a:p>
-            <a:r>
-              <a:rPr sz="1750" b="0">
-                <a:solidFill>
-                  <a:srgbClr val="ECF1F6"/>
-                </a:solidFill>
-                <a:latin typeface="NanumGothic"/>
-                <a:ea typeface="NanumGothic"/>
-                <a:cs typeface="NanumGothic"/>
-              </a:rPr>
-              <a:t>reason 문자당: p = 4.02e-07 — 모두 기존 $1.25/$10 단가. 반복 호출의 조건부 검정.</a:t>
-            </a:r>
-          </a:p>
-        </p:txBody>
-      </p:sp>
-      <p:sp>
-        <p:nvSpPr>
-          <p:cNvPr id="11" name="audit:source"/>
+              <a:t>압축률이 높을수록 조합의 이득도 커진다</a:t>
+            </a:r>
+          </a:p>
+        </p:txBody>
+      </p:sp>
+      <p:sp>
+        <p:nvSpPr>
+          <p:cNvPr id="10" name="audit:source"/>
           <p:cNvSpPr txBox="1"/>
           <p:nvPr/>
         </p:nvSpPr>
@@ -6701,14 +6579,14 @@
                 <a:ea typeface="NanumGothic"/>
                 <a:cs typeface="NanumGothic"/>
               </a:rPr>
-              <a:t>results/live_lang_thinking.jsonl (80 rows) · tools/stats_test.py</a:t>
-            </a:r>
-          </a:p>
-        </p:txBody>
-      </p:sp>
-      <p:sp>
-        <p:nvSpPr>
-          <p:cNvPr id="12" name="audit:footer"/>
+              <a:t>experiments/exp09_dry.py</a:t>
+            </a:r>
+          </a:p>
+        </p:txBody>
+      </p:sp>
+      <p:sp>
+        <p:nvSpPr>
+          <p:cNvPr id="11" name="audit:footer"/>
           <p:cNvSpPr txBox="1"/>
           <p:nvPr/>
         </p:nvSpPr>
@@ -6878,7 +6756,7 @@
                 <a:ea typeface="NanumGothic"/>
                 <a:cs typeface="NanumGothic"/>
               </a:rPr>
-              <a:t>실무 권장 / 조건부 효과</a:t>
+              <a:t>비용 시나리오</a:t>
             </a:r>
           </a:p>
         </p:txBody>
@@ -6914,7 +6792,7 @@
                 <a:ea typeface="NanumGothic"/>
                 <a:cs typeface="NanumGothic"/>
               </a:rPr>
-              <a:t>네 가지 원칙은 그대로 쓴다</a:t>
+              <a:t>긴 세션은 컴팩션으로 접는다</a:t>
             </a:r>
           </a:p>
         </p:txBody>
@@ -6950,7 +6828,7 @@
                 <a:ea typeface="NanumGothic"/>
                 <a:cs typeface="NanumGothic"/>
               </a:rPr>
-              <a:t>필요한 결과만, 적합한 설정으로</a:t>
+              <a:t>$2.32 → $0.93 (60% 절감)</a:t>
             </a:r>
           </a:p>
         </p:txBody>
@@ -6986,7 +6864,7 @@
                 <a:ea typeface="NanumGothic"/>
                 <a:cs typeface="NanumGothic"/>
               </a:rPr>
-              <a:t>① 영어는 토큰 효율과 추론 정확도에 유리할 수 있다. 사용자에게는 필요한 언어로 답한다.</a:t>
+              <a:t>10턴마다 접으면 $1.23 (47% 절감)</a:t>
             </a:r>
           </a:p>
         </p:txBody>
@@ -7022,7 +6900,7 @@
                 <a:ea typeface="NanumGothic"/>
                 <a:cs typeface="NanumGothic"/>
               </a:rPr>
-              <a:t>② KISS/DRY/YAGNI: 불필요한 코드·전체 재출력·재작업을 줄인다.</a:t>
+              <a:t>너무 자주 접으면 요약 호출이 이득을 먹는다</a:t>
             </a:r>
           </a:p>
         </p:txBody>
@@ -7058,50 +6936,14 @@
                 <a:ea typeface="NanumGothic"/>
                 <a:cs typeface="NanumGothic"/>
               </a:rPr>
-              <a:t>③ 설명 길이와 사고 예산을 과제에 맞춘다. 정확도 게이트를 함께 둔다.</a:t>
-            </a:r>
-          </a:p>
-        </p:txBody>
-      </p:sp>
-      <p:sp>
-        <p:nvSpPr>
-          <p:cNvPr id="10" name="audit:body-3"/>
-          <p:cNvSpPr txBox="1"/>
-          <p:nvPr/>
-        </p:nvSpPr>
-        <p:spPr>
-          <a:xfrm>
-            <a:off x="777240" y="4782312"/>
-            <a:ext cx="10652760" cy="612648"/>
-          </a:xfrm>
-          <a:prstGeom prst="rect">
-            <a:avLst/>
-          </a:prstGeom>
-          <a:noFill/>
-        </p:spPr>
-        <p:txBody>
-          <a:bodyPr wrap="square" lIns="0" rIns="0" tIns="0" bIns="0">
-            <a:spAutoFit/>
-          </a:bodyPr>
-          <a:lstStyle/>
-          <a:p>
-            <a:r>
-              <a:rPr sz="1750" b="0">
-                <a:solidFill>
-                  <a:srgbClr val="ECF1F6"/>
-                </a:solidFill>
-                <a:latin typeface="NanumGothic"/>
-                <a:ea typeface="NanumGothic"/>
-                <a:cs typeface="NanumGothic"/>
-              </a:rPr>
-              <a:t>④ 스펙에 결정을 먼저 적는다. 스펙 작성 비용과 실제 재작업 변화를 함께 잰다.</a:t>
-            </a:r>
-          </a:p>
-        </p:txBody>
-      </p:sp>
-      <p:sp>
-        <p:nvSpPr>
-          <p:cNvPr id="11" name="audit:source"/>
+              <a:t>최적 주기는 세션 길이와 요약 비용으로 정해진다</a:t>
+            </a:r>
+          </a:p>
+        </p:txBody>
+      </p:sp>
+      <p:sp>
+        <p:nvSpPr>
+          <p:cNvPr id="10" name="audit:source"/>
           <p:cNvSpPr txBox="1"/>
           <p:nvPr/>
         </p:nvSpPr>
@@ -7130,14 +6972,14 @@
                 <a:ea typeface="NanumGothic"/>
                 <a:cs typeface="NanumGothic"/>
               </a:rPr>
-              <a:t>README.md · SOURCES.md</a:t>
-            </a:r>
-          </a:p>
-        </p:txBody>
-      </p:sp>
-      <p:sp>
-        <p:nvSpPr>
-          <p:cNvPr id="12" name="audit:footer"/>
+              <a:t>experiments/exp04_agent_loop_sdd.py</a:t>
+            </a:r>
+          </a:p>
+        </p:txBody>
+      </p:sp>
+      <p:sp>
+        <p:nvSpPr>
+          <p:cNvPr id="11" name="audit:footer"/>
           <p:cNvSpPr txBox="1"/>
           <p:nvPr/>
         </p:nvSpPr>
@@ -7307,7 +7149,7 @@
                 <a:ea typeface="NanumGothic"/>
                 <a:cs typeface="NanumGothic"/>
               </a:rPr>
-              <a:t>비용 시나리오</a:t>
+              <a:t>전체 시스템 비용 시나리오</a:t>
             </a:r>
           </a:p>
         </p:txBody>
@@ -7343,7 +7185,7 @@
                 <a:ea typeface="NanumGothic"/>
                 <a:cs typeface="NanumGothic"/>
               </a:rPr>
-              <a:t>DRY: 전체 파일 대신 변경분을 받는다</a:t>
+              <a:t>툴 출력과 서브에이전트는 전체 비용으로 본다</a:t>
             </a:r>
           </a:p>
         </p:txBody>
@@ -7379,7 +7221,7 @@
                 <a:ea typeface="NanumGothic"/>
                 <a:cs typeface="NanumGothic"/>
               </a:rPr>
-              <a:t>5,000 → 300 토큰</a:t>
+              <a:t>$5.6010 → $2.7360</a:t>
             </a:r>
           </a:p>
         </p:txBody>
@@ -7415,7 +7257,7 @@
                 <a:ea typeface="NanumGothic"/>
                 <a:cs typeface="NanumGothic"/>
               </a:rPr>
-              <a:t>10회 수정에서 출력만 50,000 → 3,000으로 줄인다는 가정이면 94% 절감.</a:t>
+              <a:t>툴 읽기 누적 전송 1,680,000 토큰 (20턴)</a:t>
             </a:r>
           </a:p>
         </p:txBody>
@@ -7451,7 +7293,7 @@
                 <a:ea typeface="NanumGothic"/>
                 <a:cs typeface="NanumGothic"/>
               </a:rPr>
-              <a:t>실제 패치가 적용되고 테스트를 통과해야 절감이 성립한다.</a:t>
+              <a:t>컴팩션 $3.4425 · 서브에이전트 $2.736</a:t>
             </a:r>
           </a:p>
         </p:txBody>
@@ -7487,7 +7329,7 @@
                 <a:ea typeface="NanumGothic"/>
                 <a:cs typeface="NanumGothic"/>
               </a:rPr>
-              <a:t>생성 토큰 감소를 개발 시간·품질 동등성의 실측으로 바꾸어 말하지 않는다.</a:t>
+              <a:t>자식 호출·요약 비용까지 포함해 비교한다</a:t>
             </a:r>
           </a:p>
         </p:txBody>
@@ -7523,7 +7365,7 @@
                 <a:ea typeface="NanumGothic"/>
                 <a:cs typeface="NanumGothic"/>
               </a:rPr>
-              <a:t>experiments/exp09_dry.py §A</a:t>
+              <a:t>experiments/exp11_tool_output_bloat.py</a:t>
             </a:r>
           </a:p>
         </p:txBody>
@@ -7700,7 +7542,7 @@
                 <a:ea typeface="NanumGothic"/>
                 <a:cs typeface="NanumGothic"/>
               </a:rPr>
-              <a:t>같은 가정의 2×2 비용 비교</a:t>
+              <a:t>시나리오 (10,000콜)</a:t>
             </a:r>
           </a:p>
         </p:txBody>
@@ -7736,7 +7578,7 @@
                 <a:ea typeface="NanumGothic"/>
                 <a:cs typeface="NanumGothic"/>
               </a:rPr>
-              <a:t>압축과 캐싱은 대체재만이 아니다</a:t>
+              <a:t>모델 라우팅 · 쉬운 요청에 비싼 모델을 쓰지 않는다</a:t>
             </a:r>
           </a:p>
         </p:txBody>
@@ -7772,7 +7614,7 @@
                 <a:ea typeface="NanumGothic"/>
                 <a:cs typeface="NanumGothic"/>
               </a:rPr>
-              <a:t>$0.4014 → $0.2007</a:t>
+              <a:t>전부 강 $350 → 절반 $184</a:t>
             </a:r>
           </a:p>
         </p:txBody>
@@ -7808,7 +7650,7 @@
                 <a:ea typeface="NanumGothic"/>
                 <a:cs typeface="NanumGothic"/>
               </a:rPr>
-              <a:t>Sonnet 단가, 프리픽스 12,000, 100회: 첫 쓰기 + 이후 99회 캐시 읽기.</a:t>
+              <a:t>절반만 라우팅해도 47% 절감</a:t>
             </a:r>
           </a:p>
         </p:txBody>
@@ -7844,7 +7686,7 @@
                 <a:ea typeface="NanumGothic"/>
                 <a:cs typeface="NanumGothic"/>
               </a:rPr>
-              <a:t>원문 캐시 $0.4014 / 절반 압축 + 캐시 $0.2007.</a:t>
+              <a:t>공격적 라우팅은 $35.17 (90% 절감)</a:t>
             </a:r>
           </a:p>
         </p:txBody>
@@ -7880,7 +7722,7 @@
                 <a:ea typeface="NanumGothic"/>
                 <a:cs typeface="NanumGothic"/>
               </a:rPr>
-              <a:t>압축 비용·품질·최소 길이·TTL 조건을 만족해야 한다. 요약 생성 비용은 이 표 밖이다.</a:t>
+              <a:t>품질 측정 도구가 먼저다 — 임계값은 주기적으로 재보정</a:t>
             </a:r>
           </a:p>
         </p:txBody>
@@ -7916,7 +7758,7 @@
                 <a:ea typeface="NanumGothic"/>
                 <a:cs typeface="NanumGothic"/>
               </a:rPr>
-              <a:t>experiments/exp09_dry.py §B</a:t>
+              <a:t>experiments/exp06_other_levers.py</a:t>
             </a:r>
           </a:p>
         </p:txBody>
@@ -8093,7 +7935,7 @@
                 <a:ea typeface="NanumGothic"/>
                 <a:cs typeface="NanumGothic"/>
               </a:rPr>
-              <a:t>비용 시나리오 / exp02</a:t>
+              <a:t>가격표 + 시나리오</a:t>
             </a:r>
           </a:p>
         </p:txBody>
@@ -8129,7 +7971,7 @@
                 <a:ea typeface="NanumGothic"/>
                 <a:cs typeface="NanumGothic"/>
               </a:rPr>
-              <a:t>출력 대신 결정된 입력에 비용을 쓴다</a:t>
+              <a:t>배치 API · 지연을 할인으로 바꾼다</a:t>
             </a:r>
           </a:p>
         </p:txBody>
@@ -8165,7 +8007,7 @@
                 <a:ea typeface="NanumGothic"/>
                 <a:cs typeface="NanumGothic"/>
               </a:rPr>
-              <a:t>단가 차이는 지렛대, 품질은 별도</a:t>
+              <a:t>50,000건 $675 → $337.50</a:t>
             </a:r>
           </a:p>
         </p:txBody>
@@ -8201,7 +8043,7 @@
                 <a:ea typeface="NanumGothic"/>
                 <a:cs typeface="NanumGothic"/>
               </a:rPr>
-              <a:t>출력 단가가 더 높으면, 짧은 출력 대신 조금 긴 입력이 유리할 수 있다.</a:t>
+              <a:t>입력·출력 모두 50% 할인</a:t>
             </a:r>
           </a:p>
         </p:txBody>
@@ -8237,7 +8079,7 @@
                 <a:ea typeface="NanumGothic"/>
                 <a:cs typeface="NanumGothic"/>
               </a:rPr>
-              <a:t>입력이 늘어난 만큼 출력을 실제로 줄였는지 usage로 확인한다.</a:t>
+              <a:t>24시간 안에 끝나면 되는 잡만</a:t>
             </a:r>
           </a:p>
         </p:txBody>
@@ -8273,7 +8115,7 @@
                 <a:ea typeface="NanumGothic"/>
                 <a:cs typeface="NanumGothic"/>
               </a:rPr>
-              <a:t>‘입력 3배·비용 66% 절감’은 exp02의 특정 토큰 가정이지 보편 실측률이 아니다.</a:t>
+              <a:t>야간 평가 · 대량 분류 · 리포트 생성 · 레포 전체 분석</a:t>
             </a:r>
           </a:p>
         </p:txBody>
@@ -8309,7 +8151,7 @@
                 <a:ea typeface="NanumGothic"/>
                 <a:cs typeface="NanumGothic"/>
               </a:rPr>
-              <a:t>experiments/exp02_output_to_input.py</a:t>
+              <a:t>experiments/exp06_other_levers.py</a:t>
             </a:r>
           </a:p>
         </p:txBody>
@@ -8486,7 +8328,7 @@
                 <a:ea typeface="NanumGothic"/>
                 <a:cs typeface="NanumGothic"/>
               </a:rPr>
-              <a:t>역사적 시나리오 / 수정 시나리오</a:t>
+              <a:t>시나리오</a:t>
             </a:r>
           </a:p>
         </p:txBody>
@@ -8522,7 +8364,7 @@
                 <a:ea typeface="NanumGothic"/>
                 <a:cs typeface="NanumGothic"/>
               </a:rPr>
-              <a:t>20.8배는 페르소나 시나리오로 보존</a:t>
+              <a:t>두 습관, 같은 결과물</a:t>
             </a:r>
           </a:p>
         </p:txBody>
@@ -8558,7 +8400,7 @@
                 <a:ea typeface="NanumGothic"/>
                 <a:cs typeface="NanumGothic"/>
               </a:rPr>
-              <a:t>기존 20.8배 / 수정 기본 19.0배</a:t>
+              <a:t>페르소나 19.0배 (기존 가정 20.8배)</a:t>
             </a:r>
           </a:p>
         </p:txBody>
@@ -8594,7 +8436,7 @@
                 <a:ea typeface="NanumGothic"/>
                 <a:cs typeface="NanumGothic"/>
               </a:rPr>
-              <a:t>기존: A 6턴 / B 2턴, 출력 확대 2.9배, effort 0.35, 한국어 사고 승수 1.44 등 가정.</a:t>
+              <a:t>A: 6턴 · 전체 재출력 · 과한 사고 / B: 2턴 · 짧은 패치</a:t>
             </a:r>
           </a:p>
         </p:txBody>
@@ -8630,7 +8472,7 @@
                 <a:ea typeface="NanumGothic"/>
                 <a:cs typeface="NanumGothic"/>
               </a:rPr>
-              <a:t>기본: 사고 언어 승수는 1.0, 최소 길이 미달 캐싱은 미적용.</a:t>
+              <a:t>연 환산 $18,943 차이 (기존 가정 $20,832)</a:t>
             </a:r>
           </a:p>
         </p:txBody>
@@ -8666,50 +8508,14 @@
                 <a:ea typeface="NanumGothic"/>
                 <a:cs typeface="NanumGothic"/>
               </a:rPr>
-              <a:t>두 조건 모두 일부 실파일 인코딩이 포함된 비용 모형. 실제 품질 동등 A/B가 아니다.</a:t>
-            </a:r>
-          </a:p>
-        </p:txBody>
-      </p:sp>
-      <p:sp>
-        <p:nvSpPr>
-          <p:cNvPr id="10" name="audit:body-3"/>
-          <p:cNvSpPr txBox="1"/>
-          <p:nvPr/>
-        </p:nvSpPr>
-        <p:spPr>
-          <a:xfrm>
-            <a:off x="777240" y="4782312"/>
-            <a:ext cx="10652760" cy="612648"/>
-          </a:xfrm>
-          <a:prstGeom prst="rect">
-            <a:avLst/>
-          </a:prstGeom>
-          <a:noFill/>
-        </p:spPr>
-        <p:txBody>
-          <a:bodyPr wrap="square" lIns="0" rIns="0" tIns="0" bIns="0">
-            <a:spAutoFit/>
-          </a:bodyPr>
-          <a:lstStyle/>
-          <a:p>
-            <a:r>
-              <a:rPr sz="1750" b="0">
-                <a:solidFill>
-                  <a:srgbClr val="ECF1F6"/>
-                </a:solidFill>
-                <a:latin typeface="NanumGothic"/>
-                <a:ea typeface="NanumGothic"/>
-                <a:cs typeface="NanumGothic"/>
-              </a:rPr>
-              <a:t>python demo/compare_personas.py --scenario legacy 로 기존 발표 수치 재현.</a:t>
-            </a:r>
-          </a:p>
-        </p:txBody>
-      </p:sp>
-      <p:sp>
-        <p:nvSpPr>
-          <p:cNvPr id="11" name="audit:source"/>
+              <a:t>같은 작업 1,760건/년을 가정한 비교</a:t>
+            </a:r>
+          </a:p>
+        </p:txBody>
+      </p:sp>
+      <p:sp>
+        <p:nvSpPr>
+          <p:cNvPr id="10" name="audit:source"/>
           <p:cNvSpPr txBox="1"/>
           <p:nvPr/>
         </p:nvSpPr>
@@ -8738,14 +8544,14 @@
                 <a:ea typeface="NanumGothic"/>
                 <a:cs typeface="NanumGothic"/>
               </a:rPr>
-              <a:t>demo/results.json · demo/results_current.json</a:t>
-            </a:r>
-          </a:p>
-        </p:txBody>
-      </p:sp>
-      <p:sp>
-        <p:nvSpPr>
-          <p:cNvPr id="12" name="audit:footer"/>
+              <a:t>demo/compare_personas.py</a:t>
+            </a:r>
+          </a:p>
+        </p:txBody>
+      </p:sp>
+      <p:sp>
+        <p:nvSpPr>
+          <p:cNvPr id="11" name="audit:footer"/>
           <p:cNvSpPr txBox="1"/>
           <p:nvPr/>
         </p:nvSpPr>
@@ -8915,7 +8721,7 @@
                 <a:ea typeface="NanumGothic"/>
                 <a:cs typeface="NanumGothic"/>
               </a:rPr>
-              <a:t>추정 usage의 비용 재계산</a:t>
+              <a:t>순차 시나리오</a:t>
             </a:r>
           </a:p>
         </p:txBody>
@@ -8951,7 +8757,7 @@
                 <a:ea typeface="NanumGothic"/>
                 <a:cs typeface="NanumGothic"/>
               </a:rPr>
-              <a:t>카페 케이스: 절감 관측의 증거 수준</a:t>
+              <a:t>레버는 곱해진다</a:t>
             </a:r>
           </a:p>
         </p:txBody>
@@ -8987,7 +8793,7 @@
                 <a:ea typeface="NanumGothic"/>
                 <a:cs typeface="NanumGothic"/>
               </a:rPr>
-              <a:t>usage 추정치 환산 -8.3%</a:t>
+              <a:t>85.825% (잔여 14%)</a:t>
             </a:r>
           </a:p>
         </p:txBody>
@@ -9023,7 +8829,7 @@
                 <a:ea typeface="NanumGothic"/>
                 <a:cs typeface="NanumGothic"/>
               </a:rPr>
-              <a:t>고정 usage 추정치 + GPT-5 단가: $0.07135 → $0.06540</a:t>
+              <a:t>시맨틱 캐시 → 라우팅 → 캐싱 → verbosity/effort → 배치</a:t>
             </a:r>
           </a:p>
         </p:txBody>
@@ -9059,7 +8865,7 @@
                 <a:ea typeface="NanumGothic"/>
                 <a:cs typeface="NanumGothic"/>
               </a:rPr>
-              <a:t>토큰 합계 7,868 → 8,010 (+1.8%). 실제 청구 usage가 아니라 세션 추정치다.</a:t>
+              <a:t>잔여 비용에 순차 적용한 산술 결과</a:t>
             </a:r>
           </a:p>
         </p:txBody>
@@ -9095,50 +8901,14 @@
                 <a:ea typeface="NanumGothic"/>
                 <a:cs typeface="NanumGothic"/>
               </a:rPr>
-              <a:t>캐시 적격성 미확인. 모든 추정 입력을 신규 입력으로 환산하면 -8.1%.</a:t>
-            </a:r>
-          </a:p>
-        </p:txBody>
-      </p:sp>
-      <p:sp>
-        <p:nvSpPr>
-          <p:cNvPr id="10" name="audit:body-3"/>
-          <p:cNvSpPr txBox="1"/>
-          <p:nvPr/>
-        </p:nvSpPr>
-        <p:spPr>
-          <a:xfrm>
-            <a:off x="777240" y="4782312"/>
-            <a:ext cx="10652760" cy="612648"/>
-          </a:xfrm>
-          <a:prstGeom prst="rect">
-            <a:avLst/>
-          </a:prstGeom>
-          <a:noFill/>
-        </p:spPr>
-        <p:txBody>
-          <a:bodyPr wrap="square" lIns="0" rIns="0" tIns="0" bIns="0">
-            <a:spAutoFit/>
-          </a:bodyPr>
-          <a:lstStyle/>
-          <a:p>
-            <a:r>
-              <a:rPr sz="1750" b="0">
-                <a:solidFill>
-                  <a:srgbClr val="ECF1F6"/>
-                </a:solidFill>
-                <a:latin typeface="NanumGothic"/>
-                <a:ea typeface="NanumGothic"/>
-                <a:cs typeface="NanumGothic"/>
-              </a:rPr>
-              <a:t>Spec은 Vibe 결과를 역산. 백지 스펙 비용·재작업 감소·품질 동등성을 검증한 것은 아니다.</a:t>
-            </a:r>
-          </a:p>
-        </p:txBody>
-      </p:sp>
-      <p:sp>
-        <p:nvSpPr>
-          <p:cNvPr id="11" name="audit:source"/>
+              <a:t>레버 간 중복·상호작용은 검증하지 않았다</a:t>
+            </a:r>
+          </a:p>
+        </p:txBody>
+      </p:sp>
+      <p:sp>
+        <p:nvSpPr>
+          <p:cNvPr id="10" name="audit:source"/>
           <p:cNvSpPr txBox="1"/>
           <p:nvPr/>
         </p:nvSpPr>
@@ -9167,14 +8937,14 @@
                 <a:ea typeface="NanumGothic"/>
                 <a:cs typeface="NanumGothic"/>
               </a:rPr>
-              <a:t>demo/vibe_vs_spec/usage.json · verify_ac.py</a:t>
-            </a:r>
-          </a:p>
-        </p:txBody>
-      </p:sp>
-      <p:sp>
-        <p:nvSpPr>
-          <p:cNvPr id="12" name="audit:footer"/>
+              <a:t>experiments/exp06_other_levers.py</a:t>
+            </a:r>
+          </a:p>
+        </p:txBody>
+      </p:sp>
+      <p:sp>
+        <p:nvSpPr>
+          <p:cNvPr id="11" name="audit:footer"/>
           <p:cNvSpPr txBox="1"/>
           <p:nvPr/>
         </p:nvSpPr>
@@ -9344,7 +9114,7 @@
                 <a:ea typeface="NanumGothic"/>
                 <a:cs typeface="NanumGothic"/>
               </a:rPr>
-              <a:t>외부 보고의 범위 제한</a:t>
+              <a:t>저장 API 로그 재계산</a:t>
             </a:r>
           </a:p>
         </p:txBody>
@@ -9380,7 +9150,7 @@
                 <a:ea typeface="NanumGothic"/>
                 <a:cs typeface="NanumGothic"/>
               </a:rPr>
-              <a:t>반례의 비교 대상을 정확히 읽는다</a:t>
+              <a:t>안 보이는 사고 토큰</a:t>
             </a:r>
           </a:p>
         </p:txBody>
@@ -9416,7 +9186,7 @@
                 <a:ea typeface="NanumGothic"/>
                 <a:cs typeface="NanumGothic"/>
               </a:rPr>
-              <a:t>SDD 도구 간 비교 ≠ SDD 대 무스펙</a:t>
+              <a:t>199.47배 (기존 환산 240.02배)</a:t>
             </a:r>
           </a:p>
         </p:txBody>
@@ -9452,7 +9222,7 @@
                 <a:ea typeface="NanumGothic"/>
                 <a:cs typeface="NanumGothic"/>
               </a:rPr>
-              <a:t>Spec-Kit +97~109%: OpenSpec 대비 두 사례의 외부 블로그 보고. 둘 다 SDD 접근.</a:t>
+              <a:t>같은 문제를 조건당 6회 실행한 저장 로그 30행</a:t>
             </a:r>
           </a:p>
         </p:txBody>
@@ -9488,7 +9258,7 @@
                 <a:ea typeface="NanumGothic"/>
                 <a:cs typeface="NanumGothic"/>
               </a:rPr>
-              <a:t>ETH AGENTS.md 연구: 저장소 컨텍스트 파일 조건. 모든 짧은 스펙이 손해라는 실험 아님.</a:t>
+              <a:t>사고가 난 호출에서 사고 토큰 비중 99.625%</a:t>
             </a:r>
           </a:p>
         </p:txBody>
@@ -9524,7 +9294,7 @@
                 <a:ea typeface="NanumGothic"/>
                 <a:cs typeface="NanumGothic"/>
               </a:rPr>
-              <a:t>짧고 필요한 요구사항만 쓰라는 실무 원칙은 유지하되 효과를 직접 측정한다.</a:t>
+              <a:t>예산을 지정하지 않으면 사실상 '무제한' — 명시적으로 정한다</a:t>
             </a:r>
           </a:p>
         </p:txBody>
@@ -9560,7 +9330,7 @@
                 <a:ea typeface="NanumGothic"/>
                 <a:cs typeface="NanumGothic"/>
               </a:rPr>
-              <a:t>SOURCES.md §4 · arxiv.org/html/2602.11988v1</a:t>
+              <a:t>results/thinking_sweep.jsonl (30 rows)</a:t>
             </a:r>
           </a:p>
         </p:txBody>
@@ -9737,7 +9507,7 @@
                 <a:ea typeface="NanumGothic"/>
                 <a:cs typeface="NanumGothic"/>
               </a:rPr>
-              <a:t>참조 구현 + 반례 회귀 테스트</a:t>
+              <a:t>추정 usage 재계산</a:t>
             </a:r>
           </a:p>
         </p:txBody>
@@ -9773,7 +9543,7 @@
                 <a:ea typeface="NanumGothic"/>
                 <a:cs typeface="NanumGothic"/>
               </a:rPr>
-              <a:t>라우팅은 단어보다 작업 목적을 본다</a:t>
+              <a:t>사례 · 카페 랜딩 한 페이지</a:t>
             </a:r>
           </a:p>
         </p:txBody>
@@ -9809,7 +9579,7 @@
                 <a:ea typeface="NanumGothic"/>
                 <a:cs typeface="NanumGothic"/>
               </a:rPr>
-              <a:t>파일 업로드 ‘구현’ → IMPLEMENT</a:t>
+              <a:t>토큰 +1.8% · 비용 8.3% 감소</a:t>
             </a:r>
           </a:p>
         </p:txBody>
@@ -9845,7 +9615,7 @@
                 <a:ea typeface="NanumGothic"/>
                 <a:cs typeface="NanumGothic"/>
               </a:rPr>
-              <a:t>설계·구현·설명 목적을 파일·검색·변환 같은 부수 단어보다 먼저 본다.</a:t>
+              <a:t>한 문장 지시 vs 4필드 스펙 — 같은 목표</a:t>
             </a:r>
           </a:p>
         </p:txBody>
@@ -9881,7 +9651,7 @@
                 <a:ea typeface="NanumGothic"/>
                 <a:cs typeface="NanumGothic"/>
               </a:rPr>
-              <a:t>구성한 반례 테스트는 회귀 검증이지 실사용 오류율 추정이 아니다.</a:t>
+              <a:t>GPT-5 8.3% · Sonnet 7.6% · 캐시 미적용 8.1%</a:t>
             </a:r>
           </a:p>
         </p:txBody>
@@ -9917,7 +9687,7 @@
                 <a:ea typeface="NanumGothic"/>
                 <a:cs typeface="NanumGothic"/>
               </a:rPr>
-              <a:t>기본 tier 단가는 모델의 공식 가격이 아니라 명시적 비용 시나리오다.</a:t>
+              <a:t>입력은 늘고, 비싼 출력은 줄었다</a:t>
             </a:r>
           </a:p>
         </p:txBody>
@@ -9953,7 +9723,7 @@
                 <a:ea typeface="NanumGothic"/>
                 <a:cs typeface="NanumGothic"/>
               </a:rPr>
-              <a:t>agent_setup/router.py · tests/test_regressions.py</a:t>
+              <a:t>demo/vibe_vs_spec/README.md</a:t>
             </a:r>
           </a:p>
         </p:txBody>
@@ -10130,7 +9900,7 @@
                 <a:ea typeface="NanumGothic"/>
                 <a:cs typeface="NanumGothic"/>
               </a:rPr>
-              <a:t>검증 범위</a:t>
+              <a:t>결론 요약</a:t>
             </a:r>
           </a:p>
         </p:txBody>
@@ -10166,7 +9936,7 @@
                 <a:ea typeface="NanumGothic"/>
                 <a:cs typeface="NanumGothic"/>
               </a:rPr>
-              <a:t>숫자마다 증거의 종류를 붙인다</a:t>
+              <a:t>오늘 가져갈 결론</a:t>
             </a:r>
           </a:p>
         </p:txBody>
@@ -10202,7 +9972,7 @@
                 <a:ea typeface="NanumGothic"/>
                 <a:cs typeface="NanumGothic"/>
               </a:rPr>
-              <a:t>측정 ≠ 가정 ≠ 인과 효과</a:t>
+              <a:t>비용은 모델이 아니라 습관이 만든다</a:t>
             </a:r>
           </a:p>
         </p:txBody>
@@ -10238,7 +10008,7 @@
                 <a:ea typeface="NanumGothic"/>
                 <a:cs typeface="NanumGothic"/>
               </a:rPr>
-              <a:t>API 저장 로그: 80건 언어 비교 + 30건 사고 예산 스윕</a:t>
+              <a:t>영어로 생각하고, 필요한 언어로 답한다</a:t>
             </a:r>
           </a:p>
         </p:txBody>
@@ -10274,7 +10044,7 @@
                 <a:ea typeface="NanumGothic"/>
                 <a:cs typeface="NanumGothic"/>
               </a:rPr>
-              <a:t>새 로컬 실측: 대응 번역문 1,012쌍의 토크나이저 인코딩</a:t>
+              <a:t>설명은 최소로, 추론 강도는 작업에 맞춰</a:t>
             </a:r>
           </a:p>
         </p:txBody>
@@ -10310,50 +10080,14 @@
                 <a:ea typeface="NanumGothic"/>
                 <a:cs typeface="NanumGothic"/>
               </a:rPr>
-              <a:t>브라우저·mock: 코드 동작 검증 / 비용 시나리오: 정책 효과 실측 아님</a:t>
-            </a:r>
-          </a:p>
-        </p:txBody>
-      </p:sp>
-      <p:sp>
-        <p:nvSpPr>
-          <p:cNvPr id="10" name="audit:body-3"/>
-          <p:cNvSpPr txBox="1"/>
-          <p:nvPr/>
-        </p:nvSpPr>
-        <p:spPr>
-          <a:xfrm>
-            <a:off x="777240" y="4782312"/>
-            <a:ext cx="10652760" cy="612648"/>
-          </a:xfrm>
-          <a:prstGeom prst="rect">
-            <a:avLst/>
-          </a:prstGeom>
-          <a:noFill/>
-        </p:spPr>
-        <p:txBody>
-          <a:bodyPr wrap="square" lIns="0" rIns="0" tIns="0" bIns="0">
-            <a:spAutoFit/>
-          </a:bodyPr>
-          <a:lstStyle/>
-          <a:p>
-            <a:r>
-              <a:rPr sz="1750" b="0">
-                <a:solidFill>
-                  <a:srgbClr val="ECF1F6"/>
-                </a:solidFill>
-                <a:latin typeface="NanumGothic"/>
-                <a:ea typeface="NanumGothic"/>
-                <a:cs typeface="NanumGothic"/>
-              </a:rPr>
-              <a:t>이번 정정의 새 유료 API 호출은 0회다.</a:t>
-            </a:r>
-          </a:p>
-        </p:txBody>
-      </p:sp>
-      <p:sp>
-        <p:nvSpPr>
-          <p:cNvPr id="11" name="audit:source"/>
+              <a:t>결정을 스펙으로 먼저 주고, 반복되는 접두부는 캐싱한다</a:t>
+            </a:r>
+          </a:p>
+        </p:txBody>
+      </p:sp>
+      <p:sp>
+        <p:nvSpPr>
+          <p:cNvPr id="10" name="audit:source"/>
           <p:cNvSpPr txBox="1"/>
           <p:nvPr/>
         </p:nvSpPr>
@@ -10382,14 +10116,14 @@
                 <a:ea typeface="NanumGothic"/>
                 <a:cs typeface="NanumGothic"/>
               </a:rPr>
-              <a:t>results/audit_metrics.json · tests/</a:t>
-            </a:r>
-          </a:p>
-        </p:txBody>
-      </p:sp>
-      <p:sp>
-        <p:nvSpPr>
-          <p:cNvPr id="12" name="audit:footer"/>
+              <a:t>README.md</a:t>
+            </a:r>
+          </a:p>
+        </p:txBody>
+      </p:sp>
+      <p:sp>
+        <p:nvSpPr>
+          <p:cNvPr id="11" name="audit:footer"/>
           <p:cNvSpPr txBox="1"/>
           <p:nvPr/>
         </p:nvSpPr>
@@ -10559,7 +10293,7 @@
                 <a:ea typeface="NanumGothic"/>
                 <a:cs typeface="NanumGothic"/>
               </a:rPr>
-              <a:t>오프라인 회귀·변조 테스트</a:t>
+              <a:t>실동작 검사 (Chromium)</a:t>
             </a:r>
           </a:p>
         </p:txBody>
@@ -10595,7 +10329,7 @@
                 <a:ea typeface="NanumGothic"/>
                 <a:cs typeface="NanumGothic"/>
               </a:rPr>
-              <a:t>검증기가 실패를 놓치지 않게 한다</a:t>
+              <a:t>사례 · 무엇을 확인했나</a:t>
             </a:r>
           </a:p>
         </p:txBody>
@@ -10631,7 +10365,7 @@
                 <a:ea typeface="NanumGothic"/>
                 <a:cs typeface="NanumGothic"/>
               </a:rPr>
-              <a:t>거짓 통과를 반례로 검사</a:t>
+              <a:t>정적 16 + 브라우저 29항목</a:t>
             </a:r>
           </a:p>
         </p:txBody>
@@ -10667,7 +10401,7 @@
                 <a:ea typeface="NanumGothic"/>
                 <a:cs typeface="NanumGothic"/>
               </a:rPr>
-              <a:t>슬라이드 240 → 999 변조를 거부: 실제 PPTX의 모든 텍스트와 생성 근거를 대조.</a:t>
+              <a:t>390 · 820 · 821 · 1280px 실제 렌더링 검사</a:t>
             </a:r>
           </a:p>
         </p:txBody>
@@ -10703,7 +10437,7 @@
                 <a:ea typeface="NanumGothic"/>
                 <a:cs typeface="NanumGothic"/>
               </a:rPr>
-              <a:t>모바일 1열 → 2열 변조, 동작 없는 메모 HTML을 브라우저 AC가 거부.</a:t>
+              <a:t>카드 내용 · 앵커 이동 · 가로 스크롤 · JS 오류 0건</a:t>
             </a:r>
           </a:p>
         </p:txBody>
@@ -10739,50 +10473,14 @@
                 <a:ea typeface="NanumGothic"/>
                 <a:cs typeface="NanumGothic"/>
               </a:rPr>
-              <a:t>실패 assertion은 exit 1. shell pipefail로 파이프 뒤에서도 실패를 보존.</a:t>
-            </a:r>
-          </a:p>
-        </p:txBody>
-      </p:sp>
-      <p:sp>
-        <p:nvSpPr>
-          <p:cNvPr id="10" name="audit:body-3"/>
-          <p:cNvSpPr txBox="1"/>
-          <p:nvPr/>
-        </p:nvSpPr>
-        <p:spPr>
-          <a:xfrm>
-            <a:off x="777240" y="4782312"/>
-            <a:ext cx="10652760" cy="612648"/>
-          </a:xfrm>
-          <a:prstGeom prst="rect">
-            <a:avLst/>
-          </a:prstGeom>
-          <a:noFill/>
-        </p:spPr>
-        <p:txBody>
-          <a:bodyPr wrap="square" lIns="0" rIns="0" tIns="0" bIns="0">
-            <a:spAutoFit/>
-          </a:bodyPr>
-          <a:lstStyle/>
-          <a:p>
-            <a:r>
-              <a:rPr sz="1750" b="0">
-                <a:solidFill>
-                  <a:srgbClr val="ECF1F6"/>
-                </a:solidFill>
-                <a:latin typeface="NanumGothic"/>
-                <a:ea typeface="NanumGothic"/>
-                <a:cs typeface="NanumGothic"/>
-              </a:rPr>
-              <a:t>mock은 요청 구조·계산 검증일 뿐 새 live 측정으로 소개하지 않는다.</a:t>
-            </a:r>
-          </a:p>
-        </p:txBody>
-      </p:sp>
-      <p:sp>
-        <p:nvSpPr>
-          <p:cNvPr id="11" name="audit:source"/>
+              <a:t>통과 여부는 실행 로그에 남는다</a:t>
+            </a:r>
+          </a:p>
+        </p:txBody>
+      </p:sp>
+      <p:sp>
+        <p:nvSpPr>
+          <p:cNvPr id="10" name="audit:source"/>
           <p:cNvSpPr txBox="1"/>
           <p:nvPr/>
         </p:nvSpPr>
@@ -10811,14 +10509,14 @@
                 <a:ea typeface="NanumGothic"/>
                 <a:cs typeface="NanumGothic"/>
               </a:rPr>
-              <a:t>tests/ · tools/verify_deck.py · tools/browser_ac.py</a:t>
-            </a:r>
-          </a:p>
-        </p:txBody>
-      </p:sp>
-      <p:sp>
-        <p:nvSpPr>
-          <p:cNvPr id="12" name="audit:footer"/>
+              <a:t>demo/vibe_vs_spec/verify_ac.py</a:t>
+            </a:r>
+          </a:p>
+        </p:txBody>
+      </p:sp>
+      <p:sp>
+        <p:nvSpPr>
+          <p:cNvPr id="11" name="audit:footer"/>
           <p:cNvSpPr txBox="1"/>
           <p:nvPr/>
         </p:nvSpPr>
@@ -10988,7 +10686,7 @@
                 <a:ea typeface="NanumGothic"/>
                 <a:cs typeface="NanumGothic"/>
               </a:rPr>
-              <a:t>재현 자료</a:t>
+              <a:t>적용 순서</a:t>
             </a:r>
           </a:p>
         </p:txBody>
@@ -11024,7 +10722,7 @@
                 <a:ea typeface="NanumGothic"/>
                 <a:cs typeface="NanumGothic"/>
               </a:rPr>
-              <a:t>숫자를 직접 확인할 수 있게 남긴다</a:t>
+              <a:t>적용 우선순위</a:t>
             </a:r>
           </a:p>
         </p:txBody>
@@ -11060,7 +10758,7 @@
                 <a:ea typeface="NanumGothic"/>
                 <a:cs typeface="NanumGothic"/>
               </a:rPr>
-              <a:t>원자료 · 산식 · 기준일 · 재현 명령</a:t>
+              <a:t>1~3번은 오늘 오후에 켤 수 있다</a:t>
             </a:r>
           </a:p>
         </p:txBody>
@@ -11096,7 +10794,7 @@
                 <a:ea typeface="NanumGothic"/>
                 <a:cs typeface="NanumGothic"/>
               </a:rPr>
-              <a:t>results/audit_metrics.json: 저장 로그 통계 + 로컬 측정 + 시나리오를 분리한 지표.</a:t>
+              <a:t>낮은 난이도: 캐싱 · verbosity/effort · 배치</a:t>
             </a:r>
           </a:p>
         </p:txBody>
@@ -11132,7 +10830,7 @@
                 <a:ea typeface="NanumGothic"/>
                 <a:cs typeface="NanumGothic"/>
               </a:rPr>
-              <a:t>docs/CORRECTIONS.md: 무엇을 유지하고 무엇을 바꿨는지 상세 설명.</a:t>
+              <a:t>중간: 스펙 먼저 · 컴팩션</a:t>
             </a:r>
           </a:p>
         </p:txBody>
@@ -11168,50 +10866,14 @@
                 <a:ea typeface="NanumGothic"/>
                 <a:cs typeface="NanumGothic"/>
               </a:rPr>
-              <a:t>SOURCES.md: 공식 단가, 논문 표, 외부 케이스의 비교 조건.</a:t>
-            </a:r>
-          </a:p>
-        </p:txBody>
-      </p:sp>
-      <p:sp>
-        <p:nvSpPr>
-          <p:cNvPr id="10" name="audit:body-3"/>
-          <p:cNvSpPr txBox="1"/>
-          <p:nvPr/>
-        </p:nvSpPr>
-        <p:spPr>
-          <a:xfrm>
-            <a:off x="777240" y="4782312"/>
-            <a:ext cx="10652760" cy="612648"/>
-          </a:xfrm>
-          <a:prstGeom prst="rect">
-            <a:avLst/>
-          </a:prstGeom>
-          <a:noFill/>
-        </p:spPr>
-        <p:txBody>
-          <a:bodyPr wrap="square" lIns="0" rIns="0" tIns="0" bIns="0">
-            <a:spAutoFit/>
-          </a:bodyPr>
-          <a:lstStyle/>
-          <a:p>
-            <a:r>
-              <a:rPr sz="1750" b="0">
-                <a:solidFill>
-                  <a:srgbClr val="ECF1F6"/>
-                </a:solidFill>
-                <a:latin typeface="NanumGothic"/>
-                <a:ea typeface="NanumGothic"/>
-                <a:cs typeface="NanumGothic"/>
-              </a:rPr>
-              <a:t>원본 110행은 보존. 없는 원자료를 재측정 없이 만들어 넣지 않는다.</a:t>
-            </a:r>
-          </a:p>
-        </p:txBody>
-      </p:sp>
-      <p:sp>
-        <p:nvSpPr>
-          <p:cNvPr id="11" name="audit:source"/>
+              <a:t>높은 난이도: 라우팅 · 시맨틱 캐시 · 압축</a:t>
+            </a:r>
+          </a:p>
+        </p:txBody>
+      </p:sp>
+      <p:sp>
+        <p:nvSpPr>
+          <p:cNvPr id="10" name="audit:source"/>
           <p:cNvSpPr txBox="1"/>
           <p:nvPr/>
         </p:nvSpPr>
@@ -11240,14 +10902,14 @@
                 <a:ea typeface="NanumGothic"/>
                 <a:cs typeface="NanumGothic"/>
               </a:rPr>
-              <a:t>python tools/reproduce_audit.py · python tools/verify_deck.py</a:t>
-            </a:r>
-          </a:p>
-        </p:txBody>
-      </p:sp>
-      <p:sp>
-        <p:nvSpPr>
-          <p:cNvPr id="12" name="audit:footer"/>
+              <a:t>experiments/exp06_other_levers.py</a:t>
+            </a:r>
+          </a:p>
+        </p:txBody>
+      </p:sp>
+      <p:sp>
+        <p:nvSpPr>
+          <p:cNvPr id="11" name="audit:footer"/>
           <p:cNvSpPr txBox="1"/>
           <p:nvPr/>
         </p:nvSpPr>
@@ -11417,7 +11079,7 @@
                 <a:ea typeface="NanumGothic"/>
                 <a:cs typeface="NanumGothic"/>
               </a:rPr>
-              <a:t>다음 실행</a:t>
+              <a:t>마무리</a:t>
             </a:r>
           </a:p>
         </p:txBody>
@@ -11453,7 +11115,7 @@
                 <a:ea typeface="NanumGothic"/>
                 <a:cs typeface="NanumGothic"/>
               </a:rPr>
-              <a:t>작게 바꾸고, 자기 usage와 품질로 확인한다</a:t>
+              <a:t>작게 시작해서 자기 usage로 확인한다</a:t>
             </a:r>
           </a:p>
         </p:txBody>
@@ -11489,7 +11151,7 @@
                 <a:ea typeface="NanumGothic"/>
                 <a:cs typeface="NanumGothic"/>
               </a:rPr>
-              <a:t>영어 · 간결함 · 스펙 · 컨텍스트 관리</a:t>
+              <a:t>오늘 한 가지만 켜라 — 캐시</a:t>
             </a:r>
           </a:p>
         </p:txBody>
@@ -11525,7 +11187,7 @@
                 <a:ea typeface="NanumGothic"/>
                 <a:cs typeface="NanumGothic"/>
               </a:rPr>
-              <a:t>주장은 유지한다: 불필요한 생성·사고·재전송은 줄일 가치가 있다.</a:t>
+              <a:t>다음 주에 배수와 적중률을 다시 잰다</a:t>
             </a:r>
           </a:p>
         </p:txBody>
@@ -11561,7 +11223,7 @@
                 <a:ea typeface="NanumGothic"/>
                 <a:cs typeface="NanumGothic"/>
               </a:rPr>
-              <a:t>배수는 모델·단가·과제·시나리오에 붙여 말한다. 절감만으로 품질을 대신하지 않는다.</a:t>
+              <a:t>품질 게이트를 함께 둔다 — 절감만으로 대신하지 않는다</a:t>
             </a:r>
           </a:p>
         </p:txBody>
@@ -11597,7 +11259,7 @@
                 <a:ea typeface="NanumGothic"/>
                 <a:cs typeface="NanumGothic"/>
               </a:rPr>
-              <a:t>정확도·재작업·총비용을 함께 측정해 실제 배포 정책을 선택한다.</a:t>
+              <a:t>질문과 재현 결과는 저장소 이슈로 남긴다</a:t>
             </a:r>
           </a:p>
         </p:txBody>
@@ -11810,7 +11472,7 @@
                 <a:ea typeface="NanumGothic"/>
                 <a:cs typeface="NanumGothic"/>
               </a:rPr>
-              <a:t>공식 가격 확인: 2026-09-20</a:t>
+              <a:t>가격표 실측</a:t>
             </a:r>
           </a:p>
         </p:txBody>
@@ -11846,7 +11508,7 @@
                 <a:ea typeface="NanumGothic"/>
                 <a:cs typeface="NanumGothic"/>
               </a:rPr>
-              <a:t>요금은 모델 ID와 단가를 함께 본다</a:t>
+              <a:t>청구서의 구조</a:t>
             </a:r>
           </a:p>
         </p:txBody>
@@ -11882,7 +11544,7 @@
                 <a:ea typeface="NanumGothic"/>
                 <a:cs typeface="NanumGothic"/>
               </a:rPr>
-              <a:t>$0.25 / $1.50</a:t>
+              <a:t>출력은 입력의 2~8배</a:t>
             </a:r>
           </a:p>
         </p:txBody>
@@ -11918,7 +11580,7 @@
                 <a:ea typeface="NanumGothic"/>
                 <a:cs typeface="NanumGothic"/>
               </a:rPr>
-              <a:t>Gemini 3.1 Flash-Lite · Standard text · USD / 1M tokens</a:t>
+              <a:t>캐시된 입력과 비교하면 최대 50배까지 벌어진다</a:t>
             </a:r>
           </a:p>
         </p:txBody>
@@ -11954,7 +11616,7 @@
                 <a:ea typeface="NanumGothic"/>
                 <a:cs typeface="NanumGothic"/>
               </a:rPr>
-              <a:t>출력에는 thoughtsTokenCount + candidatesTokenCount를 포함한다.</a:t>
+              <a:t>사고 토큰은 출력 단가로 청구된다</a:t>
             </a:r>
           </a:p>
         </p:txBody>
@@ -11990,50 +11652,14 @@
                 <a:ea typeface="NanumGothic"/>
                 <a:cs typeface="NanumGothic"/>
               </a:rPr>
-              <a:t>기존 $1.25/$10은 발표 환산 가정으로 보존한다. Flash-Lite 공식 과거 가격이라는 뜻은 아니다.</a:t>
-            </a:r>
-          </a:p>
-        </p:txBody>
-      </p:sp>
-      <p:sp>
-        <p:nvSpPr>
-          <p:cNvPr id="10" name="audit:body-3"/>
-          <p:cNvSpPr txBox="1"/>
-          <p:nvPr/>
-        </p:nvSpPr>
-        <p:spPr>
-          <a:xfrm>
-            <a:off x="777240" y="4782312"/>
-            <a:ext cx="10652760" cy="612648"/>
-          </a:xfrm>
-          <a:prstGeom prst="rect">
-            <a:avLst/>
-          </a:prstGeom>
-          <a:noFill/>
-        </p:spPr>
-        <p:txBody>
-          <a:bodyPr wrap="square" lIns="0" rIns="0" tIns="0" bIns="0">
-            <a:spAutoFit/>
-          </a:bodyPr>
-          <a:lstStyle/>
-          <a:p>
-            <a:r>
-              <a:rPr sz="1750" b="0">
-                <a:solidFill>
-                  <a:srgbClr val="ECF1F6"/>
-                </a:solidFill>
-                <a:latin typeface="NanumGothic"/>
-                <a:ea typeface="NanumGothic"/>
-                <a:cs typeface="NanumGothic"/>
-              </a:rPr>
-              <a:t>usage × 리스트 단가는 청구서가 아니다. 무료 티어·계약·세금·도구료는 별도.</a:t>
-            </a:r>
-          </a:p>
-        </p:txBody>
-      </p:sp>
-      <p:sp>
-        <p:nvSpPr>
-          <p:cNvPr id="11" name="audit:source"/>
+              <a:t>그래서 '덜 쓰기'보다 '다시 안 보내기'가 크다</a:t>
+            </a:r>
+          </a:p>
+        </p:txBody>
+      </p:sp>
+      <p:sp>
+        <p:nvSpPr>
+          <p:cNvPr id="10" name="audit:source"/>
           <p:cNvSpPr txBox="1"/>
           <p:nvPr/>
         </p:nvSpPr>
@@ -12062,14 +11688,14 @@
                 <a:ea typeface="NanumGothic"/>
                 <a:cs typeface="NanumGothic"/>
               </a:rPr>
-              <a:t>ai.google.dev/gemini-api/docs/pricing · lab/pricing.py</a:t>
-            </a:r>
-          </a:p>
-        </p:txBody>
-      </p:sp>
-      <p:sp>
-        <p:nvSpPr>
-          <p:cNvPr id="12" name="audit:footer"/>
+              <a:t>experiments/exp02_output_to_input.py</a:t>
+            </a:r>
+          </a:p>
+        </p:txBody>
+      </p:sp>
+      <p:sp>
+        <p:nvSpPr>
+          <p:cNvPr id="11" name="audit:footer"/>
           <p:cNvSpPr txBox="1"/>
           <p:nvPr/>
         </p:nvSpPr>
@@ -12239,7 +11865,7 @@
                 <a:ea typeface="NanumGothic"/>
                 <a:cs typeface="NanumGothic"/>
               </a:rPr>
-              <a:t>새 로컬 토크나이저 실측</a:t>
+              <a:t>로컬 토크나이저 실측</a:t>
             </a:r>
           </a:p>
         </p:txBody>
@@ -12275,7 +11901,7 @@
                 <a:ea typeface="NanumGothic"/>
                 <a:cs typeface="NanumGothic"/>
               </a:rPr>
-              <a:t>대응 번역문에서는 한국어 토큰이 더 많다</a:t>
+              <a:t>원칙 1 · 영어로 생각하고, 필요한 언어로 답한다</a:t>
             </a:r>
           </a:p>
         </p:txBody>
@@ -12311,7 +11937,7 @@
                 <a:ea typeface="NanumGothic"/>
                 <a:cs typeface="NanumGothic"/>
               </a:rPr>
-              <a:t>1.4723× / 2.3669×</a:t>
+              <a:t>같은 내용에 1.4723배 · 구형 2.3669배</a:t>
             </a:r>
           </a:p>
         </p:txBody>
@@ -12347,7 +11973,7 @@
                 <a:ea typeface="NanumGothic"/>
                 <a:cs typeface="NanumGothic"/>
               </a:rPr>
-              <a:t>o200k_base: EN 26,873 → KO 39,566</a:t>
+              <a:t>FLORES-200 대응 번역 1,012쌍을 전수 인코딩해 토큰 합계를 비교</a:t>
             </a:r>
           </a:p>
         </p:txBody>
@@ -12383,7 +12009,7 @@
                 <a:ea typeface="NanumGothic"/>
                 <a:cs typeface="NanumGothic"/>
               </a:rPr>
-              <a:t>cl100k_base: EN 27,182 → KO 64,338</a:t>
+              <a:t>짧고 압축된 문장일수록 격차가 커진다</a:t>
             </a:r>
           </a:p>
         </p:txBody>
@@ -12419,50 +12045,14 @@
                 <a:ea typeface="NanumGothic"/>
                 <a:cs typeface="NanumGothic"/>
               </a:rPr>
-              <a:t>FLORES-200 devtest의 대응 번역 1,012쌍 전부를 문장별 인코딩, 토큰 합계의 비율.</a:t>
-            </a:r>
-          </a:p>
-        </p:txBody>
-      </p:sp>
-      <p:sp>
-        <p:nvSpPr>
-          <p:cNvPr id="10" name="audit:body-3"/>
-          <p:cNvSpPr txBox="1"/>
-          <p:nvPr/>
-        </p:nvSpPr>
-        <p:spPr>
-          <a:xfrm>
-            <a:off x="777240" y="4782312"/>
-            <a:ext cx="10652760" cy="612648"/>
-          </a:xfrm>
-          <a:prstGeom prst="rect">
-            <a:avLst/>
-          </a:prstGeom>
-          <a:noFill/>
-        </p:spPr>
-        <p:txBody>
-          <a:bodyPr wrap="square" lIns="0" rIns="0" tIns="0" bIns="0">
-            <a:spAutoFit/>
-          </a:bodyPr>
-          <a:lstStyle/>
-          <a:p>
-            <a:r>
-              <a:rPr sz="1750" b="0">
-                <a:solidFill>
-                  <a:srgbClr val="ECF1F6"/>
-                </a:solidFill>
-                <a:latin typeface="NanumGothic"/>
-                <a:ea typeface="NanumGothic"/>
-                <a:cs typeface="NanumGothic"/>
-              </a:rPr>
-              <a:t>동일 단가에서의 토큰 비용 이점을 지지한다. Gemini·Claude 배수로 옮기지 않는다.</a:t>
-            </a:r>
-          </a:p>
-        </p:txBody>
-      </p:sp>
-      <p:sp>
-        <p:nvSpPr>
-          <p:cNvPr id="11" name="audit:source"/>
+              <a:t>사용자에게는 한국어로 답한다 — 안 보이는 사고만 영어로</a:t>
+            </a:r>
+          </a:p>
+        </p:txBody>
+      </p:sp>
+      <p:sp>
+        <p:nvSpPr>
+          <p:cNvPr id="10" name="audit:source"/>
           <p:cNvSpPr txBox="1"/>
           <p:nvPr/>
         </p:nvSpPr>
@@ -12491,14 +12081,14 @@
                 <a:ea typeface="NanumGothic"/>
                 <a:cs typeface="NanumGothic"/>
               </a:rPr>
-              <a:t>tools/parallel_tokenizer_bench.py · FLORES-200 devtest · NLLB Team (2022)</a:t>
-            </a:r>
-          </a:p>
-        </p:txBody>
-      </p:sp>
-      <p:sp>
-        <p:nvSpPr>
-          <p:cNvPr id="12" name="audit:footer"/>
+              <a:t>tools/parallel_tokenizer_bench.py · FLORES-200 devtest</a:t>
+            </a:r>
+          </a:p>
+        </p:txBody>
+      </p:sp>
+      <p:sp>
+        <p:nvSpPr>
+          <p:cNvPr id="11" name="audit:footer"/>
           <p:cNvSpPr txBox="1"/>
           <p:nvPr/>
         </p:nvSpPr>
@@ -12668,7 +12258,7 @@
                 <a:ea typeface="NanumGothic"/>
                 <a:cs typeface="NanumGothic"/>
               </a:rPr>
-              <a:t>문자 수 실측 / 해석 제한</a:t>
+              <a:t>인코딩 실측</a:t>
             </a:r>
           </a:p>
         </p:txBody>
@@ -12704,7 +12294,7 @@
                 <a:ea typeface="NanumGothic"/>
                 <a:cs typeface="NanumGothic"/>
               </a:rPr>
-              <a:t>짧은 한국어가 적은 의미를 뜻하지 않는다</a:t>
+              <a:t>원칙 2 · 설명을 최소화한다</a:t>
             </a:r>
           </a:p>
         </p:txBody>
@@ -12740,7 +12330,7 @@
                 <a:ea typeface="NanumGothic"/>
                 <a:cs typeface="NanumGothic"/>
               </a:rPr>
-              <a:t>한국어 글자 수 = 영어의 49.99%</a:t>
+              <a:t>342 → 58 토큰 (83% 감소)</a:t>
             </a:r>
           </a:p>
         </p:txBody>
@@ -12776,7 +12366,7 @@
                 <a:ea typeface="NanumGothic"/>
                 <a:cs typeface="NanumGothic"/>
               </a:rPr>
-              <a:t>대응 번역문인데 한국어 문자는 약 절반이다.</a:t>
+              <a:t>월 1,760건 기준 $9.03 → $1.53</a:t>
             </a:r>
           </a:p>
         </p:txBody>
@@ -12812,7 +12402,7 @@
                 <a:ea typeface="NanumGothic"/>
                 <a:cs typeface="NanumGothic"/>
               </a:rPr>
-              <a:t>$/1,000자는 문자 단위 지표이며 언어 간 의미량을 맞춘 지표가 아니다.</a:t>
+              <a:t>'코드를 읽으면 아는 문장'만 지운다 — 코드는 그대로</a:t>
             </a:r>
           </a:p>
         </p:txBody>
@@ -12848,7 +12438,7 @@
                 <a:ea typeface="NanumGothic"/>
                 <a:cs typeface="NanumGothic"/>
               </a:rPr>
-              <a:t>‘한국어가 일을 덜 했다’는 결론은 글자 수만으로 낼 수 없다.</a:t>
+              <a:t>샘플은 차이를 보이려고 극단적으로 잡았다. 자기 작업으로 다시 재라</a:t>
             </a:r>
           </a:p>
         </p:txBody>
@@ -12884,7 +12474,7 @@
                 <a:ea typeface="NanumGothic"/>
                 <a:cs typeface="NanumGothic"/>
               </a:rPr>
-              <a:t>tools/parallel_tokenizer_bench.py · FLORES-200 devtest · NLLB Team (2022)</a:t>
+              <a:t>experiments/exp05_verbosity_effort.py</a:t>
             </a:r>
           </a:p>
         </p:txBody>
@@ -13061,7 +12651,7 @@
                 <a:ea typeface="NanumGothic"/>
                 <a:cs typeface="NanumGothic"/>
               </a:rPr>
-              <a:t>저장 API usage 재계산</a:t>
+              <a:t>시나리오 (사고 토큰 가정)</a:t>
             </a:r>
           </a:p>
         </p:txBody>
@@ -13097,7 +12687,7 @@
                 <a:ea typeface="NanumGothic"/>
                 <a:cs typeface="NanumGothic"/>
               </a:rPr>
-              <a:t>호출당 비용과 문자당 비용은 다른 질문</a:t>
+              <a:t>원칙 3 · 추론 강도를 작업에 맞춘다</a:t>
             </a:r>
           </a:p>
         </p:txBody>
@@ -13133,7 +12723,7 @@
                 <a:ea typeface="NanumGothic"/>
                 <a:cs typeface="NanumGothic"/>
               </a:rPr>
-              <a:t>둘 다 보고, 한쪽을 착시라 부르지 않는다</a:t>
+              <a:t>월 $924 → $118 (70% 절감)</a:t>
             </a:r>
           </a:p>
         </p:txBody>
@@ -13169,7 +12759,7 @@
                 <a:ea typeface="NanumGothic"/>
                 <a:cs typeface="NanumGothic"/>
               </a:rPr>
-              <a:t>reason / Standard: KO/EN 호출당 0.729×</a:t>
+              <a:t>minimal $7.92 · medium $132 · max $924</a:t>
             </a:r>
           </a:p>
         </p:txBody>
@@ -13205,7 +12795,7 @@
                 <a:ea typeface="NanumGothic"/>
                 <a:cs typeface="NanumGothic"/>
               </a:rPr>
-              <a:t>reason / 기존 환산: 호출당 0.728×, 문자당 1.36×</a:t>
+              <a:t>설계 10%만 high, 정형·단순 작업은 low</a:t>
             </a:r>
           </a:p>
         </p:txBody>
@@ -13241,50 +12831,14 @@
                 <a:ea typeface="NanumGothic"/>
                 <a:cs typeface="NanumGothic"/>
               </a:rPr>
-              <a:t>같은 입력 과제라도 생성 내용·답의 품질·추론 언어까지 같다고 확인하지 않았다.</a:t>
-            </a:r>
-          </a:p>
-        </p:txBody>
-      </p:sp>
-      <p:sp>
-        <p:nvSpPr>
-          <p:cNvPr id="10" name="audit:body-3"/>
-          <p:cNvSpPr txBox="1"/>
-          <p:nvPr/>
-        </p:nvSpPr>
-        <p:spPr>
-          <a:xfrm>
-            <a:off x="777240" y="4782312"/>
-            <a:ext cx="10652760" cy="612648"/>
-          </a:xfrm>
-          <a:prstGeom prst="rect">
-            <a:avLst/>
-          </a:prstGeom>
-          <a:noFill/>
-        </p:spPr>
-        <p:txBody>
-          <a:bodyPr wrap="square" lIns="0" rIns="0" tIns="0" bIns="0">
-            <a:spAutoFit/>
-          </a:bodyPr>
-          <a:lstStyle/>
-          <a:p>
-            <a:r>
-              <a:rPr sz="1750" b="0">
-                <a:solidFill>
-                  <a:srgbClr val="ECF1F6"/>
-                </a:solidFill>
-                <a:latin typeface="NanumGothic"/>
-                <a:ea typeface="NanumGothic"/>
-                <a:cs typeface="NanumGothic"/>
-              </a:rPr>
-              <a:t>실험은 과제 2개 × 언어 2개 × 20회 반복이다. 일반 언어 벤치마크가 아니다.</a:t>
-            </a:r>
-          </a:p>
-        </p:txBody>
-      </p:sp>
-      <p:sp>
-        <p:nvSpPr>
-          <p:cNvPr id="11" name="audit:source"/>
+              <a:t>reasoning/output 비율이 0.8을 넘으면 과다 신호</a:t>
+            </a:r>
+          </a:p>
+        </p:txBody>
+      </p:sp>
+      <p:sp>
+        <p:nvSpPr>
+          <p:cNvPr id="10" name="audit:source"/>
           <p:cNvSpPr txBox="1"/>
           <p:nvPr/>
         </p:nvSpPr>
@@ -13313,14 +12867,14 @@
                 <a:ea typeface="NanumGothic"/>
                 <a:cs typeface="NanumGothic"/>
               </a:rPr>
-              <a:t>results/live_lang_thinking.jsonl (80 rows) · tools/stats_test.py</a:t>
-            </a:r>
-          </a:p>
-        </p:txBody>
-      </p:sp>
-      <p:sp>
-        <p:nvSpPr>
-          <p:cNvPr id="12" name="audit:footer"/>
+              <a:t>experiments/exp05_verbosity_effort.py</a:t>
+            </a:r>
+          </a:p>
+        </p:txBody>
+      </p:sp>
+      <p:sp>
+        <p:nvSpPr>
+          <p:cNvPr id="11" name="audit:footer"/>
           <p:cNvSpPr txBox="1"/>
           <p:nvPr/>
         </p:nvSpPr>
@@ -13490,7 +13044,7 @@
                 <a:ea typeface="NanumGothic"/>
                 <a:cs typeface="NanumGothic"/>
               </a:rPr>
-              <a:t>외부 연구 결과 / 자체 재현 아님</a:t>
+              <a:t>비용 시나리오 (턴 가정)</a:t>
             </a:r>
           </a:p>
         </p:txBody>
@@ -13526,7 +13080,7 @@
                 <a:ea typeface="NanumGothic"/>
                 <a:cs typeface="NanumGothic"/>
               </a:rPr>
-              <a:t>영어 추론의 이점은 정확도로 뒷받침한다</a:t>
+              <a:t>원칙 4 · 결정을 스펙으로 먼저 준다</a:t>
             </a:r>
           </a:p>
         </p:txBody>
@@ -13562,7 +13116,7 @@
                 <a:ea typeface="NanumGothic"/>
                 <a:cs typeface="NanumGothic"/>
               </a:rPr>
-              <a:t>83.7% vs 75.4%</a:t>
+              <a:t>재작업 5 → 2 사이클, 68.7% 절감</a:t>
             </a:r>
           </a:p>
         </p:txBody>
@@ -13598,7 +13152,7 @@
                 <a:ea typeface="NanumGothic"/>
                 <a:cs typeface="NanumGothic"/>
               </a:rPr>
-              <a:t>Language Matters (2025), 표 1: 한국어 MATH-500 입력, 영어 / 한국어 prefilling</a:t>
+              <a:t>스펙 4,000토큰 작성 비용도 포함한 계산</a:t>
             </a:r>
           </a:p>
         </p:txBody>
@@ -13634,7 +13188,7 @@
                 <a:ea typeface="NanumGothic"/>
                 <a:cs typeface="NanumGothic"/>
               </a:rPr>
-              <a:t>평가한 네 모델 평균. 모델별 차이가 크며 모든 모델·도메인의 우위는 아니다.</a:t>
+              <a:t>얕은 스펙만으로도 36.9% 절감</a:t>
             </a:r>
           </a:p>
         </p:txBody>
@@ -13670,50 +13224,14 @@
                 <a:ea typeface="NanumGothic"/>
                 <a:cs typeface="NanumGothic"/>
               </a:rPr>
-              <a:t>저장소의 사고 토큰 수가 많다는 사실만으로 ‘더 깊거나 정확하다’고 증명하지 않는다.</a:t>
-            </a:r>
-          </a:p>
-        </p:txBody>
-      </p:sp>
-      <p:sp>
-        <p:nvSpPr>
-          <p:cNvPr id="10" name="audit:body-3"/>
-          <p:cNvSpPr txBox="1"/>
-          <p:nvPr/>
-        </p:nvSpPr>
-        <p:spPr>
-          <a:xfrm>
-            <a:off x="777240" y="4782312"/>
-            <a:ext cx="10652760" cy="612648"/>
-          </a:xfrm>
-          <a:prstGeom prst="rect">
-            <a:avLst/>
-          </a:prstGeom>
-          <a:noFill/>
-        </p:spPr>
-        <p:txBody>
-          <a:bodyPr wrap="square" lIns="0" rIns="0" tIns="0" bIns="0">
-            <a:spAutoFit/>
-          </a:bodyPr>
-          <a:lstStyle/>
-          <a:p>
-            <a:r>
-              <a:rPr sz="1750" b="0">
-                <a:solidFill>
-                  <a:srgbClr val="ECF1F6"/>
-                </a:solidFill>
-                <a:latin typeface="NanumGothic"/>
-                <a:ea typeface="NanumGothic"/>
-                <a:cs typeface="NanumGothic"/>
-              </a:rPr>
-              <a:t>영어 활용 권장은 유지하되 자기 과제의 정확도·비용으로 확인한다.</a:t>
-            </a:r>
-          </a:p>
-        </p:txBody>
-      </p:sp>
-      <p:sp>
-        <p:nvSpPr>
-          <p:cNvPr id="11" name="audit:source"/>
+              <a:t>설명이 아니라 결정을 적는다 — 페이지 · 스택 · 디자인 · 수용 기준</a:t>
+            </a:r>
+          </a:p>
+        </p:txBody>
+      </p:sp>
+      <p:sp>
+        <p:nvSpPr>
+          <p:cNvPr id="10" name="audit:source"/>
           <p:cNvSpPr txBox="1"/>
           <p:nvPr/>
         </p:nvSpPr>
@@ -13742,14 +13260,14 @@
                 <a:ea typeface="NanumGothic"/>
                 <a:cs typeface="NanumGothic"/>
               </a:rPr>
-              <a:t>arxiv.org/html/2505.17407v1#S4.T1 · SOURCES.md</a:t>
-            </a:r>
-          </a:p>
-        </p:txBody>
-      </p:sp>
-      <p:sp>
-        <p:nvSpPr>
-          <p:cNvPr id="12" name="audit:footer"/>
+              <a:t>experiments/exp04_agent_loop_sdd.py</a:t>
+            </a:r>
+          </a:p>
+        </p:txBody>
+      </p:sp>
+      <p:sp>
+        <p:nvSpPr>
+          <p:cNvPr id="11" name="audit:footer"/>
           <p:cNvSpPr txBox="1"/>
           <p:nvPr/>
         </p:nvSpPr>
@@ -13919,7 +13437,7 @@
                 <a:ea typeface="NanumGothic"/>
                 <a:cs typeface="NanumGothic"/>
               </a:rPr>
-              <a:t>저장 로그 + 두 단가의 재계산</a:t>
+              <a:t>비용 시나리오</a:t>
             </a:r>
           </a:p>
         </p:txBody>
@@ -13955,7 +13473,7 @@
                 <a:ea typeface="NanumGothic"/>
                 <a:cs typeface="NanumGothic"/>
               </a:rPr>
-              <a:t>간단한 계산에도 사고가 비용을 크게 늘린다</a:t>
+              <a:t>원칙 5 · 턴 수가 비용을 지배한다</a:t>
             </a:r>
           </a:p>
         </p:txBody>
@@ -13991,7 +13509,7 @@
                 <a:ea typeface="NanumGothic"/>
                 <a:cs typeface="NanumGothic"/>
               </a:rPr>
-              <a:t>약 199.47배 / 기존 240.02배</a:t>
+              <a:t>턴 2배 → 비용 3.1배</a:t>
             </a:r>
           </a:p>
         </p:txBody>
@@ -14027,7 +13545,7 @@
                 <a:ea typeface="NanumGothic"/>
                 <a:cs typeface="NanumGothic"/>
               </a:rPr>
-              <a:t>자동(-1) / 미지정 비교. 같은 문제를 조건당 6번 실행한 저장 로그.</a:t>
+              <a:t>5턴 $0.26 · 20턴 $2.32 · 50턴 $12.09</a:t>
             </a:r>
           </a:p>
         </p:txBody>
@@ -14063,7 +13581,7 @@
                 <a:ea typeface="NanumGothic"/>
                 <a:cs typeface="NanumGothic"/>
               </a:rPr>
-              <a:t>±$0.05 허용오차 통과는 각각 6/6. 일반 정확도의 동등성 증명은 아니다.</a:t>
+              <a:t>안 쓰는 코드도 매 턴 다시 실려 과금된다 (YAGNI)</a:t>
             </a:r>
           </a:p>
         </p:txBody>
@@ -14099,50 +13617,14 @@
                 <a:ea typeface="NanumGothic"/>
                 <a:cs typeface="NanumGothic"/>
               </a:rPr>
-              <a:t>자동 / 명시적 0은 Standard 195.97배. 명시적 0은 5/6.</a:t>
-            </a:r>
-          </a:p>
-        </p:txBody>
-      </p:sp>
-      <p:sp>
-        <p:nvSpPr>
-          <p:cNvPr id="10" name="audit:body-3"/>
-          <p:cNvSpPr txBox="1"/>
-          <p:nvPr/>
-        </p:nvSpPr>
-        <p:spPr>
-          <a:xfrm>
-            <a:off x="777240" y="4782312"/>
-            <a:ext cx="10652760" cy="612648"/>
-          </a:xfrm>
-          <a:prstGeom prst="rect">
-            <a:avLst/>
-          </a:prstGeom>
-          <a:noFill/>
-        </p:spPr>
-        <p:txBody>
-          <a:bodyPr wrap="square" lIns="0" rIns="0" tIns="0" bIns="0">
-            <a:spAutoFit/>
-          </a:bodyPr>
-          <a:lstStyle/>
-          <a:p>
-            <a:r>
-              <a:rPr sz="1750" b="0">
-                <a:solidFill>
-                  <a:srgbClr val="ECF1F6"/>
-                </a:solidFill>
-                <a:latin typeface="NanumGothic"/>
-                <a:ea typeface="NanumGothic"/>
-                <a:cs typeface="NanumGothic"/>
-              </a:rPr>
-              <a:t>240배 메시지는 기존 환산 단가라는 조건을 붙여 유지한다.</a:t>
-            </a:r>
-          </a:p>
-        </p:txBody>
-      </p:sp>
-      <p:sp>
-        <p:nvSpPr>
-          <p:cNvPr id="11" name="audit:source"/>
+              <a:t>컨텍스트는 길이보다 '반복'이 비쌉니다</a:t>
+            </a:r>
+          </a:p>
+        </p:txBody>
+      </p:sp>
+      <p:sp>
+        <p:nvSpPr>
+          <p:cNvPr id="10" name="audit:source"/>
           <p:cNvSpPr txBox="1"/>
           <p:nvPr/>
         </p:nvSpPr>
@@ -14171,14 +13653,14 @@
                 <a:ea typeface="NanumGothic"/>
                 <a:cs typeface="NanumGothic"/>
               </a:rPr>
-              <a:t>results/thinking_sweep.jsonl (30 rows) · tools/thinking_sweep.py</a:t>
-            </a:r>
-          </a:p>
-        </p:txBody>
-      </p:sp>
-      <p:sp>
-        <p:nvSpPr>
-          <p:cNvPr id="12" name="audit:footer"/>
+              <a:t>experiments/exp04_agent_loop_sdd.py</a:t>
+            </a:r>
+          </a:p>
+        </p:txBody>
+      </p:sp>
+      <p:sp>
+        <p:nvSpPr>
+          <p:cNvPr id="11" name="audit:footer"/>
           <p:cNvSpPr txBox="1"/>
           <p:nvPr/>
         </p:nvSpPr>
@@ -14348,7 +13830,7 @@
                 <a:ea typeface="NanumGothic"/>
                 <a:cs typeface="NanumGothic"/>
               </a:rPr>
-              <a:t>채점 기준·표본 한계 공개</a:t>
+              <a:t>비용 시나리오 (100콜)</a:t>
             </a:r>
           </a:p>
         </p:txBody>
@@ -14384,7 +13866,7 @@
                 <a:ea typeface="NanumGothic"/>
                 <a:cs typeface="NanumGothic"/>
               </a:rPr>
-              <a:t>미지정과 0을 합치지 않는다</a:t>
+              <a:t>캐싱 · 오늘 바로 켤 수 있는 레버</a:t>
             </a:r>
           </a:p>
         </p:txBody>
@@ -14420,7 +13902,7 @@
                 <a:ea typeface="NanumGothic"/>
                 <a:cs typeface="NanumGothic"/>
               </a:rPr>
-              <a:t>6/6 · 5/6 · 2/6 · 6/6 · 6/6</a:t>
+              <a:t>$8.55 → $3.22 (62.4% 절감)</a:t>
             </a:r>
           </a:p>
         </p:txBody>
@@ -14456,7 +13938,7 @@
                 <a:ea typeface="NanumGothic"/>
                 <a:cs typeface="NanumGothic"/>
               </a:rPr>
-              <a:t>순서: 미지정 / 명시적 0 / 512 / 2048 / 자동(-1), ±$0.05 기준</a:t>
+              <a:t>쓰기 프리미엄은 두 번째 호출에서 회수된다</a:t>
             </a:r>
           </a:p>
         </p:txBody>
@@ -14492,7 +13974,7 @@
                 <a:ea typeface="NanumGothic"/>
                 <a:cs typeface="NanumGothic"/>
               </a:rPr>
-              <a:t>정확히 $38.016 기준은 각각 6/6 · 5/6 · 1/6 · 4/6 · 3/6.</a:t>
+              <a:t>고정 블록(시스템 · 툴 정의 · 규약)을 맨 앞으로 모은다</a:t>
             </a:r>
           </a:p>
         </p:txBody>
@@ -14528,50 +14010,14 @@
                 <a:ea typeface="NanumGothic"/>
                 <a:cs typeface="NanumGothic"/>
               </a:rPr>
-              <a:t>6/6의 Wilson 95% 구간도 약 61–100%다. 동등성 검정이 아니다.</a:t>
-            </a:r>
-          </a:p>
-        </p:txBody>
-      </p:sp>
-      <p:sp>
-        <p:nvSpPr>
-          <p:cNvPr id="10" name="audit:body-3"/>
-          <p:cNvSpPr txBox="1"/>
-          <p:nvPr/>
-        </p:nvSpPr>
-        <p:spPr>
-          <a:xfrm>
-            <a:off x="777240" y="4782312"/>
-            <a:ext cx="10652760" cy="612648"/>
-          </a:xfrm>
-          <a:prstGeom prst="rect">
-            <a:avLst/>
-          </a:prstGeom>
-          <a:noFill/>
-        </p:spPr>
-        <p:txBody>
-          <a:bodyPr wrap="square" lIns="0" rIns="0" tIns="0" bIns="0">
-            <a:spAutoFit/>
-          </a:bodyPr>
-          <a:lstStyle/>
-          <a:p>
-            <a:r>
-              <a:rPr sz="1750" b="0">
-                <a:solidFill>
-                  <a:srgbClr val="ECF1F6"/>
-                </a:solidFill>
-                <a:latin typeface="NanumGothic"/>
-                <a:ea typeface="NanumGothic"/>
-                <a:cs typeface="NanumGothic"/>
-              </a:rPr>
-              <a:t>512 조건은 모두 STOP, 사고 127–154 토큰. ‘예산에 잘려 오답’이라는 원인은 미확인.</a:t>
-            </a:r>
-          </a:p>
-        </p:txBody>
-      </p:sp>
-      <p:sp>
-        <p:nvSpPr>
-          <p:cNvPr id="11" name="audit:source"/>
+              <a:t>최소 길이를 확인한다 — Haiku 4.5는 4,096토큰</a:t>
+            </a:r>
+          </a:p>
+        </p:txBody>
+      </p:sp>
+      <p:sp>
+        <p:nvSpPr>
+          <p:cNvPr id="10" name="audit:source"/>
           <p:cNvSpPr txBox="1"/>
           <p:nvPr/>
         </p:nvSpPr>
@@ -14600,14 +14046,14 @@
                 <a:ea typeface="NanumGothic"/>
                 <a:cs typeface="NanumGothic"/>
               </a:rPr>
-              <a:t>results/thinking_sweep.jsonl (30 rows) · tools/thinking_sweep.py</a:t>
-            </a:r>
-          </a:p>
-        </p:txBody>
-      </p:sp>
-      <p:sp>
-        <p:nvSpPr>
-          <p:cNvPr id="12" name="audit:footer"/>
+              <a:t>experiments/exp03_prompt_caching.py</a:t>
+            </a:r>
+          </a:p>
+        </p:txBody>
+      </p:sp>
+      <p:sp>
+        <p:nvSpPr>
+          <p:cNvPr id="11" name="audit:footer"/>
           <p:cNvSpPr txBox="1"/>
           <p:nvPr/>
         </p:nvSpPr>

--- a/presentation/token_cost_main.pptx
+++ b/presentation/token_cost_main.pptx
@@ -27,6 +27,11 @@
     <p:sldId id="275" r:id="rId27"/>
     <p:sldId id="276" r:id="rId28"/>
     <p:sldId id="277" r:id="rId29"/>
+    <p:sldId id="278" r:id="rId30"/>
+    <p:sldId id="279" r:id="rId31"/>
+    <p:sldId id="280" r:id="rId32"/>
+    <p:sldId id="281" r:id="rId33"/>
+    <p:sldId id="282" r:id="rId34"/>
   </p:sldIdLst>
   <p:sldSz cx="12191695" cy="6858000" type="screen4x3"/>
   <p:notesSz cx="6858000" cy="9144000"/>
@@ -613,27 +618,27 @@
           <a:lstStyle/>
           <a:p>
             <a:r>
-              <a:t>캐시는 프리픽스를 단위로 매칭한다. 앞부분이 한 글자만 달라도 전액을 다시 낸다.</a:t>
-            </a:r>
-          </a:p>
-          <a:p>
-            <a:r>
-              <a:t>히트율 0%에서는 쓰기 프리미엄만 계속 물어 캐시 없음($8.55)보다 비싸진다($10.05).</a:t>
-            </a:r>
-          </a:p>
-          <a:p>
-            <a:r>
-              <a:t>반대로 히트율이 40%만 넘어도 이미 이득이다. 그래서 '켜고, 적중률을 본다'가 순서다.</a:t>
-            </a:r>
-          </a:p>
-          <a:p>
-            <a:r>
-              <a:t>근거: experiments/exp03_prompt_caching.py</a:t>
-            </a:r>
-          </a:p>
-          <a:p>
-            <a:r>
-              <a:t>증거 범위: 비용 시나리오</a:t>
+              <a:t>40턴→12턴 감소는 모델의 입력 가정이지 관측이 아니다. 실제 턴 감소는 미측정이다.</a:t>
+            </a:r>
+          </a:p>
+          <a:p>
+            <a:r>
+              <a:t>예열 캐시를 가정하면 71.0%가 나오지만, 기본값은 사이클마다 첫 쓰기 비용을 포함한 68.7%다.</a:t>
+            </a:r>
+          </a:p>
+          <a:p>
+            <a:r>
+              <a:t>외부 반례: 저장소 컨텍스트 파일을 자동 생성하면 비용이 늘고 성공률이 떨어진 조건도 보고됐다. 결론은 '짧고 결정만'.</a:t>
+            </a:r>
+          </a:p>
+          <a:p>
+            <a:r>
+              <a:t>근거: experiments/exp04_agent_loop_sdd.py</a:t>
+            </a:r>
+          </a:p>
+          <a:p>
+            <a:r>
+              <a:t>증거 범위: 비용 시나리오 (턴 가정)</a:t>
             </a:r>
           </a:p>
         </p:txBody>
@@ -703,27 +708,22 @@
           <a:lstStyle/>
           <a:p>
             <a:r>
-              <a:t>같은 12,000토큰을 매번 보내던 세션을 절반으로 줄이고 캐시까지 걸었을 때의 산술이다.</a:t>
-            </a:r>
-          </a:p>
-          <a:p>
-            <a:r>
-              <a:t>압축률과 정확도는 작업별로 다르다. 지시·수용 기준을 지우면 요구사항이 바뀐다.</a:t>
-            </a:r>
-          </a:p>
-          <a:p>
-            <a:r>
-              <a:t>압축기 실행 비용과 지연도 손익에 포함해야 한다. 짧은 프롬프트는 압축이 손해일 수 있다.</a:t>
-            </a:r>
-          </a:p>
-          <a:p>
-            <a:r>
-              <a:t>압축 자체의 지연·품질 손실은 이 계산 밖이다.</a:t>
-            </a:r>
-          </a:p>
-          <a:p>
-            <a:r>
-              <a:t>근거: experiments/exp09_dry.py</a:t>
+              <a:t>에이전트 비용은 턴 수의 2차 함수다. '한 번 더 물어보기'가 싼 행동이 아니다.</a:t>
+            </a:r>
+          </a:p>
+          <a:p>
+            <a:r>
+              <a:t>추상화 레이어 3개를 미리 만든 경우 20턴 세션에서 추가 재전송 비용 $0.270이 붙는다(가정).</a:t>
+            </a:r>
+          </a:p>
+          <a:p>
+            <a:r>
+              <a:t>턴을 줄이는 가장 확실한 수단은 요구사항을 먼저 확정하는 것이다.</a:t>
+            </a:r>
+          </a:p>
+          <a:p>
+            <a:r>
+              <a:t>근거: experiments/exp04_agent_loop_sdd.py</a:t>
             </a:r>
           </a:p>
           <a:p>
@@ -798,17 +798,17 @@
           <a:lstStyle/>
           <a:p>
             <a:r>
-              <a:t>20턴 세션에 캐싱만 걸면 $1.91(+17%) — 이력 누적은 그대로 남기 때문이다.</a:t>
-            </a:r>
-          </a:p>
-          <a:p>
-            <a:r>
-              <a:t>요약은 품질에 영향을 준다. 압축 과정에서 잃는 정보가 재작업을 만들면 절감이 상쇄된다.</a:t>
-            </a:r>
-          </a:p>
-          <a:p>
-            <a:r>
-              <a:t>주기를 바꿔 가며 재작업률과 총비용을 함께 측정할 것을 권한다.</a:t>
+              <a:t>고정 8,000토큰 프리픽스, 턴당 입력 2,000·출력 800, Sonnet 단가의 계산이다.</a:t>
+            </a:r>
+          </a:p>
+          <a:p>
+            <a:r>
+              <a:t>컴팩션 주기는 요약 비용과 품질·재작업을 함께 측정해 정한다.</a:t>
+            </a:r>
+          </a:p>
+          <a:p>
+            <a:r>
+              <a:t>실제 세션 비용은 도구 출력과 파일 재전송으로 더 커진다.</a:t>
             </a:r>
           </a:p>
           <a:p>
@@ -888,27 +888,27 @@
           <a:lstStyle/>
           <a:p>
             <a:r>
-              <a:t>같은 툴 작업량을 가정하고 메인·자식·요약 비용을 모두 합산한 값이다.</a:t>
-            </a:r>
-          </a:p>
-          <a:p>
-            <a:r>
-              <a:t>서브에이전트는 요약 품질과 실패·재시도 특성이 다르다. 비용만으로 우열을 단정하지 않는다.</a:t>
-            </a:r>
-          </a:p>
-          <a:p>
-            <a:r>
-              <a:t>과거의 -87%는 자식·요약을 빼고 계산한 값이어서 전체 절감으로 쓰지 않는다.</a:t>
-            </a:r>
-          </a:p>
-          <a:p>
-            <a:r>
-              <a:t>근거: experiments/exp11_tool_output_bloat.py</a:t>
-            </a:r>
-          </a:p>
-          <a:p>
-            <a:r>
-              <a:t>증거 범위: 전체 시스템 비용 시나리오</a:t>
+              <a:t>고정 20,000 + 가변 1,000 + 출력 1,500, Sonnet 단가, 100콜 조건의 계산이다.</a:t>
+            </a:r>
+          </a:p>
+          <a:p>
+            <a:r>
+              <a:t>히트율은 가정값이다. 실제 값은 자기 usage의 cache_read 필드로 측정해야 한다.</a:t>
+            </a:r>
+          </a:p>
+          <a:p>
+            <a:r>
+              <a:t>저장료·TTL·최소 길이는 모델별로 다르다. 미확인 기준은 할인 가정을 하지 않는다.</a:t>
+            </a:r>
+          </a:p>
+          <a:p>
+            <a:r>
+              <a:t>근거: experiments/exp03_prompt_caching.py</a:t>
+            </a:r>
+          </a:p>
+          <a:p>
+            <a:r>
+              <a:t>증거 범위: 비용 시나리오 (100콜)</a:t>
             </a:r>
           </a:p>
         </p:txBody>
@@ -978,27 +978,27 @@
           <a:lstStyle/>
           <a:p>
             <a:r>
-              <a:t>벤치마크에서 잡은 임계값을 그대로 프로덕션에 쓰면 절감이 과대 추정된다.</a:t>
-            </a:r>
-          </a:p>
-          <a:p>
-            <a:r>
-              <a:t>저볼륨에서는 라우팅 오버헤드가 절감을 상쇄한다. 반복률과 볼륨을 먼저 본다.</a:t>
-            </a:r>
-          </a:p>
-          <a:p>
-            <a:r>
-              <a:t>라우터 오류율·검출률은 이 저장소에서 측정하지 않았다. 참조 구현의 회귀 테스트만 있다.</a:t>
-            </a:r>
-          </a:p>
-          <a:p>
-            <a:r>
-              <a:t>근거: experiments/exp06_other_levers.py</a:t>
-            </a:r>
-          </a:p>
-          <a:p>
-            <a:r>
-              <a:t>증거 범위: 시나리오 (10,000콜)</a:t>
+              <a:t>고정 20,000 + 가변 1,000 + 출력 1,500, Sonnet 단가, 100콜 조건의 계산이다.</a:t>
+            </a:r>
+          </a:p>
+          <a:p>
+            <a:r>
+              <a:t>히트율은 가정값이다. 실제 값은 자기 usage의 cache_read 필드로 측정한다.</a:t>
+            </a:r>
+          </a:p>
+          <a:p>
+            <a:r>
+              <a:t>저장료·TTL·최소 길이는 모델별로 다르다. 미확인 기준은 할인 가정을 하지 않는다.</a:t>
+            </a:r>
+          </a:p>
+          <a:p>
+            <a:r>
+              <a:t>근거: experiments/exp03_prompt_caching.py</a:t>
+            </a:r>
+          </a:p>
+          <a:p>
+            <a:r>
+              <a:t>증거 범위: 비용 시나리오 (100콜)</a:t>
             </a:r>
           </a:p>
         </p:txBody>
@@ -1068,27 +1068,32 @@
           <a:lstStyle/>
           <a:p>
             <a:r>
-              <a:t>토큰 수는 그대로이고 지원 서비스에서 가격을 줄이는 레버다.</a:t>
-            </a:r>
-          </a:p>
-          <a:p>
-            <a:r>
-              <a:t>실시간 UI, 대화형 코딩 에이전트처럼 대기 화면이 있는 작업에는 쓸 수 없다.</a:t>
-            </a:r>
-          </a:p>
-          <a:p>
-            <a:r>
-              <a:t>지연·실패 처리·지원 조건(요청 수 상한, 결과 보관 기간)을 확인해야 한다.</a:t>
-            </a:r>
-          </a:p>
-          <a:p>
-            <a:r>
-              <a:t>근거: experiments/exp06_other_levers.py</a:t>
-            </a:r>
-          </a:p>
-          <a:p>
-            <a:r>
-              <a:t>증거 범위: 가격표 + 시나리오</a:t>
+              <a:t>같은 12,000토큰을 매번 보내던 세션을 절반으로 줄이고 캐시까지 걸었을 때의 산술이다.</a:t>
+            </a:r>
+          </a:p>
+          <a:p>
+            <a:r>
+              <a:t>압축률과 정확도는 작업별로 다르다. 지시·수용 기준을 지우면 요구사항이 바뀐다.</a:t>
+            </a:r>
+          </a:p>
+          <a:p>
+            <a:r>
+              <a:t>압축기 실행 비용과 지연도 손익에 포함해야 한다. 짧은 프롬프트는 압축이 손해일 수 있다.</a:t>
+            </a:r>
+          </a:p>
+          <a:p>
+            <a:r>
+              <a:t>압축 자체의 지연·품질 손실은 이 계산 밖이다.</a:t>
+            </a:r>
+          </a:p>
+          <a:p>
+            <a:r>
+              <a:t>근거: experiments/exp09_dry.py</a:t>
+            </a:r>
+          </a:p>
+          <a:p>
+            <a:r>
+              <a:t>증거 범위: 비용 시나리오</a:t>
             </a:r>
           </a:p>
         </p:txBody>
@@ -1158,27 +1163,27 @@
           <a:lstStyle/>
           <a:p>
             <a:r>
-              <a:t>두 조건 모두 추정 usage와 가정으로 만든 비용 모형이다. 실제 정책 A/B가 아니다.</a:t>
-            </a:r>
-          </a:p>
-          <a:p>
-            <a:r>
-              <a:t>품질 동등성이나 완료 작업당 절감률은 검증하지 않았다.</a:t>
-            </a:r>
-          </a:p>
-          <a:p>
-            <a:r>
-              <a:t>기존 20.8배는 역사적 가정(사고 언어 승수 1.44, 캐시 최소 길이 무시)으로 보존한다.</a:t>
-            </a:r>
-          </a:p>
-          <a:p>
-            <a:r>
-              <a:t>근거: demo/compare_personas.py</a:t>
-            </a:r>
-          </a:p>
-          <a:p>
-            <a:r>
-              <a:t>증거 범위: 시나리오</a:t>
+              <a:t>20턴 세션에 캐싱만 걸면 $1.91(+17%) — 이력 누적은 그대로 남기 때문이다.</a:t>
+            </a:r>
+          </a:p>
+          <a:p>
+            <a:r>
+              <a:t>요약은 품질에 영향을 준다. 압축 과정에서 잃는 정보가 재작업을 만들면 절감이 상쇄된다.</a:t>
+            </a:r>
+          </a:p>
+          <a:p>
+            <a:r>
+              <a:t>주기를 바꿔 가며 재작업률과 총비용을 함께 측정할 것을 권한다.</a:t>
+            </a:r>
+          </a:p>
+          <a:p>
+            <a:r>
+              <a:t>근거: experiments/exp04_agent_loop_sdd.py</a:t>
+            </a:r>
+          </a:p>
+          <a:p>
+            <a:r>
+              <a:t>증거 범위: 비용 시나리오</a:t>
             </a:r>
           </a:p>
         </p:txBody>
@@ -1248,17 +1253,17 @@
           <a:lstStyle/>
           <a:p>
             <a:r>
-              <a:t>각 레버의 절감률을 순서대로 곱한 값이다. 실제 도입에서는 서로 겹치는 부분이 생긴다.</a:t>
-            </a:r>
-          </a:p>
-          <a:p>
-            <a:r>
-              <a:t>검증된 상한도 아니다. 자기 데이터로 A/B를 돌려 확정해야 한다.</a:t>
-            </a:r>
-          </a:p>
-          <a:p>
-            <a:r>
-              <a:t>발표에서는 '이론적 상한'이라는 표현보다 '순차 가정의 산술'이라고 말한다.</a:t>
+              <a:t>토큰 수는 그대로이고 지원 서비스에서 가격을 줄이는 레버다.</a:t>
+            </a:r>
+          </a:p>
+          <a:p>
+            <a:r>
+              <a:t>실시간 UI, 대화형 코딩 에이전트처럼 대기 화면이 있는 작업에는 쓸 수 없다.</a:t>
+            </a:r>
+          </a:p>
+          <a:p>
+            <a:r>
+              <a:t>지연·실패 처리·지원 조건(요청 수 상한, 결과 보관 기간)을 확인해야 한다.</a:t>
             </a:r>
           </a:p>
           <a:p>
@@ -1268,7 +1273,7 @@
           </a:p>
           <a:p>
             <a:r>
-              <a:t>증거 범위: 순차 시나리오</a:t>
+              <a:t>증거 범위: 가격표 + 시나리오</a:t>
             </a:r>
           </a:p>
         </p:txBody>
@@ -1338,27 +1343,32 @@
           <a:lstStyle/>
           <a:p>
             <a:r>
-              <a:t>비교는 자동(-1) 대 미지정이다. 명시적 0과 섞으면 결론이 달라진다.</a:t>
-            </a:r>
-          </a:p>
-          <a:p>
-            <a:r>
-              <a:t>±$0.05 허용오차 통과는 미지정 6/6 · 명시적 0은 5/6이다. 정확한 숫자 채점으로는 3/6이 된다 — 동등성 증명이 아니다.</a:t>
-            </a:r>
-          </a:p>
-          <a:p>
-            <a:r>
-              <a:t>구모델의 thinkingBudget 로그는 역사적 관측으로 보존한다. 현재 API는 thinkingLevel을 쓴다.</a:t>
-            </a:r>
-          </a:p>
-          <a:p>
-            <a:r>
-              <a:t>근거: results/thinking_sweep.jsonl (30 rows)</a:t>
-            </a:r>
-          </a:p>
-          <a:p>
-            <a:r>
-              <a:t>증거 범위: 저장 API 로그 재계산</a:t>
+              <a:t>실제 청구 usage가 아니라 세션 추정치다. 절대값과 상대 차이 모두 추정 오차가 있다.</a:t>
+            </a:r>
+          </a:p>
+          <a:p>
+            <a:r>
+              <a:t>캐시 적격성은 확인하지 않았다. 전부 신규 입력으로 환산한 값도 함께 공개한다.</a:t>
+            </a:r>
+          </a:p>
+          <a:p>
+            <a:r>
+              <a:t>Spec 산출물은 Vibe 결과를 역산한 것이다. 백지 스펙 작성 비용과 재작업 감소는 통제하지 않았다.</a:t>
+            </a:r>
+          </a:p>
+          <a:p>
+            <a:r>
+              <a:t>표본 1쌍의 사례이며 일반화하지 않는다.</a:t>
+            </a:r>
+          </a:p>
+          <a:p>
+            <a:r>
+              <a:t>근거: demo/vibe_vs_spec/README.md</a:t>
+            </a:r>
+          </a:p>
+          <a:p>
+            <a:r>
+              <a:t>증거 범위: 추정 usage 재계산</a:t>
             </a:r>
           </a:p>
         </p:txBody>
@@ -1428,32 +1438,27 @@
           <a:lstStyle/>
           <a:p>
             <a:r>
-              <a:t>실제 청구 usage가 아니라 세션 추정치다. 절대값과 상대 차이 모두 추정 오차가 있다.</a:t>
-            </a:r>
-          </a:p>
-          <a:p>
-            <a:r>
-              <a:t>캐시 적격성은 확인하지 않았다. 전부 신규 입력으로 환산한 값도 함께 공개한다.</a:t>
-            </a:r>
-          </a:p>
-          <a:p>
-            <a:r>
-              <a:t>Spec 산출물은 Vibe 결과를 역산한 것이다. 백지 스펙 작성 비용과 재작업 감소는 통제하지 않았다.</a:t>
-            </a:r>
-          </a:p>
-          <a:p>
-            <a:r>
-              <a:t>표본 1쌍의 사례이며 일반화하지 않는다.</a:t>
-            </a:r>
-          </a:p>
-          <a:p>
-            <a:r>
-              <a:t>근거: demo/vibe_vs_spec/README.md</a:t>
-            </a:r>
-          </a:p>
-          <a:p>
-            <a:r>
-              <a:t>증거 범위: 추정 usage 재계산</a:t>
+              <a:t>세션 추정치이며 실제 청구 usage가 아니다. 표본 1쌍이다.</a:t>
+            </a:r>
+          </a:p>
+          <a:p>
+            <a:r>
+              <a:t>추론 토큰은 출력 요율로 과금된다는 가정을 쓴다.</a:t>
+            </a:r>
+          </a:p>
+          <a:p>
+            <a:r>
+              <a:t>표의 버킷 정의(비캐시 입력·출력·캐시)는 벤더 usage 필드와 이름이 같다고 가정하면 이중 계상할 수 있다.</a:t>
+            </a:r>
+          </a:p>
+          <a:p>
+            <a:r>
+              <a:t>근거: demo/vibe_vs_spec/usage.json</a:t>
+            </a:r>
+          </a:p>
+          <a:p>
+            <a:r>
+              <a:t>증거 범위: 추정치 재계산</a:t>
             </a:r>
           </a:p>
         </p:txBody>
@@ -1708,27 +1713,27 @@
           <a:lstStyle/>
           <a:p>
             <a:r>
-              <a:t>난이도는 되돌리기 쉬운 순서이기도 하다. 앞의 3개는 설정 변경으로 시작할 수 있다.</a:t>
-            </a:r>
-          </a:p>
-          <a:p>
-            <a:r>
-              <a:t>라우팅과 시맨틱 캐시는 품질 측정 도구가 있어야 안전하다.</a:t>
-            </a:r>
-          </a:p>
-          <a:p>
-            <a:r>
-              <a:t>우선순위 표에 적힌 조건(모델별 최소 프리픽스 길이 등)을 실제로 확인하고 켠다.</a:t>
-            </a:r>
-          </a:p>
-          <a:p>
-            <a:r>
-              <a:t>근거: experiments/exp06_other_levers.py</a:t>
-            </a:r>
-          </a:p>
-          <a:p>
-            <a:r>
-              <a:t>증거 범위: 적용 순서</a:t>
+              <a:t>다른 모델을 실행한 실측이 아니라 같은 추정 토큰의 산술이다.</a:t>
+            </a:r>
+          </a:p>
+          <a:p>
+            <a:r>
+              <a:t>캐시 적격성은 확인하지 않았고, 캐시 미적용 환산이 가장 보수적인 8.1%다.</a:t>
+            </a:r>
+          </a:p>
+          <a:p>
+            <a:r>
+              <a:t>실제 청구서 대조는 하지 않았다.</a:t>
+            </a:r>
+          </a:p>
+          <a:p>
+            <a:r>
+              <a:t>근거: presentation/case_vibe_vs_spec/cost_comparison.md</a:t>
+            </a:r>
+          </a:p>
+          <a:p>
+            <a:r>
+              <a:t>증거 범위: 단가별 비용 재계산</a:t>
             </a:r>
           </a:p>
         </p:txBody>
@@ -1798,6 +1803,456 @@
           <a:lstStyle/>
           <a:p>
             <a:r>
+              <a:t>난이도는 되돌리기 쉬운 순서이기도 하다. 앞의 3개는 설정 변경으로 시작할 수 있다.</a:t>
+            </a:r>
+          </a:p>
+          <a:p>
+            <a:r>
+              <a:t>라우팅과 시맨틱 캐시는 품질 측정 도구가 있어야 안전하다.</a:t>
+            </a:r>
+          </a:p>
+          <a:p>
+            <a:r>
+              <a:t>우선순위 표에 적힌 조건(모델별 최소 프리픽스 길이 등)을 실제로 확인하고 켠다.</a:t>
+            </a:r>
+          </a:p>
+          <a:p>
+            <a:r>
+              <a:t>근거: experiments/exp06_other_levers.py</a:t>
+            </a:r>
+          </a:p>
+          <a:p>
+            <a:r>
+              <a:t>증거 범위: 적용 순서</a:t>
+            </a:r>
+          </a:p>
+        </p:txBody>
+      </p:sp>
+      <p:sp>
+        <p:nvSpPr>
+          <p:cNvPr id="4" name="Slide Number Placeholder 3"/>
+          <p:cNvSpPr>
+            <a:spLocks noGrp="1"/>
+          </p:cNvSpPr>
+          <p:nvPr>
+            <p:ph type="sldNum" idx="5" sz="quarter"/>
+          </p:nvPr>
+        </p:nvSpPr>
+        <p:spPr/>
+      </p:sp>
+    </p:spTree>
+  </p:cSld>
+  <p:clrMapOvr>
+    <a:masterClrMapping/>
+  </p:clrMapOvr>
+</p:notes>
+</file>
+
+<file path=ppt/notesSlides/notesSlide23.xml><?xml version="1.0" encoding="utf-8"?>
+<p:notes xmlns:a="http://schemas.openxmlformats.org/drawingml/2006/main" xmlns:p="http://schemas.openxmlformats.org/presentationml/2006/main" xmlns:r="http://schemas.openxmlformats.org/officeDocument/2006/relationships">
+  <p:cSld>
+    <p:spTree>
+      <p:nvGrpSpPr>
+        <p:cNvPr id="1" name=""/>
+        <p:cNvGrpSpPr/>
+        <p:nvPr/>
+      </p:nvGrpSpPr>
+      <p:grpSpPr>
+        <a:xfrm>
+          <a:off x="0" y="0"/>
+          <a:ext cx="0" cy="0"/>
+          <a:chOff x="0" y="0"/>
+          <a:chExt cx="0" cy="0"/>
+        </a:xfrm>
+      </p:grpSpPr>
+      <p:sp>
+        <p:nvSpPr>
+          <p:cNvPr id="2" name="Slide Image Placeholder 1"/>
+          <p:cNvSpPr>
+            <a:spLocks noGrp="1"/>
+          </p:cNvSpPr>
+          <p:nvPr>
+            <p:ph type="sldImg" idx="2"/>
+          </p:nvPr>
+        </p:nvSpPr>
+        <p:spPr/>
+      </p:sp>
+      <p:sp>
+        <p:nvSpPr>
+          <p:cNvPr id="3" name="Notes Placeholder 2"/>
+          <p:cNvSpPr>
+            <a:spLocks noGrp="1"/>
+          </p:cNvSpPr>
+          <p:nvPr>
+            <p:ph type="body" idx="3" sz="quarter"/>
+          </p:nvPr>
+        </p:nvSpPr>
+        <p:spPr/>
+        <p:txBody>
+          <a:bodyPr/>
+          <a:lstStyle/>
+          <a:p>
+            <a:r>
+              <a:t>측정 없이 절감률을 목표로 잡으면 품질을 깎아서 숫자를 맞추게 된다.</a:t>
+            </a:r>
+          </a:p>
+          <a:p>
+            <a:r>
+              <a:t>적용 후 재측정을 하지 않으면 프롬프트가 바뀌면서 효과가 조용히 사라진다.</a:t>
+            </a:r>
+          </a:p>
+          <a:p>
+            <a:r>
+              <a:t>캐시 적중률이 50% 아래면 프롬프트 앞부분의 변동 요소를 먼저 의심한다.</a:t>
+            </a:r>
+          </a:p>
+          <a:p>
+            <a:r>
+              <a:t>근거: README.md</a:t>
+            </a:r>
+          </a:p>
+          <a:p>
+            <a:r>
+              <a:t>증거 범위: 적용 절차</a:t>
+            </a:r>
+          </a:p>
+        </p:txBody>
+      </p:sp>
+      <p:sp>
+        <p:nvSpPr>
+          <p:cNvPr id="4" name="Slide Number Placeholder 3"/>
+          <p:cNvSpPr>
+            <a:spLocks noGrp="1"/>
+          </p:cNvSpPr>
+          <p:nvPr>
+            <p:ph type="sldNum" idx="5" sz="quarter"/>
+          </p:nvPr>
+        </p:nvSpPr>
+        <p:spPr/>
+      </p:sp>
+    </p:spTree>
+  </p:cSld>
+  <p:clrMapOvr>
+    <a:masterClrMapping/>
+  </p:clrMapOvr>
+</p:notes>
+</file>
+
+<file path=ppt/notesSlides/notesSlide24.xml><?xml version="1.0" encoding="utf-8"?>
+<p:notes xmlns:a="http://schemas.openxmlformats.org/drawingml/2006/main" xmlns:p="http://schemas.openxmlformats.org/presentationml/2006/main" xmlns:r="http://schemas.openxmlformats.org/officeDocument/2006/relationships">
+  <p:cSld>
+    <p:spTree>
+      <p:nvGrpSpPr>
+        <p:cNvPr id="1" name=""/>
+        <p:cNvGrpSpPr/>
+        <p:nvPr/>
+      </p:nvGrpSpPr>
+      <p:grpSpPr>
+        <a:xfrm>
+          <a:off x="0" y="0"/>
+          <a:ext cx="0" cy="0"/>
+          <a:chOff x="0" y="0"/>
+          <a:chExt cx="0" cy="0"/>
+        </a:xfrm>
+      </p:grpSpPr>
+      <p:sp>
+        <p:nvSpPr>
+          <p:cNvPr id="2" name="Slide Image Placeholder 1"/>
+          <p:cNvSpPr>
+            <a:spLocks noGrp="1"/>
+          </p:cNvSpPr>
+          <p:nvPr>
+            <p:ph type="sldImg" idx="2"/>
+          </p:nvPr>
+        </p:nvSpPr>
+        <p:spPr/>
+      </p:sp>
+      <p:sp>
+        <p:nvSpPr>
+          <p:cNvPr id="3" name="Notes Placeholder 2"/>
+          <p:cNvSpPr>
+            <a:spLocks noGrp="1"/>
+          </p:cNvSpPr>
+          <p:nvPr>
+            <p:ph type="body" idx="3" sz="quarter"/>
+          </p:nvPr>
+        </p:nvSpPr>
+        <p:spPr/>
+        <p:txBody>
+          <a:bodyPr/>
+          <a:lstStyle/>
+          <a:p>
+            <a:r>
+              <a:t>다섯 가지 모두 '켜면 좋다'는 조치를 조건 없이 적용해서 생긴다.</a:t>
+            </a:r>
+          </a:p>
+          <a:p>
+            <a:r>
+              <a:t>특히 캐싱은 켠 상태에서 미스가 나면 비용이 더 늘어난다 — 적중률을 보지 않으면 손해다.</a:t>
+            </a:r>
+          </a:p>
+          <a:p>
+            <a:r>
+              <a:t>사고 예산은 지정하지 않으면 기본값이 정한다. 기본값을 모르면 청구서를 예측할 수 없다.</a:t>
+            </a:r>
+          </a:p>
+          <a:p>
+            <a:r>
+              <a:t>근거: docs/CORRECTIONS.md</a:t>
+            </a:r>
+          </a:p>
+          <a:p>
+            <a:r>
+              <a:t>증거 범위: 실무 체크</a:t>
+            </a:r>
+          </a:p>
+        </p:txBody>
+      </p:sp>
+      <p:sp>
+        <p:nvSpPr>
+          <p:cNvPr id="4" name="Slide Number Placeholder 3"/>
+          <p:cNvSpPr>
+            <a:spLocks noGrp="1"/>
+          </p:cNvSpPr>
+          <p:nvPr>
+            <p:ph type="sldNum" idx="5" sz="quarter"/>
+          </p:nvPr>
+        </p:nvSpPr>
+        <p:spPr/>
+      </p:sp>
+    </p:spTree>
+  </p:cSld>
+  <p:clrMapOvr>
+    <a:masterClrMapping/>
+  </p:clrMapOvr>
+</p:notes>
+</file>
+
+<file path=ppt/notesSlides/notesSlide25.xml><?xml version="1.0" encoding="utf-8"?>
+<p:notes xmlns:a="http://schemas.openxmlformats.org/drawingml/2006/main" xmlns:p="http://schemas.openxmlformats.org/presentationml/2006/main" xmlns:r="http://schemas.openxmlformats.org/officeDocument/2006/relationships">
+  <p:cSld>
+    <p:spTree>
+      <p:nvGrpSpPr>
+        <p:cNvPr id="1" name=""/>
+        <p:cNvGrpSpPr/>
+        <p:nvPr/>
+      </p:nvGrpSpPr>
+      <p:grpSpPr>
+        <a:xfrm>
+          <a:off x="0" y="0"/>
+          <a:ext cx="0" cy="0"/>
+          <a:chOff x="0" y="0"/>
+          <a:chExt cx="0" cy="0"/>
+        </a:xfrm>
+      </p:grpSpPr>
+      <p:sp>
+        <p:nvSpPr>
+          <p:cNvPr id="2" name="Slide Image Placeholder 1"/>
+          <p:cNvSpPr>
+            <a:spLocks noGrp="1"/>
+          </p:cNvSpPr>
+          <p:nvPr>
+            <p:ph type="sldImg" idx="2"/>
+          </p:nvPr>
+        </p:nvSpPr>
+        <p:spPr/>
+      </p:sp>
+      <p:sp>
+        <p:nvSpPr>
+          <p:cNvPr id="3" name="Notes Placeholder 2"/>
+          <p:cNvSpPr>
+            <a:spLocks noGrp="1"/>
+          </p:cNvSpPr>
+          <p:nvPr>
+            <p:ph type="body" idx="3" sz="quarter"/>
+          </p:nvPr>
+        </p:nvSpPr>
+        <p:spPr/>
+        <p:txBody>
+          <a:bodyPr/>
+          <a:lstStyle/>
+          <a:p>
+            <a:r>
+              <a:t>캐시는 비용 레버이면서 데이터 보존 문제다. 개인정보가 섞인 접두부는 캐싱 대상에서 뺀다.</a:t>
+            </a:r>
+          </a:p>
+          <a:p>
+            <a:r>
+              <a:t>시맨틱 캐시는 질의가 비슷할 때 호출 자체를 제거한다. 히트율보다 오답 위험이 먼저다.</a:t>
+            </a:r>
+          </a:p>
+          <a:p>
+            <a:r>
+              <a:t>TTL과 삭제 시점을 벤더 문서 기준으로 확인하고 기록해 둔다.</a:t>
+            </a:r>
+          </a:p>
+          <a:p>
+            <a:r>
+              <a:t>근거: experiments/exp06_other_levers.py</a:t>
+            </a:r>
+          </a:p>
+          <a:p>
+            <a:r>
+              <a:t>증거 범위: 운영 주의</a:t>
+            </a:r>
+          </a:p>
+        </p:txBody>
+      </p:sp>
+      <p:sp>
+        <p:nvSpPr>
+          <p:cNvPr id="4" name="Slide Number Placeholder 3"/>
+          <p:cNvSpPr>
+            <a:spLocks noGrp="1"/>
+          </p:cNvSpPr>
+          <p:nvPr>
+            <p:ph type="sldNum" idx="5" sz="quarter"/>
+          </p:nvPr>
+        </p:nvSpPr>
+        <p:spPr/>
+      </p:sp>
+    </p:spTree>
+  </p:cSld>
+  <p:clrMapOvr>
+    <a:masterClrMapping/>
+  </p:clrMapOvr>
+</p:notes>
+</file>
+
+<file path=ppt/notesSlides/notesSlide26.xml><?xml version="1.0" encoding="utf-8"?>
+<p:notes xmlns:a="http://schemas.openxmlformats.org/drawingml/2006/main" xmlns:p="http://schemas.openxmlformats.org/presentationml/2006/main" xmlns:r="http://schemas.openxmlformats.org/officeDocument/2006/relationships">
+  <p:cSld>
+    <p:spTree>
+      <p:nvGrpSpPr>
+        <p:cNvPr id="1" name=""/>
+        <p:cNvGrpSpPr/>
+        <p:nvPr/>
+      </p:nvGrpSpPr>
+      <p:grpSpPr>
+        <a:xfrm>
+          <a:off x="0" y="0"/>
+          <a:ext cx="0" cy="0"/>
+          <a:chOff x="0" y="0"/>
+          <a:chExt cx="0" cy="0"/>
+        </a:xfrm>
+      </p:grpSpPr>
+      <p:sp>
+        <p:nvSpPr>
+          <p:cNvPr id="2" name="Slide Image Placeholder 1"/>
+          <p:cNvSpPr>
+            <a:spLocks noGrp="1"/>
+          </p:cNvSpPr>
+          <p:nvPr>
+            <p:ph type="sldImg" idx="2"/>
+          </p:nvPr>
+        </p:nvSpPr>
+        <p:spPr/>
+      </p:sp>
+      <p:sp>
+        <p:nvSpPr>
+          <p:cNvPr id="3" name="Notes Placeholder 2"/>
+          <p:cNvSpPr>
+            <a:spLocks noGrp="1"/>
+          </p:cNvSpPr>
+          <p:nvPr>
+            <p:ph type="body" idx="3" sz="quarter"/>
+          </p:nvPr>
+        </p:nvSpPr>
+        <p:spPr/>
+        <p:txBody>
+          <a:bodyPr/>
+          <a:lstStyle/>
+          <a:p>
+            <a:r>
+              <a:t>터미널에서 오늘 본 표를 그대로 다시 볼 수 있다. 유료 API 호출은 0회다.</a:t>
+            </a:r>
+          </a:p>
+          <a:p>
+            <a:r>
+              <a:t>덱의 모든 텍스트는 생성 원천과 대조해 검증한다. 숫자를 손으로 고치면 검증이 실패한다.</a:t>
+            </a:r>
+          </a:p>
+          <a:p>
+            <a:r>
+              <a:t>검증 항목 수는 본문에 고정하지 않고 실행 결과 파일로 남긴다.</a:t>
+            </a:r>
+          </a:p>
+          <a:p>
+            <a:r>
+              <a:t>근거: tools/reproduce_audit.py</a:t>
+            </a:r>
+          </a:p>
+          <a:p>
+            <a:r>
+              <a:t>증거 범위: 재현</a:t>
+            </a:r>
+          </a:p>
+        </p:txBody>
+      </p:sp>
+      <p:sp>
+        <p:nvSpPr>
+          <p:cNvPr id="4" name="Slide Number Placeholder 3"/>
+          <p:cNvSpPr>
+            <a:spLocks noGrp="1"/>
+          </p:cNvSpPr>
+          <p:nvPr>
+            <p:ph type="sldNum" idx="5" sz="quarter"/>
+          </p:nvPr>
+        </p:nvSpPr>
+        <p:spPr/>
+      </p:sp>
+    </p:spTree>
+  </p:cSld>
+  <p:clrMapOvr>
+    <a:masterClrMapping/>
+  </p:clrMapOvr>
+</p:notes>
+</file>
+
+<file path=ppt/notesSlides/notesSlide27.xml><?xml version="1.0" encoding="utf-8"?>
+<p:notes xmlns:a="http://schemas.openxmlformats.org/drawingml/2006/main" xmlns:p="http://schemas.openxmlformats.org/presentationml/2006/main" xmlns:r="http://schemas.openxmlformats.org/officeDocument/2006/relationships">
+  <p:cSld>
+    <p:spTree>
+      <p:nvGrpSpPr>
+        <p:cNvPr id="1" name=""/>
+        <p:cNvGrpSpPr/>
+        <p:nvPr/>
+      </p:nvGrpSpPr>
+      <p:grpSpPr>
+        <a:xfrm>
+          <a:off x="0" y="0"/>
+          <a:ext cx="0" cy="0"/>
+          <a:chOff x="0" y="0"/>
+          <a:chExt cx="0" cy="0"/>
+        </a:xfrm>
+      </p:grpSpPr>
+      <p:sp>
+        <p:nvSpPr>
+          <p:cNvPr id="2" name="Slide Image Placeholder 1"/>
+          <p:cNvSpPr>
+            <a:spLocks noGrp="1"/>
+          </p:cNvSpPr>
+          <p:nvPr>
+            <p:ph type="sldImg" idx="2"/>
+          </p:nvPr>
+        </p:nvSpPr>
+        <p:spPr/>
+      </p:sp>
+      <p:sp>
+        <p:nvSpPr>
+          <p:cNvPr id="3" name="Notes Placeholder 2"/>
+          <p:cNvSpPr>
+            <a:spLocks noGrp="1"/>
+          </p:cNvSpPr>
+          <p:nvPr>
+            <p:ph type="body" idx="3" sz="quarter"/>
+          </p:nvPr>
+        </p:nvSpPr>
+        <p:spPr/>
+        <p:txBody>
+          <a:bodyPr/>
+          <a:lstStyle/>
+          <a:p>
+            <a:r>
               <a:t>오늘 배운 것을 다 적용하지 말고 되돌리기 쉬운 것 하나만 켜고 재측정한다.</a:t>
             </a:r>
           </a:p>
@@ -1978,32 +2433,27 @@
           <a:lstStyle/>
           <a:p>
             <a:r>
-              <a:t>숫자는 토큰 합계의 비율이다. 대응 번역문이므로 '같은 내용'이라는 전제가 성립한다.</a:t>
-            </a:r>
-          </a:p>
-          <a:p>
-            <a:r>
-              <a:t>이 배수를 그대로 비용으로 환산하지 않는다. 실제 비용은 생성 길이와 사고량이 함께 결정한다.</a:t>
-            </a:r>
-          </a:p>
-          <a:p>
-            <a:r>
-              <a:t>반례도 있다: 모델·과제·언어별로 효과가 다르다. 자기 워크로드로 다시 측정하는 것이 결론이다.</a:t>
-            </a:r>
-          </a:p>
-          <a:p>
-            <a:r>
-              <a:t>답변 언어를 바꾸라고 말하는 것이 아니라, 내부 추론 단계에서 영어 활용을 권하는 것이다.</a:t>
-            </a:r>
-          </a:p>
-          <a:p>
-            <a:r>
-              <a:t>근거: tools/parallel_tokenizer_bench.py · FLORES-200 devtest</a:t>
-            </a:r>
-          </a:p>
-          <a:p>
-            <a:r>
-              <a:t>증거 범위: 로컬 토크나이저 실측</a:t>
+              <a:t>공개 리스트 단가이며 계약·무료 티어·세금·도구 비용은 별도다.</a:t>
+            </a:r>
+          </a:p>
+          <a:p>
+            <a:r>
+              <a:t>출력÷입력 배수는 모델별로 4~8배다. 같은 배수를 모든 모델에 적용하지 않는다.</a:t>
+            </a:r>
+          </a:p>
+          <a:p>
+            <a:r>
+              <a:t>Gemini 3.8/3.6 Flash의 인트로 단가는 2026-12-31까지이며 이후 2배가 된다 — 표에 넣은 값의 기준일을 밝힌다.</a:t>
+            </a:r>
+          </a:p>
+          <a:p>
+            <a:r>
+              <a:t>근거: lab/pricing.py MODELS</a:t>
+            </a:r>
+          </a:p>
+          <a:p>
+            <a:r>
+              <a:t>증거 범위: 가격표 스냅샷 (2026-09-20)</a:t>
             </a:r>
           </a:p>
         </p:txBody>
@@ -2073,27 +2523,32 @@
           <a:lstStyle/>
           <a:p>
             <a:r>
-              <a:t>같은 결과물을 세 가지 설명 스타일로 생성해 인코딩 토큰을 측정한 값이다(보통 90토큰, 장황 342토큰).</a:t>
-            </a:r>
-          </a:p>
-          <a:p>
-            <a:r>
-              <a:t>품질·정확도 동등성을 별도로 검정한 것은 아니다. 어려운 작업에서는 설명이 검증에 필요할 수 있다.</a:t>
-            </a:r>
-          </a:p>
-          <a:p>
-            <a:r>
-              <a:t>발표에서는 '실무 기준선은 자기 작업에서 재측정'을 반드시 덧붙인다.</a:t>
-            </a:r>
-          </a:p>
-          <a:p>
-            <a:r>
-              <a:t>근거: experiments/exp05_verbosity_effort.py</a:t>
-            </a:r>
-          </a:p>
-          <a:p>
-            <a:r>
-              <a:t>증거 범위: 인코딩 실측</a:t>
+              <a:t>숫자는 토큰 합계의 비율이다. 대응 번역문이므로 '같은 내용'이라는 전제가 성립한다.</a:t>
+            </a:r>
+          </a:p>
+          <a:p>
+            <a:r>
+              <a:t>이 배수를 그대로 비용으로 환산하지 않는다. 실제 비용은 생성 길이와 사고량이 함께 결정한다.</a:t>
+            </a:r>
+          </a:p>
+          <a:p>
+            <a:r>
+              <a:t>반례도 있다: 모델·과제·언어별로 효과가 다르다. 자기 워크로드로 다시 측정하는 것이 결론이다.</a:t>
+            </a:r>
+          </a:p>
+          <a:p>
+            <a:r>
+              <a:t>답변 언어를 바꾸라고 말하는 것이 아니라, 내부 추론 단계에서 영어 활용을 권하는 것이다.</a:t>
+            </a:r>
+          </a:p>
+          <a:p>
+            <a:r>
+              <a:t>근거: tools/parallel_tokenizer_bench.py · FLORES-200 devtest</a:t>
+            </a:r>
+          </a:p>
+          <a:p>
+            <a:r>
+              <a:t>증거 범위: 로컬 토크나이저 실측</a:t>
             </a:r>
           </a:p>
         </p:txBody>
@@ -2163,27 +2618,27 @@
           <a:lstStyle/>
           <a:p>
             <a:r>
-              <a:t>사고 토큰은 눈에 안 보이지만 출력 단가로 청구된다. 단계별 비용은 사고량 가정의 시나리오다.</a:t>
-            </a:r>
-          </a:p>
-          <a:p>
-            <a:r>
-              <a:t>effort를 낮추면 어려운 작업의 정확도가 떨어질 수 있다. '전부 낮춰라'가 아니라 '작업에 맞춰라'다.</a:t>
-            </a:r>
-          </a:p>
-          <a:p>
-            <a:r>
-              <a:t>정확도 게이트를 함께 두고 배분표를 만들 것을 권한다.</a:t>
-            </a:r>
-          </a:p>
-          <a:p>
-            <a:r>
-              <a:t>근거: experiments/exp05_verbosity_effort.py</a:t>
-            </a:r>
-          </a:p>
-          <a:p>
-            <a:r>
-              <a:t>증거 범위: 시나리오 (사고 토큰 가정)</a:t>
+              <a:t>RAG 청킹을 글자 수 기준으로 잡으면 한국어 청크만 조용히 잘리거나 한도를 넘는다.</a:t>
+            </a:r>
+          </a:p>
+          <a:p>
+            <a:r>
+              <a:t>토큰/글자 비율은 인코딩 비율이지 내용·의미의 비율이 아니다. 글자 수를 의미량으로 읽으면 틀린다.</a:t>
+            </a:r>
+          </a:p>
+          <a:p>
+            <a:r>
+              <a:t>실무 규칙: 청크 상한은 토크나이저로 세고, 글자 수 기준값에 안전계수를 두지 말고 토큰으로 통일한다.</a:t>
+            </a:r>
+          </a:p>
+          <a:p>
+            <a:r>
+              <a:t>근거: experiments/exp01_tokenizer_ko_en.py</a:t>
+            </a:r>
+          </a:p>
+          <a:p>
+            <a:r>
+              <a:t>증거 범위: 인코딩 실측</a:t>
             </a:r>
           </a:p>
         </p:txBody>
@@ -2253,27 +2708,27 @@
           <a:lstStyle/>
           <a:p>
             <a:r>
-              <a:t>40턴→12턴 감소는 모델의 입력 가정이지 관측이 아니다. 실제 턴 감소는 미측정이다.</a:t>
-            </a:r>
-          </a:p>
-          <a:p>
-            <a:r>
-              <a:t>예열 캐시를 가정하면 71.0%가 나오지만, 기본값은 사이클마다 첫 쓰기 비용을 포함한 68.7%다.</a:t>
-            </a:r>
-          </a:p>
-          <a:p>
-            <a:r>
-              <a:t>외부 반례: 저장소 컨텍스트 파일을 자동 생성하면 비용이 늘고 성공률이 떨어진 조건도 보고됐다. 결론은 '짧고 결정만'.</a:t>
-            </a:r>
-          </a:p>
-          <a:p>
-            <a:r>
-              <a:t>근거: experiments/exp04_agent_loop_sdd.py</a:t>
-            </a:r>
-          </a:p>
-          <a:p>
-            <a:r>
-              <a:t>증거 범위: 비용 시나리오 (턴 가정)</a:t>
+              <a:t>배수는 토큰 합계의 비율이다. 대응 번역문이므로 '같은 내용' 전제가 성립한다.</a:t>
+            </a:r>
+          </a:p>
+          <a:p>
+            <a:r>
+              <a:t>이 배수를 그대로 비용으로 환산하지 않는다. 비용은 생성 길이와 사고량이 함께 결정한다.</a:t>
+            </a:r>
+          </a:p>
+          <a:p>
+            <a:r>
+              <a:t>토큰/글자는 인코딩 비율이지 내용·의미의 비율이 아니다.</a:t>
+            </a:r>
+          </a:p>
+          <a:p>
+            <a:r>
+              <a:t>근거: tools/parallel_tokenizer_bench.py · FLORES-200 devtest</a:t>
+            </a:r>
+          </a:p>
+          <a:p>
+            <a:r>
+              <a:t>증거 범위: 로컬 토크나이저 실측</a:t>
             </a:r>
           </a:p>
         </p:txBody>
@@ -2343,27 +2798,27 @@
           <a:lstStyle/>
           <a:p>
             <a:r>
-              <a:t>에이전트 비용은 턴 수의 2차 함수다. '한 번 더 물어보기'가 싼 행동이 아니다.</a:t>
-            </a:r>
-          </a:p>
-          <a:p>
-            <a:r>
-              <a:t>추상화 레이어 3개를 미리 만든 경우 20턴 세션에서 추가 재전송 비용 $0.270이 붙는다(가정).</a:t>
-            </a:r>
-          </a:p>
-          <a:p>
-            <a:r>
-              <a:t>턴을 줄이는 가장 확실한 수단은 요구사항을 먼저 확정하는 것이다.</a:t>
-            </a:r>
-          </a:p>
-          <a:p>
-            <a:r>
-              <a:t>근거: experiments/exp04_agent_loop_sdd.py</a:t>
-            </a:r>
-          </a:p>
-          <a:p>
-            <a:r>
-              <a:t>증거 범위: 비용 시나리오</a:t>
+              <a:t>같은 결과물을 세 가지 설명 스타일로 생성해 인코딩 토큰을 측정한 값이다(보통 90토큰, 장황 342토큰).</a:t>
+            </a:r>
+          </a:p>
+          <a:p>
+            <a:r>
+              <a:t>품질·정확도 동등성을 별도로 검정한 것은 아니다. 어려운 작업에서는 설명이 검증에 필요할 수 있다.</a:t>
+            </a:r>
+          </a:p>
+          <a:p>
+            <a:r>
+              <a:t>발표에서는 '실무 기준선은 자기 작업에서 재측정'을 반드시 덧붙인다.</a:t>
+            </a:r>
+          </a:p>
+          <a:p>
+            <a:r>
+              <a:t>근거: experiments/exp05_verbosity_effort.py</a:t>
+            </a:r>
+          </a:p>
+          <a:p>
+            <a:r>
+              <a:t>증거 범위: 인코딩 실측</a:t>
             </a:r>
           </a:p>
         </p:txBody>
@@ -2433,27 +2888,27 @@
           <a:lstStyle/>
           <a:p>
             <a:r>
-              <a:t>고정 20,000 + 가변 1,000 + 출력 1,500, Sonnet 단가, 100콜 조건의 계산이다.</a:t>
-            </a:r>
-          </a:p>
-          <a:p>
-            <a:r>
-              <a:t>히트율은 가정값이다. 실제 값은 자기 usage의 cache_read 필드로 측정해야 한다.</a:t>
-            </a:r>
-          </a:p>
-          <a:p>
-            <a:r>
-              <a:t>저장료·TTL·최소 길이는 모델별로 다르다. 미확인 기준은 할인 가정을 하지 않는다.</a:t>
-            </a:r>
-          </a:p>
-          <a:p>
-            <a:r>
-              <a:t>근거: experiments/exp03_prompt_caching.py</a:t>
-            </a:r>
-          </a:p>
-          <a:p>
-            <a:r>
-              <a:t>증거 범위: 비용 시나리오 (100콜)</a:t>
+              <a:t>사고 토큰은 눈에 안 보이지만 출력 단가로 청구된다. 단계별 비용은 사고량 가정의 시나리오다.</a:t>
+            </a:r>
+          </a:p>
+          <a:p>
+            <a:r>
+              <a:t>effort를 낮추면 어려운 작업의 정확도가 떨어질 수 있다. '전부 낮춰라'가 아니라 '작업에 맞춰라'다.</a:t>
+            </a:r>
+          </a:p>
+          <a:p>
+            <a:r>
+              <a:t>정확도 게이트를 함께 두고 배분표를 만들 것을 권한다.</a:t>
+            </a:r>
+          </a:p>
+          <a:p>
+            <a:r>
+              <a:t>근거: experiments/exp05_verbosity_effort.py</a:t>
+            </a:r>
+          </a:p>
+          <a:p>
+            <a:r>
+              <a:t>증거 범위: 시나리오 (사고 토큰 가정)</a:t>
             </a:r>
           </a:p>
         </p:txBody>
@@ -5970,7 +6425,7 @@
                 <a:ea typeface="NanumGothic"/>
                 <a:cs typeface="NanumGothic"/>
               </a:rPr>
-              <a:t>비용 시나리오</a:t>
+              <a:t>비용 시나리오 (턴 가정)</a:t>
             </a:r>
           </a:p>
         </p:txBody>
@@ -6006,7 +6461,7 @@
                 <a:ea typeface="NanumGothic"/>
                 <a:cs typeface="NanumGothic"/>
               </a:rPr>
-              <a:t>캐시를 깨는 한 줄</a:t>
+              <a:t>원칙 4 · 결정을 스펙으로 먼저 준다</a:t>
             </a:r>
           </a:p>
         </p:txBody>
@@ -6042,7 +6497,7 @@
                 <a:ea typeface="NanumGothic"/>
                 <a:cs typeface="NanumGothic"/>
               </a:rPr>
-              <a:t>$10.05 (17.5% 더 지출)</a:t>
+              <a:t>재작업 5 → 2 사이클, 68.7% 절감</a:t>
             </a:r>
           </a:p>
         </p:txBody>
@@ -6078,7 +6533,7 @@
                 <a:ea typeface="NanumGothic"/>
                 <a:cs typeface="NanumGothic"/>
               </a:rPr>
-              <a:t>맨 앞의 타임스탬프·요청 ID는 매번 미스로 만든다</a:t>
+              <a:t>스펙 4,000토큰 작성 비용도 포함한 계산</a:t>
             </a:r>
           </a:p>
         </p:txBody>
@@ -6114,7 +6569,7 @@
                 <a:ea typeface="NanumGothic"/>
                 <a:cs typeface="NanumGothic"/>
               </a:rPr>
-              <a:t>변하는 값은 반드시 뒤로 보낸다</a:t>
+              <a:t>얕은 스펙만으로도 36.9% 절감</a:t>
             </a:r>
           </a:p>
         </p:txBody>
@@ -6150,7 +6605,7 @@
                 <a:ea typeface="NanumGothic"/>
                 <a:cs typeface="NanumGothic"/>
               </a:rPr>
-              <a:t>미스 상태의 캐싱은 안 쓰느니만 못하다</a:t>
+              <a:t>설명이 아니라 결정을 적는다 — 페이지 · 스택 · 디자인 · 수용 기준</a:t>
             </a:r>
           </a:p>
         </p:txBody>
@@ -6186,7 +6641,7 @@
                 <a:ea typeface="NanumGothic"/>
                 <a:cs typeface="NanumGothic"/>
               </a:rPr>
-              <a:t>experiments/exp03_prompt_caching.py</a:t>
+              <a:t>experiments/exp04_agent_loop_sdd.py</a:t>
             </a:r>
           </a:p>
         </p:txBody>
@@ -6399,7 +6854,7 @@
                 <a:ea typeface="NanumGothic"/>
                 <a:cs typeface="NanumGothic"/>
               </a:rPr>
-              <a:t>압축과 캐싱은 대체재가 아니다</a:t>
+              <a:t>원칙 5 · 턴 수가 비용을 지배한다</a:t>
             </a:r>
           </a:p>
         </p:txBody>
@@ -6435,7 +6890,7 @@
                 <a:ea typeface="NanumGothic"/>
                 <a:cs typeface="NanumGothic"/>
               </a:rPr>
-              <a:t>$0.4014 → $0.2007 (94% 절감)</a:t>
+              <a:t>턴 2배 → 비용 3.1배</a:t>
             </a:r>
           </a:p>
         </p:txBody>
@@ -6471,7 +6926,7 @@
                 <a:ea typeface="NanumGothic"/>
                 <a:cs typeface="NanumGothic"/>
               </a:rPr>
-              <a:t>그냥 캐싱 $0.4014 vs 절반 요약 $1.8000</a:t>
+              <a:t>5턴 $0.26 · 20턴 $2.32 · 50턴 $12.09</a:t>
             </a:r>
           </a:p>
         </p:txBody>
@@ -6507,7 +6962,7 @@
                 <a:ea typeface="NanumGothic"/>
                 <a:cs typeface="NanumGothic"/>
               </a:rPr>
-              <a:t>지울 수 있는 반복은 지우고, 지울 수 없는 반복은 고정해 캐시에 태운다</a:t>
+              <a:t>안 쓰는 코드도 매 턴 다시 실려 과금된다 (YAGNI)</a:t>
             </a:r>
           </a:p>
         </p:txBody>
@@ -6543,7 +6998,7 @@
                 <a:ea typeface="NanumGothic"/>
                 <a:cs typeface="NanumGothic"/>
               </a:rPr>
-              <a:t>압축률이 높을수록 조합의 이득도 커진다</a:t>
+              <a:t>컨텍스트는 길이보다 '반복'이 비쌉니다</a:t>
             </a:r>
           </a:p>
         </p:txBody>
@@ -6579,7 +7034,7 @@
                 <a:ea typeface="NanumGothic"/>
                 <a:cs typeface="NanumGothic"/>
               </a:rPr>
-              <a:t>experiments/exp09_dry.py</a:t>
+              <a:t>experiments/exp04_agent_loop_sdd.py</a:t>
             </a:r>
           </a:p>
         </p:txBody>
@@ -6769,7 +7224,7 @@
         </p:nvSpPr>
         <p:spPr>
           <a:xfrm>
-            <a:off x="640080" y="822960"/>
+            <a:off x="640080" y="566928"/>
             <a:ext cx="10881360" cy="822960"/>
           </a:xfrm>
           <a:prstGeom prst="rect">
@@ -6792,7 +7247,7 @@
                 <a:ea typeface="NanumGothic"/>
                 <a:cs typeface="NanumGothic"/>
               </a:rPr>
-              <a:t>긴 세션은 컴팩션으로 접는다</a:t>
+              <a:t>긴 세션일수록 가파르다</a:t>
             </a:r>
           </a:p>
         </p:txBody>
@@ -6805,7 +7260,7 @@
         </p:nvSpPr>
         <p:spPr>
           <a:xfrm>
-            <a:off x="640080" y="1783080"/>
+            <a:off x="640080" y="1261872"/>
             <a:ext cx="10881360" cy="777240"/>
           </a:xfrm>
           <a:prstGeom prst="rect">
@@ -6828,7 +7283,7 @@
                 <a:ea typeface="NanumGothic"/>
                 <a:cs typeface="NanumGothic"/>
               </a:rPr>
-              <a:t>$2.32 → $0.93 (60% 절감)</a:t>
+              <a:t>5턴 $0.26 → 50턴 $12.09</a:t>
             </a:r>
           </a:p>
         </p:txBody>
@@ -6841,7 +7296,7 @@
         </p:nvSpPr>
         <p:spPr>
           <a:xfrm>
-            <a:off x="777240" y="2862072"/>
+            <a:off x="777240" y="2029968"/>
             <a:ext cx="10652760" cy="612648"/>
           </a:xfrm>
           <a:prstGeom prst="rect">
@@ -6864,7 +7319,7 @@
                 <a:ea typeface="NanumGothic"/>
                 <a:cs typeface="NanumGothic"/>
               </a:rPr>
-              <a:t>10턴마다 접으면 $1.23 (47% 절감)</a:t>
+              <a:t>20턴에 컴팩션을 걸면 $0.93 (60% 절감)</a:t>
             </a:r>
           </a:p>
         </p:txBody>
@@ -6877,7 +7332,7 @@
         </p:nvSpPr>
         <p:spPr>
           <a:xfrm>
-            <a:off x="777240" y="3502152"/>
+            <a:off x="777240" y="2542032"/>
             <a:ext cx="10652760" cy="612648"/>
           </a:xfrm>
           <a:prstGeom prst="rect">
@@ -6900,56 +7355,80 @@
                 <a:ea typeface="NanumGothic"/>
                 <a:cs typeface="NanumGothic"/>
               </a:rPr>
-              <a:t>너무 자주 접으면 요약 호출이 이득을 먹는다</a:t>
-            </a:r>
-          </a:p>
-        </p:txBody>
-      </p:sp>
-      <p:sp>
-        <p:nvSpPr>
-          <p:cNvPr id="9" name="audit:body-2"/>
-          <p:cNvSpPr txBox="1"/>
-          <p:nvPr/>
-        </p:nvSpPr>
-        <p:spPr>
-          <a:xfrm>
-            <a:off x="777240" y="4142231"/>
-            <a:ext cx="10652760" cy="612648"/>
-          </a:xfrm>
-          <a:prstGeom prst="rect">
-            <a:avLst/>
-          </a:prstGeom>
-          <a:noFill/>
-        </p:spPr>
-        <p:txBody>
-          <a:bodyPr wrap="square" lIns="0" rIns="0" tIns="0" bIns="0">
-            <a:spAutoFit/>
-          </a:bodyPr>
-          <a:lstStyle/>
-          <a:p>
-            <a:r>
-              <a:rPr sz="1750" b="0">
-                <a:solidFill>
-                  <a:srgbClr val="ECF1F6"/>
-                </a:solidFill>
-                <a:latin typeface="NanumGothic"/>
-                <a:ea typeface="NanumGothic"/>
-                <a:cs typeface="NanumGothic"/>
-              </a:rPr>
-              <a:t>최적 주기는 세션 길이와 요약 비용으로 정해진다</a:t>
-            </a:r>
-          </a:p>
-        </p:txBody>
-      </p:sp>
-      <p:sp>
-        <p:nvSpPr>
-          <p:cNvPr id="10" name="audit:source"/>
-          <p:cNvSpPr txBox="1"/>
-          <p:nvPr/>
-        </p:nvSpPr>
-        <p:spPr>
-          <a:xfrm>
-            <a:off x="640080" y="6080760"/>
+              <a:t>안 쓰는 코드도 매 턴 다시 실려 과금된다</a:t>
+            </a:r>
+          </a:p>
+        </p:txBody>
+      </p:sp>
+      <p:pic>
+        <p:nvPicPr>
+          <p:cNvPr id="9" name="Picture 8" descr="turns.png"/>
+          <p:cNvPicPr>
+            <a:picLocks noChangeAspect="1"/>
+          </p:cNvPicPr>
+          <p:nvPr/>
+        </p:nvPicPr>
+        <p:blipFill>
+          <a:blip r:embed="rId2"/>
+          <a:stretch>
+            <a:fillRect/>
+          </a:stretch>
+        </p:blipFill>
+        <p:spPr>
+          <a:xfrm>
+            <a:off x="777240" y="3101593"/>
+            <a:ext cx="10652760" cy="2959100"/>
+          </a:xfrm>
+          <a:prstGeom prst="rect">
+            <a:avLst/>
+          </a:prstGeom>
+        </p:spPr>
+      </p:pic>
+      <p:sp>
+        <p:nvSpPr>
+          <p:cNvPr id="10" name="audit:chart-caption"/>
+          <p:cNvSpPr txBox="1"/>
+          <p:nvPr/>
+        </p:nvSpPr>
+        <p:spPr>
+          <a:xfrm>
+            <a:off x="777240" y="6135624"/>
+            <a:ext cx="10652760" cy="237744"/>
+          </a:xfrm>
+          <a:prstGeom prst="rect">
+            <a:avLst/>
+          </a:prstGeom>
+          <a:noFill/>
+        </p:spPr>
+        <p:txBody>
+          <a:bodyPr wrap="square" lIns="0" rIns="0" tIns="0" bIns="0">
+            <a:spAutoFit/>
+          </a:bodyPr>
+          <a:lstStyle/>
+          <a:p>
+            <a:r>
+              <a:rPr sz="950" b="0">
+                <a:solidFill>
+                  <a:srgbClr val="93A4B5"/>
+                </a:solidFill>
+                <a:latin typeface="NanumGothic"/>
+                <a:ea typeface="NanumGothic"/>
+                <a:cs typeface="NanumGothic"/>
+              </a:rPr>
+              <a:t>그래프 · 세션 비용 (USD) · turns.png</a:t>
+            </a:r>
+          </a:p>
+        </p:txBody>
+      </p:sp>
+      <p:sp>
+        <p:nvSpPr>
+          <p:cNvPr id="11" name="audit:source"/>
+          <p:cNvSpPr txBox="1"/>
+          <p:nvPr/>
+        </p:nvSpPr>
+        <p:spPr>
+          <a:xfrm>
+            <a:off x="777240" y="6382512"/>
             <a:ext cx="10972800" cy="274320"/>
           </a:xfrm>
           <a:prstGeom prst="rect">
@@ -6979,13 +7458,13 @@
       </p:sp>
       <p:sp>
         <p:nvSpPr>
-          <p:cNvPr id="11" name="audit:footer"/>
-          <p:cNvSpPr txBox="1"/>
-          <p:nvPr/>
-        </p:nvSpPr>
-        <p:spPr>
-          <a:xfrm>
-            <a:off x="640080" y="6419088"/>
+          <p:cNvPr id="12" name="audit:footer"/>
+          <p:cNvSpPr txBox="1"/>
+          <p:nvPr/>
+        </p:nvSpPr>
+        <p:spPr>
+          <a:xfrm>
+            <a:off x="777240" y="6583680"/>
             <a:ext cx="10972800" cy="256032"/>
           </a:xfrm>
           <a:prstGeom prst="rect">
@@ -7149,7 +7628,7 @@
                 <a:ea typeface="NanumGothic"/>
                 <a:cs typeface="NanumGothic"/>
               </a:rPr>
-              <a:t>전체 시스템 비용 시나리오</a:t>
+              <a:t>비용 시나리오 (100콜)</a:t>
             </a:r>
           </a:p>
         </p:txBody>
@@ -7185,7 +7664,7 @@
                 <a:ea typeface="NanumGothic"/>
                 <a:cs typeface="NanumGothic"/>
               </a:rPr>
-              <a:t>툴 출력과 서브에이전트는 전체 비용으로 본다</a:t>
+              <a:t>캐싱 · 오늘 바로 켤 수 있는 레버</a:t>
             </a:r>
           </a:p>
         </p:txBody>
@@ -7221,7 +7700,7 @@
                 <a:ea typeface="NanumGothic"/>
                 <a:cs typeface="NanumGothic"/>
               </a:rPr>
-              <a:t>$5.6010 → $2.7360</a:t>
+              <a:t>$8.55 → $3.22 (62.4% 절감)</a:t>
             </a:r>
           </a:p>
         </p:txBody>
@@ -7257,7 +7736,7 @@
                 <a:ea typeface="NanumGothic"/>
                 <a:cs typeface="NanumGothic"/>
               </a:rPr>
-              <a:t>툴 읽기 누적 전송 1,680,000 토큰 (20턴)</a:t>
+              <a:t>쓰기 프리미엄은 두 번째 호출에서 회수된다</a:t>
             </a:r>
           </a:p>
         </p:txBody>
@@ -7293,7 +7772,7 @@
                 <a:ea typeface="NanumGothic"/>
                 <a:cs typeface="NanumGothic"/>
               </a:rPr>
-              <a:t>컴팩션 $3.4425 · 서브에이전트 $2.736</a:t>
+              <a:t>고정 블록(시스템 · 툴 정의 · 규약)을 맨 앞으로 모은다</a:t>
             </a:r>
           </a:p>
         </p:txBody>
@@ -7329,7 +7808,7 @@
                 <a:ea typeface="NanumGothic"/>
                 <a:cs typeface="NanumGothic"/>
               </a:rPr>
-              <a:t>자식 호출·요약 비용까지 포함해 비교한다</a:t>
+              <a:t>최소 길이를 확인한다 — Haiku 4.5는 4,096토큰</a:t>
             </a:r>
           </a:p>
         </p:txBody>
@@ -7365,7 +7844,7 @@
                 <a:ea typeface="NanumGothic"/>
                 <a:cs typeface="NanumGothic"/>
               </a:rPr>
-              <a:t>experiments/exp11_tool_output_bloat.py</a:t>
+              <a:t>experiments/exp03_prompt_caching.py</a:t>
             </a:r>
           </a:p>
         </p:txBody>
@@ -7542,7 +8021,7 @@
                 <a:ea typeface="NanumGothic"/>
                 <a:cs typeface="NanumGothic"/>
               </a:rPr>
-              <a:t>시나리오 (10,000콜)</a:t>
+              <a:t>비용 시나리오 (100콜)</a:t>
             </a:r>
           </a:p>
         </p:txBody>
@@ -7555,7 +8034,7 @@
         </p:nvSpPr>
         <p:spPr>
           <a:xfrm>
-            <a:off x="640080" y="822960"/>
+            <a:off x="640080" y="566928"/>
             <a:ext cx="10881360" cy="822960"/>
           </a:xfrm>
           <a:prstGeom prst="rect">
@@ -7578,7 +8057,7 @@
                 <a:ea typeface="NanumGothic"/>
                 <a:cs typeface="NanumGothic"/>
               </a:rPr>
-              <a:t>모델 라우팅 · 쉬운 요청에 비싼 모델을 쓰지 않는다</a:t>
+              <a:t>캐시는 조건이 맞을 때만 이득</a:t>
             </a:r>
           </a:p>
         </p:txBody>
@@ -7591,7 +8070,7 @@
         </p:nvSpPr>
         <p:spPr>
           <a:xfrm>
-            <a:off x="640080" y="1783080"/>
+            <a:off x="640080" y="1261872"/>
             <a:ext cx="10881360" cy="777240"/>
           </a:xfrm>
           <a:prstGeom prst="rect">
@@ -7614,7 +8093,7 @@
                 <a:ea typeface="NanumGothic"/>
                 <a:cs typeface="NanumGothic"/>
               </a:rPr>
-              <a:t>전부 강 $350 → 절반 $184</a:t>
+              <a:t>$8.55 → $3.219 (-62%)</a:t>
             </a:r>
           </a:p>
         </p:txBody>
@@ -7627,7 +8106,7 @@
         </p:nvSpPr>
         <p:spPr>
           <a:xfrm>
-            <a:off x="777240" y="2862072"/>
+            <a:off x="777240" y="2029968"/>
             <a:ext cx="10652760" cy="612648"/>
           </a:xfrm>
           <a:prstGeom prst="rect">
@@ -7650,7 +8129,7 @@
                 <a:ea typeface="NanumGothic"/>
                 <a:cs typeface="NanumGothic"/>
               </a:rPr>
-              <a:t>절반만 라우팅해도 47% 절감</a:t>
+              <a:t>프리픽스를 매번 바꾸면 $10.05 (+17.5%)</a:t>
             </a:r>
           </a:p>
         </p:txBody>
@@ -7663,7 +8142,7 @@
         </p:nvSpPr>
         <p:spPr>
           <a:xfrm>
-            <a:off x="777240" y="3502152"/>
+            <a:off x="777240" y="2542032"/>
             <a:ext cx="10652760" cy="612648"/>
           </a:xfrm>
           <a:prstGeom prst="rect">
@@ -7686,56 +8165,80 @@
                 <a:ea typeface="NanumGothic"/>
                 <a:cs typeface="NanumGothic"/>
               </a:rPr>
-              <a:t>공격적 라우팅은 $35.17 (90% 절감)</a:t>
-            </a:r>
-          </a:p>
-        </p:txBody>
-      </p:sp>
-      <p:sp>
-        <p:nvSpPr>
-          <p:cNvPr id="9" name="audit:body-2"/>
-          <p:cNvSpPr txBox="1"/>
-          <p:nvPr/>
-        </p:nvSpPr>
-        <p:spPr>
-          <a:xfrm>
-            <a:off x="777240" y="4142231"/>
-            <a:ext cx="10652760" cy="612648"/>
-          </a:xfrm>
-          <a:prstGeom prst="rect">
-            <a:avLst/>
-          </a:prstGeom>
-          <a:noFill/>
-        </p:spPr>
-        <p:txBody>
-          <a:bodyPr wrap="square" lIns="0" rIns="0" tIns="0" bIns="0">
-            <a:spAutoFit/>
-          </a:bodyPr>
-          <a:lstStyle/>
-          <a:p>
-            <a:r>
-              <a:rPr sz="1750" b="0">
-                <a:solidFill>
-                  <a:srgbClr val="ECF1F6"/>
-                </a:solidFill>
-                <a:latin typeface="NanumGothic"/>
-                <a:ea typeface="NanumGothic"/>
-                <a:cs typeface="NanumGothic"/>
-              </a:rPr>
-              <a:t>품질 측정 도구가 먼저다 — 임계값은 주기적으로 재보정</a:t>
-            </a:r>
-          </a:p>
-        </p:txBody>
-      </p:sp>
-      <p:sp>
-        <p:nvSpPr>
-          <p:cNvPr id="10" name="audit:source"/>
-          <p:cNvSpPr txBox="1"/>
-          <p:nvPr/>
-        </p:nvSpPr>
-        <p:spPr>
-          <a:xfrm>
-            <a:off x="640080" y="6080760"/>
+              <a:t>고정 블록을 앞으로 모아 적중률을 올린다</a:t>
+            </a:r>
+          </a:p>
+        </p:txBody>
+      </p:sp>
+      <p:pic>
+        <p:nvPicPr>
+          <p:cNvPr id="9" name="Picture 8" descr="cache.png"/>
+          <p:cNvPicPr>
+            <a:picLocks noChangeAspect="1"/>
+          </p:cNvPicPr>
+          <p:nvPr/>
+        </p:nvPicPr>
+        <p:blipFill>
+          <a:blip r:embed="rId2"/>
+          <a:stretch>
+            <a:fillRect/>
+          </a:stretch>
+        </p:blipFill>
+        <p:spPr>
+          <a:xfrm>
+            <a:off x="777240" y="3101593"/>
+            <a:ext cx="10652760" cy="2959100"/>
+          </a:xfrm>
+          <a:prstGeom prst="rect">
+            <a:avLst/>
+          </a:prstGeom>
+        </p:spPr>
+      </p:pic>
+      <p:sp>
+        <p:nvSpPr>
+          <p:cNvPr id="10" name="audit:chart-caption"/>
+          <p:cNvSpPr txBox="1"/>
+          <p:nvPr/>
+        </p:nvSpPr>
+        <p:spPr>
+          <a:xfrm>
+            <a:off x="777240" y="6135624"/>
+            <a:ext cx="10652760" cy="237744"/>
+          </a:xfrm>
+          <a:prstGeom prst="rect">
+            <a:avLst/>
+          </a:prstGeom>
+          <a:noFill/>
+        </p:spPr>
+        <p:txBody>
+          <a:bodyPr wrap="square" lIns="0" rIns="0" tIns="0" bIns="0">
+            <a:spAutoFit/>
+          </a:bodyPr>
+          <a:lstStyle/>
+          <a:p>
+            <a:r>
+              <a:rPr sz="950" b="0">
+                <a:solidFill>
+                  <a:srgbClr val="93A4B5"/>
+                </a:solidFill>
+                <a:latin typeface="NanumGothic"/>
+                <a:ea typeface="NanumGothic"/>
+                <a:cs typeface="NanumGothic"/>
+              </a:rPr>
+              <a:t>그래프 · 100콜 비용 (USD) · cache.png</a:t>
+            </a:r>
+          </a:p>
+        </p:txBody>
+      </p:sp>
+      <p:sp>
+        <p:nvSpPr>
+          <p:cNvPr id="11" name="audit:source"/>
+          <p:cNvSpPr txBox="1"/>
+          <p:nvPr/>
+        </p:nvSpPr>
+        <p:spPr>
+          <a:xfrm>
+            <a:off x="777240" y="6382512"/>
             <a:ext cx="10972800" cy="274320"/>
           </a:xfrm>
           <a:prstGeom prst="rect">
@@ -7758,20 +8261,20 @@
                 <a:ea typeface="NanumGothic"/>
                 <a:cs typeface="NanumGothic"/>
               </a:rPr>
-              <a:t>experiments/exp06_other_levers.py</a:t>
-            </a:r>
-          </a:p>
-        </p:txBody>
-      </p:sp>
-      <p:sp>
-        <p:nvSpPr>
-          <p:cNvPr id="11" name="audit:footer"/>
-          <p:cNvSpPr txBox="1"/>
-          <p:nvPr/>
-        </p:nvSpPr>
-        <p:spPr>
-          <a:xfrm>
-            <a:off x="640080" y="6419088"/>
+              <a:t>experiments/exp03_prompt_caching.py</a:t>
+            </a:r>
+          </a:p>
+        </p:txBody>
+      </p:sp>
+      <p:sp>
+        <p:nvSpPr>
+          <p:cNvPr id="12" name="audit:footer"/>
+          <p:cNvSpPr txBox="1"/>
+          <p:nvPr/>
+        </p:nvSpPr>
+        <p:spPr>
+          <a:xfrm>
+            <a:off x="777240" y="6583680"/>
             <a:ext cx="10972800" cy="256032"/>
           </a:xfrm>
           <a:prstGeom prst="rect">
@@ -7935,7 +8438,7 @@
                 <a:ea typeface="NanumGothic"/>
                 <a:cs typeface="NanumGothic"/>
               </a:rPr>
-              <a:t>가격표 + 시나리오</a:t>
+              <a:t>비용 시나리오</a:t>
             </a:r>
           </a:p>
         </p:txBody>
@@ -7971,7 +8474,7 @@
                 <a:ea typeface="NanumGothic"/>
                 <a:cs typeface="NanumGothic"/>
               </a:rPr>
-              <a:t>배치 API · 지연을 할인으로 바꾼다</a:t>
+              <a:t>압축과 캐싱은 대체재가 아니다</a:t>
             </a:r>
           </a:p>
         </p:txBody>
@@ -8007,7 +8510,7 @@
                 <a:ea typeface="NanumGothic"/>
                 <a:cs typeface="NanumGothic"/>
               </a:rPr>
-              <a:t>50,000건 $675 → $337.50</a:t>
+              <a:t>$0.4014 → $0.2007 (94% 절감)</a:t>
             </a:r>
           </a:p>
         </p:txBody>
@@ -8043,7 +8546,7 @@
                 <a:ea typeface="NanumGothic"/>
                 <a:cs typeface="NanumGothic"/>
               </a:rPr>
-              <a:t>입력·출력 모두 50% 할인</a:t>
+              <a:t>그냥 캐싱 $0.4014 vs 절반 요약 $1.8000</a:t>
             </a:r>
           </a:p>
         </p:txBody>
@@ -8079,7 +8582,7 @@
                 <a:ea typeface="NanumGothic"/>
                 <a:cs typeface="NanumGothic"/>
               </a:rPr>
-              <a:t>24시간 안에 끝나면 되는 잡만</a:t>
+              <a:t>지울 수 있는 반복은 지우고, 지울 수 없는 반복은 고정해 캐시에 태운다</a:t>
             </a:r>
           </a:p>
         </p:txBody>
@@ -8115,7 +8618,7 @@
                 <a:ea typeface="NanumGothic"/>
                 <a:cs typeface="NanumGothic"/>
               </a:rPr>
-              <a:t>야간 평가 · 대량 분류 · 리포트 생성 · 레포 전체 분석</a:t>
+              <a:t>압축률이 높을수록 조합의 이득도 커진다</a:t>
             </a:r>
           </a:p>
         </p:txBody>
@@ -8151,7 +8654,7 @@
                 <a:ea typeface="NanumGothic"/>
                 <a:cs typeface="NanumGothic"/>
               </a:rPr>
-              <a:t>experiments/exp06_other_levers.py</a:t>
+              <a:t>experiments/exp09_dry.py</a:t>
             </a:r>
           </a:p>
         </p:txBody>
@@ -8328,7 +8831,7 @@
                 <a:ea typeface="NanumGothic"/>
                 <a:cs typeface="NanumGothic"/>
               </a:rPr>
-              <a:t>시나리오</a:t>
+              <a:t>비용 시나리오</a:t>
             </a:r>
           </a:p>
         </p:txBody>
@@ -8364,7 +8867,7 @@
                 <a:ea typeface="NanumGothic"/>
                 <a:cs typeface="NanumGothic"/>
               </a:rPr>
-              <a:t>두 습관, 같은 결과물</a:t>
+              <a:t>긴 세션은 컴팩션으로 접는다</a:t>
             </a:r>
           </a:p>
         </p:txBody>
@@ -8400,7 +8903,7 @@
                 <a:ea typeface="NanumGothic"/>
                 <a:cs typeface="NanumGothic"/>
               </a:rPr>
-              <a:t>페르소나 19.0배 (기존 가정 20.8배)</a:t>
+              <a:t>$2.32 → $0.93 (60% 절감)</a:t>
             </a:r>
           </a:p>
         </p:txBody>
@@ -8436,7 +8939,7 @@
                 <a:ea typeface="NanumGothic"/>
                 <a:cs typeface="NanumGothic"/>
               </a:rPr>
-              <a:t>A: 6턴 · 전체 재출력 · 과한 사고 / B: 2턴 · 짧은 패치</a:t>
+              <a:t>10턴마다 접으면 $1.23 (47% 절감)</a:t>
             </a:r>
           </a:p>
         </p:txBody>
@@ -8472,7 +8975,7 @@
                 <a:ea typeface="NanumGothic"/>
                 <a:cs typeface="NanumGothic"/>
               </a:rPr>
-              <a:t>연 환산 $18,943 차이 (기존 가정 $20,832)</a:t>
+              <a:t>너무 자주 접으면 요약 호출이 이득을 먹는다</a:t>
             </a:r>
           </a:p>
         </p:txBody>
@@ -8508,7 +9011,7 @@
                 <a:ea typeface="NanumGothic"/>
                 <a:cs typeface="NanumGothic"/>
               </a:rPr>
-              <a:t>같은 작업 1,760건/년을 가정한 비교</a:t>
+              <a:t>최적 주기는 세션 길이와 요약 비용으로 정해진다</a:t>
             </a:r>
           </a:p>
         </p:txBody>
@@ -8544,7 +9047,7 @@
                 <a:ea typeface="NanumGothic"/>
                 <a:cs typeface="NanumGothic"/>
               </a:rPr>
-              <a:t>demo/compare_personas.py</a:t>
+              <a:t>experiments/exp04_agent_loop_sdd.py</a:t>
             </a:r>
           </a:p>
         </p:txBody>
@@ -8721,7 +9224,7 @@
                 <a:ea typeface="NanumGothic"/>
                 <a:cs typeface="NanumGothic"/>
               </a:rPr>
-              <a:t>순차 시나리오</a:t>
+              <a:t>가격표 + 시나리오</a:t>
             </a:r>
           </a:p>
         </p:txBody>
@@ -8757,7 +9260,7 @@
                 <a:ea typeface="NanumGothic"/>
                 <a:cs typeface="NanumGothic"/>
               </a:rPr>
-              <a:t>레버는 곱해진다</a:t>
+              <a:t>배치 API · 지연을 할인으로 바꾼다</a:t>
             </a:r>
           </a:p>
         </p:txBody>
@@ -8793,7 +9296,7 @@
                 <a:ea typeface="NanumGothic"/>
                 <a:cs typeface="NanumGothic"/>
               </a:rPr>
-              <a:t>85.825% (잔여 14%)</a:t>
+              <a:t>50,000건 $675 → $337.50</a:t>
             </a:r>
           </a:p>
         </p:txBody>
@@ -8829,7 +9332,7 @@
                 <a:ea typeface="NanumGothic"/>
                 <a:cs typeface="NanumGothic"/>
               </a:rPr>
-              <a:t>시맨틱 캐시 → 라우팅 → 캐싱 → verbosity/effort → 배치</a:t>
+              <a:t>입력·출력 모두 50% 할인</a:t>
             </a:r>
           </a:p>
         </p:txBody>
@@ -8865,7 +9368,7 @@
                 <a:ea typeface="NanumGothic"/>
                 <a:cs typeface="NanumGothic"/>
               </a:rPr>
-              <a:t>잔여 비용에 순차 적용한 산술 결과</a:t>
+              <a:t>24시간 안에 끝나면 되는 잡만</a:t>
             </a:r>
           </a:p>
         </p:txBody>
@@ -8901,7 +9404,7 @@
                 <a:ea typeface="NanumGothic"/>
                 <a:cs typeface="NanumGothic"/>
               </a:rPr>
-              <a:t>레버 간 중복·상호작용은 검증하지 않았다</a:t>
+              <a:t>야간 평가 · 대량 분류 · 리포트 생성 · 레포 전체 분석</a:t>
             </a:r>
           </a:p>
         </p:txBody>
@@ -9114,7 +9617,7 @@
                 <a:ea typeface="NanumGothic"/>
                 <a:cs typeface="NanumGothic"/>
               </a:rPr>
-              <a:t>저장 API 로그 재계산</a:t>
+              <a:t>추정 usage 재계산</a:t>
             </a:r>
           </a:p>
         </p:txBody>
@@ -9150,7 +9653,7 @@
                 <a:ea typeface="NanumGothic"/>
                 <a:cs typeface="NanumGothic"/>
               </a:rPr>
-              <a:t>안 보이는 사고 토큰</a:t>
+              <a:t>사례 · 카페 랜딩 한 페이지</a:t>
             </a:r>
           </a:p>
         </p:txBody>
@@ -9186,7 +9689,7 @@
                 <a:ea typeface="NanumGothic"/>
                 <a:cs typeface="NanumGothic"/>
               </a:rPr>
-              <a:t>199.47배 (기존 환산 240.02배)</a:t>
+              <a:t>토큰 +1.8% · 비용 8.3% 감소</a:t>
             </a:r>
           </a:p>
         </p:txBody>
@@ -9222,7 +9725,7 @@
                 <a:ea typeface="NanumGothic"/>
                 <a:cs typeface="NanumGothic"/>
               </a:rPr>
-              <a:t>같은 문제를 조건당 6회 실행한 저장 로그 30행</a:t>
+              <a:t>한 문장 지시 vs 4필드 스펙 — 같은 목표</a:t>
             </a:r>
           </a:p>
         </p:txBody>
@@ -9258,7 +9761,7 @@
                 <a:ea typeface="NanumGothic"/>
                 <a:cs typeface="NanumGothic"/>
               </a:rPr>
-              <a:t>사고가 난 호출에서 사고 토큰 비중 99.625%</a:t>
+              <a:t>GPT-5 8.3% · Sonnet 7.6% · 캐시 미적용 8.1%</a:t>
             </a:r>
           </a:p>
         </p:txBody>
@@ -9294,7 +9797,7 @@
                 <a:ea typeface="NanumGothic"/>
                 <a:cs typeface="NanumGothic"/>
               </a:rPr>
-              <a:t>예산을 지정하지 않으면 사실상 '무제한' — 명시적으로 정한다</a:t>
+              <a:t>입력은 늘고, 비싼 출력은 줄었다</a:t>
             </a:r>
           </a:p>
         </p:txBody>
@@ -9330,7 +9833,7 @@
                 <a:ea typeface="NanumGothic"/>
                 <a:cs typeface="NanumGothic"/>
               </a:rPr>
-              <a:t>results/thinking_sweep.jsonl (30 rows)</a:t>
+              <a:t>demo/vibe_vs_spec/README.md</a:t>
             </a:r>
           </a:p>
         </p:txBody>
@@ -9507,7 +10010,7 @@
                 <a:ea typeface="NanumGothic"/>
                 <a:cs typeface="NanumGothic"/>
               </a:rPr>
-              <a:t>추정 usage 재계산</a:t>
+              <a:t>추정치 재계산</a:t>
             </a:r>
           </a:p>
         </p:txBody>
@@ -9520,7 +10023,7 @@
         </p:nvSpPr>
         <p:spPr>
           <a:xfrm>
-            <a:off x="640080" y="822960"/>
+            <a:off x="640080" y="566928"/>
             <a:ext cx="10881360" cy="822960"/>
           </a:xfrm>
           <a:prstGeom prst="rect">
@@ -9543,7 +10046,7 @@
                 <a:ea typeface="NanumGothic"/>
                 <a:cs typeface="NanumGothic"/>
               </a:rPr>
-              <a:t>사례 · 카페 랜딩 한 페이지</a:t>
+              <a:t>무엇이 비용을 움직였나</a:t>
             </a:r>
           </a:p>
         </p:txBody>
@@ -9556,7 +10059,7 @@
         </p:nvSpPr>
         <p:spPr>
           <a:xfrm>
-            <a:off x="640080" y="1783080"/>
+            <a:off x="640080" y="1261872"/>
             <a:ext cx="10881360" cy="777240"/>
           </a:xfrm>
           <a:prstGeom prst="rect">
@@ -9579,7 +10082,7 @@
                 <a:ea typeface="NanumGothic"/>
                 <a:cs typeface="NanumGothic"/>
               </a:rPr>
-              <a:t>토큰 +1.8% · 비용 8.3% 감소</a:t>
+              <a:t>합계 7,868 → 8,010 (+1.8%)</a:t>
             </a:r>
           </a:p>
         </p:txBody>
@@ -9592,7 +10095,7 @@
         </p:nvSpPr>
         <p:spPr>
           <a:xfrm>
-            <a:off x="777240" y="2862072"/>
+            <a:off x="777240" y="2029968"/>
             <a:ext cx="10652760" cy="612648"/>
           </a:xfrm>
           <a:prstGeom prst="rect">
@@ -9615,7 +10118,7 @@
                 <a:ea typeface="NanumGothic"/>
                 <a:cs typeface="NanumGothic"/>
               </a:rPr>
-              <a:t>한 문장 지시 vs 4필드 스펙 — 같은 목표</a:t>
+              <a:t>비캐시 입력 ↑ · 추론+출력 ↓</a:t>
             </a:r>
           </a:p>
         </p:txBody>
@@ -9628,7 +10131,7 @@
         </p:nvSpPr>
         <p:spPr>
           <a:xfrm>
-            <a:off x="777240" y="3502152"/>
+            <a:off x="777240" y="2542032"/>
             <a:ext cx="10652760" cy="612648"/>
           </a:xfrm>
           <a:prstGeom prst="rect">
@@ -9651,56 +10154,80 @@
                 <a:ea typeface="NanumGothic"/>
                 <a:cs typeface="NanumGothic"/>
               </a:rPr>
-              <a:t>GPT-5 8.3% · Sonnet 7.6% · 캐시 미적용 8.1%</a:t>
-            </a:r>
-          </a:p>
-        </p:txBody>
-      </p:sp>
-      <p:sp>
-        <p:nvSpPr>
-          <p:cNvPr id="9" name="audit:body-2"/>
-          <p:cNvSpPr txBox="1"/>
-          <p:nvPr/>
-        </p:nvSpPr>
-        <p:spPr>
-          <a:xfrm>
-            <a:off x="777240" y="4142231"/>
-            <a:ext cx="10652760" cy="612648"/>
-          </a:xfrm>
-          <a:prstGeom prst="rect">
-            <a:avLst/>
-          </a:prstGeom>
-          <a:noFill/>
-        </p:spPr>
-        <p:txBody>
-          <a:bodyPr wrap="square" lIns="0" rIns="0" tIns="0" bIns="0">
-            <a:spAutoFit/>
-          </a:bodyPr>
-          <a:lstStyle/>
-          <a:p>
-            <a:r>
-              <a:rPr sz="1750" b="0">
-                <a:solidFill>
-                  <a:srgbClr val="ECF1F6"/>
-                </a:solidFill>
-                <a:latin typeface="NanumGothic"/>
-                <a:ea typeface="NanumGothic"/>
-                <a:cs typeface="NanumGothic"/>
-              </a:rPr>
-              <a:t>입력은 늘고, 비싼 출력은 줄었다</a:t>
-            </a:r>
-          </a:p>
-        </p:txBody>
-      </p:sp>
-      <p:sp>
-        <p:nvSpPr>
-          <p:cNvPr id="10" name="audit:source"/>
-          <p:cNvSpPr txBox="1"/>
-          <p:nvPr/>
-        </p:nvSpPr>
-        <p:spPr>
-          <a:xfrm>
-            <a:off x="640080" y="6080760"/>
+              <a:t>합계는 거의 그대로, 구조만 바뀌었다</a:t>
+            </a:r>
+          </a:p>
+        </p:txBody>
+      </p:sp>
+      <p:pic>
+        <p:nvPicPr>
+          <p:cNvPr id="9" name="Picture 8" descr="case_tokens.png"/>
+          <p:cNvPicPr>
+            <a:picLocks noChangeAspect="1"/>
+          </p:cNvPicPr>
+          <p:nvPr/>
+        </p:nvPicPr>
+        <p:blipFill>
+          <a:blip r:embed="rId2"/>
+          <a:stretch>
+            <a:fillRect/>
+          </a:stretch>
+        </p:blipFill>
+        <p:spPr>
+          <a:xfrm>
+            <a:off x="777240" y="3101593"/>
+            <a:ext cx="10652760" cy="2959100"/>
+          </a:xfrm>
+          <a:prstGeom prst="rect">
+            <a:avLst/>
+          </a:prstGeom>
+        </p:spPr>
+      </p:pic>
+      <p:sp>
+        <p:nvSpPr>
+          <p:cNvPr id="10" name="audit:chart-caption"/>
+          <p:cNvSpPr txBox="1"/>
+          <p:nvPr/>
+        </p:nvSpPr>
+        <p:spPr>
+          <a:xfrm>
+            <a:off x="777240" y="6135624"/>
+            <a:ext cx="10652760" cy="237744"/>
+          </a:xfrm>
+          <a:prstGeom prst="rect">
+            <a:avLst/>
+          </a:prstGeom>
+          <a:noFill/>
+        </p:spPr>
+        <p:txBody>
+          <a:bodyPr wrap="square" lIns="0" rIns="0" tIns="0" bIns="0">
+            <a:spAutoFit/>
+          </a:bodyPr>
+          <a:lstStyle/>
+          <a:p>
+            <a:r>
+              <a:rPr sz="950" b="0">
+                <a:solidFill>
+                  <a:srgbClr val="93A4B5"/>
+                </a:solidFill>
+                <a:latin typeface="NanumGothic"/>
+                <a:ea typeface="NanumGothic"/>
+                <a:cs typeface="NanumGothic"/>
+              </a:rPr>
+              <a:t>그래프 · 토큰 수 (추정) · case_tokens.png</a:t>
+            </a:r>
+          </a:p>
+        </p:txBody>
+      </p:sp>
+      <p:sp>
+        <p:nvSpPr>
+          <p:cNvPr id="11" name="audit:source"/>
+          <p:cNvSpPr txBox="1"/>
+          <p:nvPr/>
+        </p:nvSpPr>
+        <p:spPr>
+          <a:xfrm>
+            <a:off x="777240" y="6382512"/>
             <a:ext cx="10972800" cy="274320"/>
           </a:xfrm>
           <a:prstGeom prst="rect">
@@ -9723,20 +10250,20 @@
                 <a:ea typeface="NanumGothic"/>
                 <a:cs typeface="NanumGothic"/>
               </a:rPr>
-              <a:t>demo/vibe_vs_spec/README.md</a:t>
-            </a:r>
-          </a:p>
-        </p:txBody>
-      </p:sp>
-      <p:sp>
-        <p:nvSpPr>
-          <p:cNvPr id="11" name="audit:footer"/>
-          <p:cNvSpPr txBox="1"/>
-          <p:nvPr/>
-        </p:nvSpPr>
-        <p:spPr>
-          <a:xfrm>
-            <a:off x="640080" y="6419088"/>
+              <a:t>demo/vibe_vs_spec/usage.json</a:t>
+            </a:r>
+          </a:p>
+        </p:txBody>
+      </p:sp>
+      <p:sp>
+        <p:nvSpPr>
+          <p:cNvPr id="12" name="audit:footer"/>
+          <p:cNvSpPr txBox="1"/>
+          <p:nvPr/>
+        </p:nvSpPr>
+        <p:spPr>
+          <a:xfrm>
+            <a:off x="777240" y="6583680"/>
             <a:ext cx="10972800" cy="256032"/>
           </a:xfrm>
           <a:prstGeom prst="rect">
@@ -10686,7 +11213,7 @@
                 <a:ea typeface="NanumGothic"/>
                 <a:cs typeface="NanumGothic"/>
               </a:rPr>
-              <a:t>적용 순서</a:t>
+              <a:t>단가별 비용 재계산</a:t>
             </a:r>
           </a:p>
         </p:txBody>
@@ -10699,7 +11226,7 @@
         </p:nvSpPr>
         <p:spPr>
           <a:xfrm>
-            <a:off x="640080" y="822960"/>
+            <a:off x="640080" y="566928"/>
             <a:ext cx="10881360" cy="822960"/>
           </a:xfrm>
           <a:prstGeom prst="rect">
@@ -10722,7 +11249,7 @@
                 <a:ea typeface="NanumGothic"/>
                 <a:cs typeface="NanumGothic"/>
               </a:rPr>
-              <a:t>적용 우선순위</a:t>
+              <a:t>단가가 바뀌어도 방향은 같다</a:t>
             </a:r>
           </a:p>
         </p:txBody>
@@ -10735,7 +11262,7 @@
         </p:nvSpPr>
         <p:spPr>
           <a:xfrm>
-            <a:off x="640080" y="1783080"/>
+            <a:off x="640080" y="1261872"/>
             <a:ext cx="10881360" cy="777240"/>
           </a:xfrm>
           <a:prstGeom prst="rect">
@@ -10758,7 +11285,7 @@
                 <a:ea typeface="NanumGothic"/>
                 <a:cs typeface="NanumGothic"/>
               </a:rPr>
-              <a:t>1~3번은 오늘 오후에 켤 수 있다</a:t>
+              <a:t>감소 8.3% · 7.6% · 8.1%</a:t>
             </a:r>
           </a:p>
         </p:txBody>
@@ -10771,7 +11298,7 @@
         </p:nvSpPr>
         <p:spPr>
           <a:xfrm>
-            <a:off x="777240" y="2862072"/>
+            <a:off x="777240" y="2029968"/>
             <a:ext cx="10652760" cy="612648"/>
           </a:xfrm>
           <a:prstGeom prst="rect">
@@ -10794,7 +11321,7 @@
                 <a:ea typeface="NanumGothic"/>
                 <a:cs typeface="NanumGothic"/>
               </a:rPr>
-              <a:t>낮은 난이도: 캐싱 · verbosity/effort · 배치</a:t>
+              <a:t>같은 추정 usage를 세 단가로 환산</a:t>
             </a:r>
           </a:p>
         </p:txBody>
@@ -10807,7 +11334,7 @@
         </p:nvSpPr>
         <p:spPr>
           <a:xfrm>
-            <a:off x="777240" y="3502152"/>
+            <a:off x="777240" y="2542032"/>
             <a:ext cx="10652760" cy="612648"/>
           </a:xfrm>
           <a:prstGeom prst="rect">
@@ -10830,56 +11357,80 @@
                 <a:ea typeface="NanumGothic"/>
                 <a:cs typeface="NanumGothic"/>
               </a:rPr>
-              <a:t>중간: 스펙 먼저 · 컴팩션</a:t>
-            </a:r>
-          </a:p>
-        </p:txBody>
-      </p:sp>
-      <p:sp>
-        <p:nvSpPr>
-          <p:cNvPr id="9" name="audit:body-2"/>
-          <p:cNvSpPr txBox="1"/>
-          <p:nvPr/>
-        </p:nvSpPr>
-        <p:spPr>
-          <a:xfrm>
-            <a:off x="777240" y="4142231"/>
-            <a:ext cx="10652760" cy="612648"/>
-          </a:xfrm>
-          <a:prstGeom prst="rect">
-            <a:avLst/>
-          </a:prstGeom>
-          <a:noFill/>
-        </p:spPr>
-        <p:txBody>
-          <a:bodyPr wrap="square" lIns="0" rIns="0" tIns="0" bIns="0">
-            <a:spAutoFit/>
-          </a:bodyPr>
-          <a:lstStyle/>
-          <a:p>
-            <a:r>
-              <a:rPr sz="1750" b="0">
-                <a:solidFill>
-                  <a:srgbClr val="ECF1F6"/>
-                </a:solidFill>
-                <a:latin typeface="NanumGothic"/>
-                <a:ea typeface="NanumGothic"/>
-                <a:cs typeface="NanumGothic"/>
-              </a:rPr>
-              <a:t>높은 난이도: 라우팅 · 시맨틱 캐시 · 압축</a:t>
-            </a:r>
-          </a:p>
-        </p:txBody>
-      </p:sp>
-      <p:sp>
-        <p:nvSpPr>
-          <p:cNvPr id="10" name="audit:source"/>
-          <p:cNvSpPr txBox="1"/>
-          <p:nvPr/>
-        </p:nvSpPr>
-        <p:spPr>
-          <a:xfrm>
-            <a:off x="640080" y="6080760"/>
+              <a:t>출력 단가가 높을수록 격차가 커진다</a:t>
+            </a:r>
+          </a:p>
+        </p:txBody>
+      </p:sp>
+      <p:pic>
+        <p:nvPicPr>
+          <p:cNvPr id="9" name="Picture 8" descr="case_bases.png"/>
+          <p:cNvPicPr>
+            <a:picLocks noChangeAspect="1"/>
+          </p:cNvPicPr>
+          <p:nvPr/>
+        </p:nvPicPr>
+        <p:blipFill>
+          <a:blip r:embed="rId2"/>
+          <a:stretch>
+            <a:fillRect/>
+          </a:stretch>
+        </p:blipFill>
+        <p:spPr>
+          <a:xfrm>
+            <a:off x="777240" y="3101593"/>
+            <a:ext cx="10652760" cy="2959100"/>
+          </a:xfrm>
+          <a:prstGeom prst="rect">
+            <a:avLst/>
+          </a:prstGeom>
+        </p:spPr>
+      </p:pic>
+      <p:sp>
+        <p:nvSpPr>
+          <p:cNvPr id="10" name="audit:chart-caption"/>
+          <p:cNvSpPr txBox="1"/>
+          <p:nvPr/>
+        </p:nvSpPr>
+        <p:spPr>
+          <a:xfrm>
+            <a:off x="777240" y="6135624"/>
+            <a:ext cx="10652760" cy="237744"/>
+          </a:xfrm>
+          <a:prstGeom prst="rect">
+            <a:avLst/>
+          </a:prstGeom>
+          <a:noFill/>
+        </p:spPr>
+        <p:txBody>
+          <a:bodyPr wrap="square" lIns="0" rIns="0" tIns="0" bIns="0">
+            <a:spAutoFit/>
+          </a:bodyPr>
+          <a:lstStyle/>
+          <a:p>
+            <a:r>
+              <a:rPr sz="950" b="0">
+                <a:solidFill>
+                  <a:srgbClr val="93A4B5"/>
+                </a:solidFill>
+                <a:latin typeface="NanumGothic"/>
+                <a:ea typeface="NanumGothic"/>
+                <a:cs typeface="NanumGothic"/>
+              </a:rPr>
+              <a:t>그래프 · 추정 비용 (USD) · case_bases.png</a:t>
+            </a:r>
+          </a:p>
+        </p:txBody>
+      </p:sp>
+      <p:sp>
+        <p:nvSpPr>
+          <p:cNvPr id="11" name="audit:source"/>
+          <p:cNvSpPr txBox="1"/>
+          <p:nvPr/>
+        </p:nvSpPr>
+        <p:spPr>
+          <a:xfrm>
+            <a:off x="777240" y="6382512"/>
             <a:ext cx="10972800" cy="274320"/>
           </a:xfrm>
           <a:prstGeom prst="rect">
@@ -10902,20 +11453,20 @@
                 <a:ea typeface="NanumGothic"/>
                 <a:cs typeface="NanumGothic"/>
               </a:rPr>
-              <a:t>experiments/exp06_other_levers.py</a:t>
-            </a:r>
-          </a:p>
-        </p:txBody>
-      </p:sp>
-      <p:sp>
-        <p:nvSpPr>
-          <p:cNvPr id="11" name="audit:footer"/>
-          <p:cNvSpPr txBox="1"/>
-          <p:nvPr/>
-        </p:nvSpPr>
-        <p:spPr>
-          <a:xfrm>
-            <a:off x="640080" y="6419088"/>
+              <a:t>presentation/case_vibe_vs_spec/cost_comparison.md</a:t>
+            </a:r>
+          </a:p>
+        </p:txBody>
+      </p:sp>
+      <p:sp>
+        <p:nvSpPr>
+          <p:cNvPr id="12" name="audit:footer"/>
+          <p:cNvSpPr txBox="1"/>
+          <p:nvPr/>
+        </p:nvSpPr>
+        <p:spPr>
+          <a:xfrm>
+            <a:off x="777240" y="6583680"/>
             <a:ext cx="10972800" cy="256032"/>
           </a:xfrm>
           <a:prstGeom prst="rect">
@@ -11079,6 +11630,1971 @@
                 <a:ea typeface="NanumGothic"/>
                 <a:cs typeface="NanumGothic"/>
               </a:rPr>
+              <a:t>적용 순서</a:t>
+            </a:r>
+          </a:p>
+        </p:txBody>
+      </p:sp>
+      <p:sp>
+        <p:nvSpPr>
+          <p:cNvPr id="5" name="audit:title"/>
+          <p:cNvSpPr txBox="1"/>
+          <p:nvPr/>
+        </p:nvSpPr>
+        <p:spPr>
+          <a:xfrm>
+            <a:off x="640080" y="822960"/>
+            <a:ext cx="10881360" cy="822960"/>
+          </a:xfrm>
+          <a:prstGeom prst="rect">
+            <a:avLst/>
+          </a:prstGeom>
+          <a:noFill/>
+        </p:spPr>
+        <p:txBody>
+          <a:bodyPr wrap="square" lIns="0" rIns="0" tIns="0" bIns="0">
+            <a:spAutoFit/>
+          </a:bodyPr>
+          <a:lstStyle/>
+          <a:p>
+            <a:r>
+              <a:rPr sz="2900" b="1">
+                <a:solidFill>
+                  <a:srgbClr val="ECF1F6"/>
+                </a:solidFill>
+                <a:latin typeface="NanumGothic"/>
+                <a:ea typeface="NanumGothic"/>
+                <a:cs typeface="NanumGothic"/>
+              </a:rPr>
+              <a:t>적용 우선순위</a:t>
+            </a:r>
+          </a:p>
+        </p:txBody>
+      </p:sp>
+      <p:sp>
+        <p:nvSpPr>
+          <p:cNvPr id="6" name="audit:hero"/>
+          <p:cNvSpPr txBox="1"/>
+          <p:nvPr/>
+        </p:nvSpPr>
+        <p:spPr>
+          <a:xfrm>
+            <a:off x="640080" y="1783080"/>
+            <a:ext cx="10881360" cy="777240"/>
+          </a:xfrm>
+          <a:prstGeom prst="rect">
+            <a:avLst/>
+          </a:prstGeom>
+          <a:noFill/>
+        </p:spPr>
+        <p:txBody>
+          <a:bodyPr wrap="square" lIns="0" rIns="0" tIns="0" bIns="0">
+            <a:spAutoFit/>
+          </a:bodyPr>
+          <a:lstStyle/>
+          <a:p>
+            <a:r>
+              <a:rPr sz="2900" b="1">
+                <a:solidFill>
+                  <a:srgbClr val="36D399"/>
+                </a:solidFill>
+                <a:latin typeface="NanumGothic"/>
+                <a:ea typeface="NanumGothic"/>
+                <a:cs typeface="NanumGothic"/>
+              </a:rPr>
+              <a:t>1~3번은 오늘 오후에 켤 수 있다</a:t>
+            </a:r>
+          </a:p>
+        </p:txBody>
+      </p:sp>
+      <p:sp>
+        <p:nvSpPr>
+          <p:cNvPr id="7" name="audit:body-0"/>
+          <p:cNvSpPr txBox="1"/>
+          <p:nvPr/>
+        </p:nvSpPr>
+        <p:spPr>
+          <a:xfrm>
+            <a:off x="777240" y="2862072"/>
+            <a:ext cx="10652760" cy="612648"/>
+          </a:xfrm>
+          <a:prstGeom prst="rect">
+            <a:avLst/>
+          </a:prstGeom>
+          <a:noFill/>
+        </p:spPr>
+        <p:txBody>
+          <a:bodyPr wrap="square" lIns="0" rIns="0" tIns="0" bIns="0">
+            <a:spAutoFit/>
+          </a:bodyPr>
+          <a:lstStyle/>
+          <a:p>
+            <a:r>
+              <a:rPr sz="1750" b="0">
+                <a:solidFill>
+                  <a:srgbClr val="ECF1F6"/>
+                </a:solidFill>
+                <a:latin typeface="NanumGothic"/>
+                <a:ea typeface="NanumGothic"/>
+                <a:cs typeface="NanumGothic"/>
+              </a:rPr>
+              <a:t>낮은 난이도: 캐싱 · verbosity/effort · 배치</a:t>
+            </a:r>
+          </a:p>
+        </p:txBody>
+      </p:sp>
+      <p:sp>
+        <p:nvSpPr>
+          <p:cNvPr id="8" name="audit:body-1"/>
+          <p:cNvSpPr txBox="1"/>
+          <p:nvPr/>
+        </p:nvSpPr>
+        <p:spPr>
+          <a:xfrm>
+            <a:off x="777240" y="3502152"/>
+            <a:ext cx="10652760" cy="612648"/>
+          </a:xfrm>
+          <a:prstGeom prst="rect">
+            <a:avLst/>
+          </a:prstGeom>
+          <a:noFill/>
+        </p:spPr>
+        <p:txBody>
+          <a:bodyPr wrap="square" lIns="0" rIns="0" tIns="0" bIns="0">
+            <a:spAutoFit/>
+          </a:bodyPr>
+          <a:lstStyle/>
+          <a:p>
+            <a:r>
+              <a:rPr sz="1750" b="0">
+                <a:solidFill>
+                  <a:srgbClr val="ECF1F6"/>
+                </a:solidFill>
+                <a:latin typeface="NanumGothic"/>
+                <a:ea typeface="NanumGothic"/>
+                <a:cs typeface="NanumGothic"/>
+              </a:rPr>
+              <a:t>중간: 스펙 먼저 · 컴팩션</a:t>
+            </a:r>
+          </a:p>
+        </p:txBody>
+      </p:sp>
+      <p:sp>
+        <p:nvSpPr>
+          <p:cNvPr id="9" name="audit:body-2"/>
+          <p:cNvSpPr txBox="1"/>
+          <p:nvPr/>
+        </p:nvSpPr>
+        <p:spPr>
+          <a:xfrm>
+            <a:off x="777240" y="4142231"/>
+            <a:ext cx="10652760" cy="612648"/>
+          </a:xfrm>
+          <a:prstGeom prst="rect">
+            <a:avLst/>
+          </a:prstGeom>
+          <a:noFill/>
+        </p:spPr>
+        <p:txBody>
+          <a:bodyPr wrap="square" lIns="0" rIns="0" tIns="0" bIns="0">
+            <a:spAutoFit/>
+          </a:bodyPr>
+          <a:lstStyle/>
+          <a:p>
+            <a:r>
+              <a:rPr sz="1750" b="0">
+                <a:solidFill>
+                  <a:srgbClr val="ECF1F6"/>
+                </a:solidFill>
+                <a:latin typeface="NanumGothic"/>
+                <a:ea typeface="NanumGothic"/>
+                <a:cs typeface="NanumGothic"/>
+              </a:rPr>
+              <a:t>높은 난이도: 라우팅 · 시맨틱 캐시 · 압축</a:t>
+            </a:r>
+          </a:p>
+        </p:txBody>
+      </p:sp>
+      <p:sp>
+        <p:nvSpPr>
+          <p:cNvPr id="10" name="audit:source"/>
+          <p:cNvSpPr txBox="1"/>
+          <p:nvPr/>
+        </p:nvSpPr>
+        <p:spPr>
+          <a:xfrm>
+            <a:off x="640080" y="6080760"/>
+            <a:ext cx="10972800" cy="274320"/>
+          </a:xfrm>
+          <a:prstGeom prst="rect">
+            <a:avLst/>
+          </a:prstGeom>
+          <a:noFill/>
+        </p:spPr>
+        <p:txBody>
+          <a:bodyPr wrap="square" lIns="0" rIns="0" tIns="0" bIns="0">
+            <a:spAutoFit/>
+          </a:bodyPr>
+          <a:lstStyle/>
+          <a:p>
+            <a:r>
+              <a:rPr sz="1000" b="0">
+                <a:solidFill>
+                  <a:srgbClr val="93A4B5"/>
+                </a:solidFill>
+                <a:latin typeface="NanumGothic"/>
+                <a:ea typeface="NanumGothic"/>
+                <a:cs typeface="NanumGothic"/>
+              </a:rPr>
+              <a:t>experiments/exp06_other_levers.py</a:t>
+            </a:r>
+          </a:p>
+        </p:txBody>
+      </p:sp>
+      <p:sp>
+        <p:nvSpPr>
+          <p:cNvPr id="11" name="audit:footer"/>
+          <p:cNvSpPr txBox="1"/>
+          <p:nvPr/>
+        </p:nvSpPr>
+        <p:spPr>
+          <a:xfrm>
+            <a:off x="640080" y="6419088"/>
+            <a:ext cx="10972800" cy="256032"/>
+          </a:xfrm>
+          <a:prstGeom prst="rect">
+            <a:avLst/>
+          </a:prstGeom>
+          <a:noFill/>
+        </p:spPr>
+        <p:txBody>
+          <a:bodyPr wrap="square" lIns="0" rIns="0" tIns="0" bIns="0">
+            <a:spAutoFit/>
+          </a:bodyPr>
+          <a:lstStyle/>
+          <a:p>
+            <a:r>
+              <a:rPr sz="1000" b="0">
+                <a:solidFill>
+                  <a:srgbClr val="93A4B5"/>
+                </a:solidFill>
+                <a:latin typeface="NanumGothic"/>
+                <a:ea typeface="NanumGothic"/>
+                <a:cs typeface="NanumGothic"/>
+              </a:rPr>
+              <a:t>2026-09-20  ·  근거와 조건을 함께 인용</a:t>
+            </a:r>
+          </a:p>
+        </p:txBody>
+      </p:sp>
+    </p:spTree>
+  </p:cSld>
+  <p:clrMapOvr>
+    <a:masterClrMapping/>
+  </p:clrMapOvr>
+</p:sld>
+</file>
+
+<file path=ppt/slides/slide23.xml><?xml version="1.0" encoding="utf-8"?>
+<p:sld xmlns:a="http://schemas.openxmlformats.org/drawingml/2006/main" xmlns:p="http://schemas.openxmlformats.org/presentationml/2006/main" xmlns:r="http://schemas.openxmlformats.org/officeDocument/2006/relationships">
+  <p:cSld>
+    <p:bg>
+      <p:bgPr>
+        <a:solidFill>
+          <a:srgbClr val="0E141B"/>
+        </a:solidFill>
+        <a:effectLst/>
+      </p:bgPr>
+    </p:bg>
+    <p:spTree>
+      <p:nvGrpSpPr>
+        <p:cNvPr id="1" name=""/>
+        <p:cNvGrpSpPr/>
+        <p:nvPr/>
+      </p:nvGrpSpPr>
+      <p:grpSpPr/>
+      <p:sp>
+        <p:nvSpPr>
+          <p:cNvPr id="2" name="Rectangle 1"/>
+          <p:cNvSpPr/>
+          <p:nvPr/>
+        </p:nvSpPr>
+        <p:spPr>
+          <a:xfrm>
+            <a:off x="0" y="0"/>
+            <a:ext cx="100584" cy="6858000"/>
+          </a:xfrm>
+          <a:prstGeom prst="rect">
+            <a:avLst/>
+          </a:prstGeom>
+          <a:solidFill>
+            <a:srgbClr val="36D399"/>
+          </a:solidFill>
+          <a:ln>
+            <a:noFill/>
+          </a:ln>
+        </p:spPr>
+        <p:style>
+          <a:lnRef idx="1">
+            <a:schemeClr val="accent1"/>
+          </a:lnRef>
+          <a:fillRef idx="3">
+            <a:schemeClr val="accent1"/>
+          </a:fillRef>
+          <a:effectRef idx="2">
+            <a:schemeClr val="accent1"/>
+          </a:effectRef>
+          <a:fontRef idx="minor">
+            <a:schemeClr val="lt1"/>
+          </a:fontRef>
+        </p:style>
+        <p:txBody>
+          <a:bodyPr rtlCol="0" anchor="ctr"/>
+          <a:lstStyle/>
+          <a:p>
+            <a:pPr algn="ctr"/>
+          </a:p>
+        </p:txBody>
+      </p:sp>
+      <p:sp>
+        <p:nvSpPr>
+          <p:cNvPr id="3" name="audit:index"/>
+          <p:cNvSpPr txBox="1"/>
+          <p:nvPr/>
+        </p:nvSpPr>
+        <p:spPr>
+          <a:xfrm>
+            <a:off x="640080" y="274320"/>
+            <a:ext cx="4572000" cy="274320"/>
+          </a:xfrm>
+          <a:prstGeom prst="rect">
+            <a:avLst/>
+          </a:prstGeom>
+          <a:noFill/>
+        </p:spPr>
+        <p:txBody>
+          <a:bodyPr wrap="square" lIns="0" rIns="0" tIns="0" bIns="0">
+            <a:spAutoFit/>
+          </a:bodyPr>
+          <a:lstStyle/>
+          <a:p>
+            <a:r>
+              <a:rPr sz="1100" b="0">
+                <a:solidFill>
+                  <a:srgbClr val="93A4B5"/>
+                </a:solidFill>
+                <a:latin typeface="NanumGothic"/>
+                <a:ea typeface="NanumGothic"/>
+                <a:cs typeface="NanumGothic"/>
+              </a:rPr>
+              <a:t>TOKEN COST LAB  /  23</a:t>
+            </a:r>
+          </a:p>
+        </p:txBody>
+      </p:sp>
+      <p:sp>
+        <p:nvSpPr>
+          <p:cNvPr id="4" name="audit:scope"/>
+          <p:cNvSpPr txBox="1"/>
+          <p:nvPr/>
+        </p:nvSpPr>
+        <p:spPr>
+          <a:xfrm>
+            <a:off x="5760720" y="274320"/>
+            <a:ext cx="5760720" cy="274320"/>
+          </a:xfrm>
+          <a:prstGeom prst="rect">
+            <a:avLst/>
+          </a:prstGeom>
+          <a:noFill/>
+        </p:spPr>
+        <p:txBody>
+          <a:bodyPr wrap="square" lIns="0" rIns="0" tIns="0" bIns="0">
+            <a:spAutoFit/>
+          </a:bodyPr>
+          <a:lstStyle/>
+          <a:p>
+            <a:r>
+              <a:rPr sz="1100" b="0">
+                <a:solidFill>
+                  <a:srgbClr val="36D399"/>
+                </a:solidFill>
+                <a:latin typeface="NanumGothic"/>
+                <a:ea typeface="NanumGothic"/>
+                <a:cs typeface="NanumGothic"/>
+              </a:rPr>
+              <a:t>적용 절차</a:t>
+            </a:r>
+          </a:p>
+        </p:txBody>
+      </p:sp>
+      <p:sp>
+        <p:nvSpPr>
+          <p:cNvPr id="5" name="audit:title"/>
+          <p:cNvSpPr txBox="1"/>
+          <p:nvPr/>
+        </p:nvSpPr>
+        <p:spPr>
+          <a:xfrm>
+            <a:off x="640080" y="822960"/>
+            <a:ext cx="10881360" cy="822960"/>
+          </a:xfrm>
+          <a:prstGeom prst="rect">
+            <a:avLst/>
+          </a:prstGeom>
+          <a:noFill/>
+        </p:spPr>
+        <p:txBody>
+          <a:bodyPr wrap="square" lIns="0" rIns="0" tIns="0" bIns="0">
+            <a:spAutoFit/>
+          </a:bodyPr>
+          <a:lstStyle/>
+          <a:p>
+            <a:r>
+              <a:rPr sz="2900" b="1">
+                <a:solidFill>
+                  <a:srgbClr val="ECF1F6"/>
+                </a:solidFill>
+                <a:latin typeface="NanumGothic"/>
+                <a:ea typeface="NanumGothic"/>
+                <a:cs typeface="NanumGothic"/>
+              </a:rPr>
+              <a:t>팀에 붙이는 순서</a:t>
+            </a:r>
+          </a:p>
+        </p:txBody>
+      </p:sp>
+      <p:sp>
+        <p:nvSpPr>
+          <p:cNvPr id="6" name="audit:hero"/>
+          <p:cNvSpPr txBox="1"/>
+          <p:nvPr/>
+        </p:nvSpPr>
+        <p:spPr>
+          <a:xfrm>
+            <a:off x="640080" y="1783080"/>
+            <a:ext cx="10881360" cy="777240"/>
+          </a:xfrm>
+          <a:prstGeom prst="rect">
+            <a:avLst/>
+          </a:prstGeom>
+          <a:noFill/>
+        </p:spPr>
+        <p:txBody>
+          <a:bodyPr wrap="square" lIns="0" rIns="0" tIns="0" bIns="0">
+            <a:spAutoFit/>
+          </a:bodyPr>
+          <a:lstStyle/>
+          <a:p>
+            <a:r>
+              <a:rPr sz="2900" b="1">
+                <a:solidFill>
+                  <a:srgbClr val="36D399"/>
+                </a:solidFill>
+                <a:latin typeface="NanumGothic"/>
+                <a:ea typeface="NanumGothic"/>
+                <a:cs typeface="NanumGothic"/>
+              </a:rPr>
+              <a:t>측정 → 적용 → 재측정</a:t>
+            </a:r>
+          </a:p>
+        </p:txBody>
+      </p:sp>
+      <p:sp>
+        <p:nvSpPr>
+          <p:cNvPr id="7" name="audit:body-0"/>
+          <p:cNvSpPr txBox="1"/>
+          <p:nvPr/>
+        </p:nvSpPr>
+        <p:spPr>
+          <a:xfrm>
+            <a:off x="777240" y="2862072"/>
+            <a:ext cx="10652760" cy="612648"/>
+          </a:xfrm>
+          <a:prstGeom prst="rect">
+            <a:avLst/>
+          </a:prstGeom>
+          <a:noFill/>
+        </p:spPr>
+        <p:txBody>
+          <a:bodyPr wrap="square" lIns="0" rIns="0" tIns="0" bIns="0">
+            <a:spAutoFit/>
+          </a:bodyPr>
+          <a:lstStyle/>
+          <a:p>
+            <a:r>
+              <a:rPr sz="1750" b="0">
+                <a:solidFill>
+                  <a:srgbClr val="ECF1F6"/>
+                </a:solidFill>
+                <a:latin typeface="NanumGothic"/>
+                <a:ea typeface="NanumGothic"/>
+                <a:cs typeface="NanumGothic"/>
+              </a:rPr>
+              <a:t>usage 로그로 자기 배수를 먼저 잰다</a:t>
+            </a:r>
+          </a:p>
+        </p:txBody>
+      </p:sp>
+      <p:sp>
+        <p:nvSpPr>
+          <p:cNvPr id="8" name="audit:body-1"/>
+          <p:cNvSpPr txBox="1"/>
+          <p:nvPr/>
+        </p:nvSpPr>
+        <p:spPr>
+          <a:xfrm>
+            <a:off x="777240" y="3502152"/>
+            <a:ext cx="10652760" cy="612648"/>
+          </a:xfrm>
+          <a:prstGeom prst="rect">
+            <a:avLst/>
+          </a:prstGeom>
+          <a:noFill/>
+        </p:spPr>
+        <p:txBody>
+          <a:bodyPr wrap="square" lIns="0" rIns="0" tIns="0" bIns="0">
+            <a:spAutoFit/>
+          </a:bodyPr>
+          <a:lstStyle/>
+          <a:p>
+            <a:r>
+              <a:rPr sz="1750" b="0">
+                <a:solidFill>
+                  <a:srgbClr val="ECF1F6"/>
+                </a:solidFill>
+                <a:latin typeface="NanumGothic"/>
+                <a:ea typeface="NanumGothic"/>
+                <a:cs typeface="NanumGothic"/>
+              </a:rPr>
+              <a:t>고정 접두부를 앞으로, 변하는 값은 뒤로</a:t>
+            </a:r>
+          </a:p>
+        </p:txBody>
+      </p:sp>
+      <p:sp>
+        <p:nvSpPr>
+          <p:cNvPr id="9" name="audit:body-2"/>
+          <p:cNvSpPr txBox="1"/>
+          <p:nvPr/>
+        </p:nvSpPr>
+        <p:spPr>
+          <a:xfrm>
+            <a:off x="777240" y="4142231"/>
+            <a:ext cx="10652760" cy="612648"/>
+          </a:xfrm>
+          <a:prstGeom prst="rect">
+            <a:avLst/>
+          </a:prstGeom>
+          <a:noFill/>
+        </p:spPr>
+        <p:txBody>
+          <a:bodyPr wrap="square" lIns="0" rIns="0" tIns="0" bIns="0">
+            <a:spAutoFit/>
+          </a:bodyPr>
+          <a:lstStyle/>
+          <a:p>
+            <a:r>
+              <a:rPr sz="1750" b="0">
+                <a:solidFill>
+                  <a:srgbClr val="ECF1F6"/>
+                </a:solidFill>
+                <a:latin typeface="NanumGothic"/>
+                <a:ea typeface="NanumGothic"/>
+                <a:cs typeface="NanumGothic"/>
+              </a:rPr>
+              <a:t>캐시 적중률과 reasoning/output 비율을 대시보드로 본다</a:t>
+            </a:r>
+          </a:p>
+        </p:txBody>
+      </p:sp>
+      <p:sp>
+        <p:nvSpPr>
+          <p:cNvPr id="10" name="audit:source"/>
+          <p:cNvSpPr txBox="1"/>
+          <p:nvPr/>
+        </p:nvSpPr>
+        <p:spPr>
+          <a:xfrm>
+            <a:off x="640080" y="6080760"/>
+            <a:ext cx="10972800" cy="274320"/>
+          </a:xfrm>
+          <a:prstGeom prst="rect">
+            <a:avLst/>
+          </a:prstGeom>
+          <a:noFill/>
+        </p:spPr>
+        <p:txBody>
+          <a:bodyPr wrap="square" lIns="0" rIns="0" tIns="0" bIns="0">
+            <a:spAutoFit/>
+          </a:bodyPr>
+          <a:lstStyle/>
+          <a:p>
+            <a:r>
+              <a:rPr sz="1000" b="0">
+                <a:solidFill>
+                  <a:srgbClr val="93A4B5"/>
+                </a:solidFill>
+                <a:latin typeface="NanumGothic"/>
+                <a:ea typeface="NanumGothic"/>
+                <a:cs typeface="NanumGothic"/>
+              </a:rPr>
+              <a:t>README.md</a:t>
+            </a:r>
+          </a:p>
+        </p:txBody>
+      </p:sp>
+      <p:sp>
+        <p:nvSpPr>
+          <p:cNvPr id="11" name="audit:footer"/>
+          <p:cNvSpPr txBox="1"/>
+          <p:nvPr/>
+        </p:nvSpPr>
+        <p:spPr>
+          <a:xfrm>
+            <a:off x="640080" y="6419088"/>
+            <a:ext cx="10972800" cy="256032"/>
+          </a:xfrm>
+          <a:prstGeom prst="rect">
+            <a:avLst/>
+          </a:prstGeom>
+          <a:noFill/>
+        </p:spPr>
+        <p:txBody>
+          <a:bodyPr wrap="square" lIns="0" rIns="0" tIns="0" bIns="0">
+            <a:spAutoFit/>
+          </a:bodyPr>
+          <a:lstStyle/>
+          <a:p>
+            <a:r>
+              <a:rPr sz="1000" b="0">
+                <a:solidFill>
+                  <a:srgbClr val="93A4B5"/>
+                </a:solidFill>
+                <a:latin typeface="NanumGothic"/>
+                <a:ea typeface="NanumGothic"/>
+                <a:cs typeface="NanumGothic"/>
+              </a:rPr>
+              <a:t>2026-09-20  ·  근거와 조건을 함께 인용</a:t>
+            </a:r>
+          </a:p>
+        </p:txBody>
+      </p:sp>
+    </p:spTree>
+  </p:cSld>
+  <p:clrMapOvr>
+    <a:masterClrMapping/>
+  </p:clrMapOvr>
+</p:sld>
+</file>
+
+<file path=ppt/slides/slide24.xml><?xml version="1.0" encoding="utf-8"?>
+<p:sld xmlns:a="http://schemas.openxmlformats.org/drawingml/2006/main" xmlns:p="http://schemas.openxmlformats.org/presentationml/2006/main" xmlns:r="http://schemas.openxmlformats.org/officeDocument/2006/relationships">
+  <p:cSld>
+    <p:bg>
+      <p:bgPr>
+        <a:solidFill>
+          <a:srgbClr val="0E141B"/>
+        </a:solidFill>
+        <a:effectLst/>
+      </p:bgPr>
+    </p:bg>
+    <p:spTree>
+      <p:nvGrpSpPr>
+        <p:cNvPr id="1" name=""/>
+        <p:cNvGrpSpPr/>
+        <p:nvPr/>
+      </p:nvGrpSpPr>
+      <p:grpSpPr/>
+      <p:sp>
+        <p:nvSpPr>
+          <p:cNvPr id="2" name="Rectangle 1"/>
+          <p:cNvSpPr/>
+          <p:nvPr/>
+        </p:nvSpPr>
+        <p:spPr>
+          <a:xfrm>
+            <a:off x="0" y="0"/>
+            <a:ext cx="100584" cy="6858000"/>
+          </a:xfrm>
+          <a:prstGeom prst="rect">
+            <a:avLst/>
+          </a:prstGeom>
+          <a:solidFill>
+            <a:srgbClr val="36D399"/>
+          </a:solidFill>
+          <a:ln>
+            <a:noFill/>
+          </a:ln>
+        </p:spPr>
+        <p:style>
+          <a:lnRef idx="1">
+            <a:schemeClr val="accent1"/>
+          </a:lnRef>
+          <a:fillRef idx="3">
+            <a:schemeClr val="accent1"/>
+          </a:fillRef>
+          <a:effectRef idx="2">
+            <a:schemeClr val="accent1"/>
+          </a:effectRef>
+          <a:fontRef idx="minor">
+            <a:schemeClr val="lt1"/>
+          </a:fontRef>
+        </p:style>
+        <p:txBody>
+          <a:bodyPr rtlCol="0" anchor="ctr"/>
+          <a:lstStyle/>
+          <a:p>
+            <a:pPr algn="ctr"/>
+          </a:p>
+        </p:txBody>
+      </p:sp>
+      <p:sp>
+        <p:nvSpPr>
+          <p:cNvPr id="3" name="audit:index"/>
+          <p:cNvSpPr txBox="1"/>
+          <p:nvPr/>
+        </p:nvSpPr>
+        <p:spPr>
+          <a:xfrm>
+            <a:off x="640080" y="274320"/>
+            <a:ext cx="4572000" cy="274320"/>
+          </a:xfrm>
+          <a:prstGeom prst="rect">
+            <a:avLst/>
+          </a:prstGeom>
+          <a:noFill/>
+        </p:spPr>
+        <p:txBody>
+          <a:bodyPr wrap="square" lIns="0" rIns="0" tIns="0" bIns="0">
+            <a:spAutoFit/>
+          </a:bodyPr>
+          <a:lstStyle/>
+          <a:p>
+            <a:r>
+              <a:rPr sz="1100" b="0">
+                <a:solidFill>
+                  <a:srgbClr val="93A4B5"/>
+                </a:solidFill>
+                <a:latin typeface="NanumGothic"/>
+                <a:ea typeface="NanumGothic"/>
+                <a:cs typeface="NanumGothic"/>
+              </a:rPr>
+              <a:t>TOKEN COST LAB  /  24</a:t>
+            </a:r>
+          </a:p>
+        </p:txBody>
+      </p:sp>
+      <p:sp>
+        <p:nvSpPr>
+          <p:cNvPr id="4" name="audit:scope"/>
+          <p:cNvSpPr txBox="1"/>
+          <p:nvPr/>
+        </p:nvSpPr>
+        <p:spPr>
+          <a:xfrm>
+            <a:off x="5760720" y="274320"/>
+            <a:ext cx="5760720" cy="274320"/>
+          </a:xfrm>
+          <a:prstGeom prst="rect">
+            <a:avLst/>
+          </a:prstGeom>
+          <a:noFill/>
+        </p:spPr>
+        <p:txBody>
+          <a:bodyPr wrap="square" lIns="0" rIns="0" tIns="0" bIns="0">
+            <a:spAutoFit/>
+          </a:bodyPr>
+          <a:lstStyle/>
+          <a:p>
+            <a:r>
+              <a:rPr sz="1100" b="0">
+                <a:solidFill>
+                  <a:srgbClr val="36D399"/>
+                </a:solidFill>
+                <a:latin typeface="NanumGothic"/>
+                <a:ea typeface="NanumGothic"/>
+                <a:cs typeface="NanumGothic"/>
+              </a:rPr>
+              <a:t>실무 체크</a:t>
+            </a:r>
+          </a:p>
+        </p:txBody>
+      </p:sp>
+      <p:sp>
+        <p:nvSpPr>
+          <p:cNvPr id="5" name="audit:title"/>
+          <p:cNvSpPr txBox="1"/>
+          <p:nvPr/>
+        </p:nvSpPr>
+        <p:spPr>
+          <a:xfrm>
+            <a:off x="640080" y="822960"/>
+            <a:ext cx="10881360" cy="822960"/>
+          </a:xfrm>
+          <a:prstGeom prst="rect">
+            <a:avLst/>
+          </a:prstGeom>
+          <a:noFill/>
+        </p:spPr>
+        <p:txBody>
+          <a:bodyPr wrap="square" lIns="0" rIns="0" tIns="0" bIns="0">
+            <a:spAutoFit/>
+          </a:bodyPr>
+          <a:lstStyle/>
+          <a:p>
+            <a:r>
+              <a:rPr sz="2900" b="1">
+                <a:solidFill>
+                  <a:srgbClr val="ECF1F6"/>
+                </a:solidFill>
+                <a:latin typeface="NanumGothic"/>
+                <a:ea typeface="NanumGothic"/>
+                <a:cs typeface="NanumGothic"/>
+              </a:rPr>
+              <a:t>흔한 실수 다섯</a:t>
+            </a:r>
+          </a:p>
+        </p:txBody>
+      </p:sp>
+      <p:sp>
+        <p:nvSpPr>
+          <p:cNvPr id="6" name="audit:hero"/>
+          <p:cNvSpPr txBox="1"/>
+          <p:nvPr/>
+        </p:nvSpPr>
+        <p:spPr>
+          <a:xfrm>
+            <a:off x="640080" y="1783080"/>
+            <a:ext cx="10881360" cy="777240"/>
+          </a:xfrm>
+          <a:prstGeom prst="rect">
+            <a:avLst/>
+          </a:prstGeom>
+          <a:noFill/>
+        </p:spPr>
+        <p:txBody>
+          <a:bodyPr wrap="square" lIns="0" rIns="0" tIns="0" bIns="0">
+            <a:spAutoFit/>
+          </a:bodyPr>
+          <a:lstStyle/>
+          <a:p>
+            <a:r>
+              <a:rPr sz="2400" b="1">
+                <a:solidFill>
+                  <a:srgbClr val="36D399"/>
+                </a:solidFill>
+                <a:latin typeface="NanumGothic"/>
+                <a:ea typeface="NanumGothic"/>
+                <a:cs typeface="NanumGothic"/>
+              </a:rPr>
+              <a:t>미스 캐싱 · 과잉 추론 · 전체 재출력 · 오배치 라우팅 · 무제한 사고</a:t>
+            </a:r>
+          </a:p>
+        </p:txBody>
+      </p:sp>
+      <p:sp>
+        <p:nvSpPr>
+          <p:cNvPr id="7" name="audit:body-0"/>
+          <p:cNvSpPr txBox="1"/>
+          <p:nvPr/>
+        </p:nvSpPr>
+        <p:spPr>
+          <a:xfrm>
+            <a:off x="777240" y="2862072"/>
+            <a:ext cx="10652760" cy="612648"/>
+          </a:xfrm>
+          <a:prstGeom prst="rect">
+            <a:avLst/>
+          </a:prstGeom>
+          <a:noFill/>
+        </p:spPr>
+        <p:txBody>
+          <a:bodyPr wrap="square" lIns="0" rIns="0" tIns="0" bIns="0">
+            <a:spAutoFit/>
+          </a:bodyPr>
+          <a:lstStyle/>
+          <a:p>
+            <a:r>
+              <a:rPr sz="1750" b="0">
+                <a:solidFill>
+                  <a:srgbClr val="ECF1F6"/>
+                </a:solidFill>
+                <a:latin typeface="NanumGothic"/>
+                <a:ea typeface="NanumGothic"/>
+                <a:cs typeface="NanumGothic"/>
+              </a:rPr>
+              <a:t>캐시를 켜놓고 프리픽스를 매일 바꾼다</a:t>
+            </a:r>
+          </a:p>
+        </p:txBody>
+      </p:sp>
+      <p:sp>
+        <p:nvSpPr>
+          <p:cNvPr id="8" name="audit:body-1"/>
+          <p:cNvSpPr txBox="1"/>
+          <p:nvPr/>
+        </p:nvSpPr>
+        <p:spPr>
+          <a:xfrm>
+            <a:off x="777240" y="3502152"/>
+            <a:ext cx="10652760" cy="612648"/>
+          </a:xfrm>
+          <a:prstGeom prst="rect">
+            <a:avLst/>
+          </a:prstGeom>
+          <a:noFill/>
+        </p:spPr>
+        <p:txBody>
+          <a:bodyPr wrap="square" lIns="0" rIns="0" tIns="0" bIns="0">
+            <a:spAutoFit/>
+          </a:bodyPr>
+          <a:lstStyle/>
+          <a:p>
+            <a:r>
+              <a:rPr sz="1750" b="0">
+                <a:solidFill>
+                  <a:srgbClr val="ECF1F6"/>
+                </a:solidFill>
+                <a:latin typeface="NanumGothic"/>
+                <a:ea typeface="NanumGothic"/>
+                <a:cs typeface="NanumGothic"/>
+              </a:rPr>
+              <a:t>'전체 파일 다시 써줘'로 출력을 다시 산다</a:t>
+            </a:r>
+          </a:p>
+        </p:txBody>
+      </p:sp>
+      <p:sp>
+        <p:nvSpPr>
+          <p:cNvPr id="9" name="audit:body-2"/>
+          <p:cNvSpPr txBox="1"/>
+          <p:nvPr/>
+        </p:nvSpPr>
+        <p:spPr>
+          <a:xfrm>
+            <a:off x="777240" y="4142231"/>
+            <a:ext cx="10652760" cy="612648"/>
+          </a:xfrm>
+          <a:prstGeom prst="rect">
+            <a:avLst/>
+          </a:prstGeom>
+          <a:noFill/>
+        </p:spPr>
+        <p:txBody>
+          <a:bodyPr wrap="square" lIns="0" rIns="0" tIns="0" bIns="0">
+            <a:spAutoFit/>
+          </a:bodyPr>
+          <a:lstStyle/>
+          <a:p>
+            <a:r>
+              <a:rPr sz="1750" b="0">
+                <a:solidFill>
+                  <a:srgbClr val="ECF1F6"/>
+                </a:solidFill>
+                <a:latin typeface="NanumGothic"/>
+                <a:ea typeface="NanumGothic"/>
+                <a:cs typeface="NanumGothic"/>
+              </a:rPr>
+              <a:t>라우팅 임계값을 벤치마크 값 그대로 쓴다</a:t>
+            </a:r>
+          </a:p>
+        </p:txBody>
+      </p:sp>
+      <p:sp>
+        <p:nvSpPr>
+          <p:cNvPr id="10" name="audit:source"/>
+          <p:cNvSpPr txBox="1"/>
+          <p:nvPr/>
+        </p:nvSpPr>
+        <p:spPr>
+          <a:xfrm>
+            <a:off x="640080" y="6080760"/>
+            <a:ext cx="10972800" cy="274320"/>
+          </a:xfrm>
+          <a:prstGeom prst="rect">
+            <a:avLst/>
+          </a:prstGeom>
+          <a:noFill/>
+        </p:spPr>
+        <p:txBody>
+          <a:bodyPr wrap="square" lIns="0" rIns="0" tIns="0" bIns="0">
+            <a:spAutoFit/>
+          </a:bodyPr>
+          <a:lstStyle/>
+          <a:p>
+            <a:r>
+              <a:rPr sz="1000" b="0">
+                <a:solidFill>
+                  <a:srgbClr val="93A4B5"/>
+                </a:solidFill>
+                <a:latin typeface="NanumGothic"/>
+                <a:ea typeface="NanumGothic"/>
+                <a:cs typeface="NanumGothic"/>
+              </a:rPr>
+              <a:t>docs/CORRECTIONS.md</a:t>
+            </a:r>
+          </a:p>
+        </p:txBody>
+      </p:sp>
+      <p:sp>
+        <p:nvSpPr>
+          <p:cNvPr id="11" name="audit:footer"/>
+          <p:cNvSpPr txBox="1"/>
+          <p:nvPr/>
+        </p:nvSpPr>
+        <p:spPr>
+          <a:xfrm>
+            <a:off x="640080" y="6419088"/>
+            <a:ext cx="10972800" cy="256032"/>
+          </a:xfrm>
+          <a:prstGeom prst="rect">
+            <a:avLst/>
+          </a:prstGeom>
+          <a:noFill/>
+        </p:spPr>
+        <p:txBody>
+          <a:bodyPr wrap="square" lIns="0" rIns="0" tIns="0" bIns="0">
+            <a:spAutoFit/>
+          </a:bodyPr>
+          <a:lstStyle/>
+          <a:p>
+            <a:r>
+              <a:rPr sz="1000" b="0">
+                <a:solidFill>
+                  <a:srgbClr val="93A4B5"/>
+                </a:solidFill>
+                <a:latin typeface="NanumGothic"/>
+                <a:ea typeface="NanumGothic"/>
+                <a:cs typeface="NanumGothic"/>
+              </a:rPr>
+              <a:t>2026-09-20  ·  근거와 조건을 함께 인용</a:t>
+            </a:r>
+          </a:p>
+        </p:txBody>
+      </p:sp>
+    </p:spTree>
+  </p:cSld>
+  <p:clrMapOvr>
+    <a:masterClrMapping/>
+  </p:clrMapOvr>
+</p:sld>
+</file>
+
+<file path=ppt/slides/slide25.xml><?xml version="1.0" encoding="utf-8"?>
+<p:sld xmlns:a="http://schemas.openxmlformats.org/drawingml/2006/main" xmlns:p="http://schemas.openxmlformats.org/presentationml/2006/main" xmlns:r="http://schemas.openxmlformats.org/officeDocument/2006/relationships">
+  <p:cSld>
+    <p:bg>
+      <p:bgPr>
+        <a:solidFill>
+          <a:srgbClr val="0E141B"/>
+        </a:solidFill>
+        <a:effectLst/>
+      </p:bgPr>
+    </p:bg>
+    <p:spTree>
+      <p:nvGrpSpPr>
+        <p:cNvPr id="1" name=""/>
+        <p:cNvGrpSpPr/>
+        <p:nvPr/>
+      </p:nvGrpSpPr>
+      <p:grpSpPr/>
+      <p:sp>
+        <p:nvSpPr>
+          <p:cNvPr id="2" name="Rectangle 1"/>
+          <p:cNvSpPr/>
+          <p:nvPr/>
+        </p:nvSpPr>
+        <p:spPr>
+          <a:xfrm>
+            <a:off x="0" y="0"/>
+            <a:ext cx="100584" cy="6858000"/>
+          </a:xfrm>
+          <a:prstGeom prst="rect">
+            <a:avLst/>
+          </a:prstGeom>
+          <a:solidFill>
+            <a:srgbClr val="36D399"/>
+          </a:solidFill>
+          <a:ln>
+            <a:noFill/>
+          </a:ln>
+        </p:spPr>
+        <p:style>
+          <a:lnRef idx="1">
+            <a:schemeClr val="accent1"/>
+          </a:lnRef>
+          <a:fillRef idx="3">
+            <a:schemeClr val="accent1"/>
+          </a:fillRef>
+          <a:effectRef idx="2">
+            <a:schemeClr val="accent1"/>
+          </a:effectRef>
+          <a:fontRef idx="minor">
+            <a:schemeClr val="lt1"/>
+          </a:fontRef>
+        </p:style>
+        <p:txBody>
+          <a:bodyPr rtlCol="0" anchor="ctr"/>
+          <a:lstStyle/>
+          <a:p>
+            <a:pPr algn="ctr"/>
+          </a:p>
+        </p:txBody>
+      </p:sp>
+      <p:sp>
+        <p:nvSpPr>
+          <p:cNvPr id="3" name="audit:index"/>
+          <p:cNvSpPr txBox="1"/>
+          <p:nvPr/>
+        </p:nvSpPr>
+        <p:spPr>
+          <a:xfrm>
+            <a:off x="640080" y="274320"/>
+            <a:ext cx="4572000" cy="274320"/>
+          </a:xfrm>
+          <a:prstGeom prst="rect">
+            <a:avLst/>
+          </a:prstGeom>
+          <a:noFill/>
+        </p:spPr>
+        <p:txBody>
+          <a:bodyPr wrap="square" lIns="0" rIns="0" tIns="0" bIns="0">
+            <a:spAutoFit/>
+          </a:bodyPr>
+          <a:lstStyle/>
+          <a:p>
+            <a:r>
+              <a:rPr sz="1100" b="0">
+                <a:solidFill>
+                  <a:srgbClr val="93A4B5"/>
+                </a:solidFill>
+                <a:latin typeface="NanumGothic"/>
+                <a:ea typeface="NanumGothic"/>
+                <a:cs typeface="NanumGothic"/>
+              </a:rPr>
+              <a:t>TOKEN COST LAB  /  25</a:t>
+            </a:r>
+          </a:p>
+        </p:txBody>
+      </p:sp>
+      <p:sp>
+        <p:nvSpPr>
+          <p:cNvPr id="4" name="audit:scope"/>
+          <p:cNvSpPr txBox="1"/>
+          <p:nvPr/>
+        </p:nvSpPr>
+        <p:spPr>
+          <a:xfrm>
+            <a:off x="5760720" y="274320"/>
+            <a:ext cx="5760720" cy="274320"/>
+          </a:xfrm>
+          <a:prstGeom prst="rect">
+            <a:avLst/>
+          </a:prstGeom>
+          <a:noFill/>
+        </p:spPr>
+        <p:txBody>
+          <a:bodyPr wrap="square" lIns="0" rIns="0" tIns="0" bIns="0">
+            <a:spAutoFit/>
+          </a:bodyPr>
+          <a:lstStyle/>
+          <a:p>
+            <a:r>
+              <a:rPr sz="1100" b="0">
+                <a:solidFill>
+                  <a:srgbClr val="36D399"/>
+                </a:solidFill>
+                <a:latin typeface="NanumGothic"/>
+                <a:ea typeface="NanumGothic"/>
+                <a:cs typeface="NanumGothic"/>
+              </a:rPr>
+              <a:t>운영 주의</a:t>
+            </a:r>
+          </a:p>
+        </p:txBody>
+      </p:sp>
+      <p:sp>
+        <p:nvSpPr>
+          <p:cNvPr id="5" name="audit:title"/>
+          <p:cNvSpPr txBox="1"/>
+          <p:nvPr/>
+        </p:nvSpPr>
+        <p:spPr>
+          <a:xfrm>
+            <a:off x="640080" y="822960"/>
+            <a:ext cx="10881360" cy="822960"/>
+          </a:xfrm>
+          <a:prstGeom prst="rect">
+            <a:avLst/>
+          </a:prstGeom>
+          <a:noFill/>
+        </p:spPr>
+        <p:txBody>
+          <a:bodyPr wrap="square" lIns="0" rIns="0" tIns="0" bIns="0">
+            <a:spAutoFit/>
+          </a:bodyPr>
+          <a:lstStyle/>
+          <a:p>
+            <a:r>
+              <a:rPr sz="2900" b="1">
+                <a:solidFill>
+                  <a:srgbClr val="ECF1F6"/>
+                </a:solidFill>
+                <a:latin typeface="NanumGothic"/>
+                <a:ea typeface="NanumGothic"/>
+                <a:cs typeface="NanumGothic"/>
+              </a:rPr>
+              <a:t>캐싱과 개인정보</a:t>
+            </a:r>
+          </a:p>
+        </p:txBody>
+      </p:sp>
+      <p:sp>
+        <p:nvSpPr>
+          <p:cNvPr id="6" name="audit:hero"/>
+          <p:cNvSpPr txBox="1"/>
+          <p:nvPr/>
+        </p:nvSpPr>
+        <p:spPr>
+          <a:xfrm>
+            <a:off x="640080" y="1783080"/>
+            <a:ext cx="10881360" cy="777240"/>
+          </a:xfrm>
+          <a:prstGeom prst="rect">
+            <a:avLst/>
+          </a:prstGeom>
+          <a:noFill/>
+        </p:spPr>
+        <p:txBody>
+          <a:bodyPr wrap="square" lIns="0" rIns="0" tIns="0" bIns="0">
+            <a:spAutoFit/>
+          </a:bodyPr>
+          <a:lstStyle/>
+          <a:p>
+            <a:r>
+              <a:rPr sz="2900" b="1">
+                <a:solidFill>
+                  <a:srgbClr val="36D399"/>
+                </a:solidFill>
+                <a:latin typeface="NanumGothic"/>
+                <a:ea typeface="NanumGothic"/>
+                <a:cs typeface="NanumGothic"/>
+              </a:rPr>
+              <a:t>개인화 · 실시간 응답은 캐싱 금지</a:t>
+            </a:r>
+          </a:p>
+        </p:txBody>
+      </p:sp>
+      <p:sp>
+        <p:nvSpPr>
+          <p:cNvPr id="7" name="audit:body-0"/>
+          <p:cNvSpPr txBox="1"/>
+          <p:nvPr/>
+        </p:nvSpPr>
+        <p:spPr>
+          <a:xfrm>
+            <a:off x="777240" y="2862072"/>
+            <a:ext cx="10652760" cy="612648"/>
+          </a:xfrm>
+          <a:prstGeom prst="rect">
+            <a:avLst/>
+          </a:prstGeom>
+          <a:noFill/>
+        </p:spPr>
+        <p:txBody>
+          <a:bodyPr wrap="square" lIns="0" rIns="0" tIns="0" bIns="0">
+            <a:spAutoFit/>
+          </a:bodyPr>
+          <a:lstStyle/>
+          <a:p>
+            <a:r>
+              <a:rPr sz="1750" b="0">
+                <a:solidFill>
+                  <a:srgbClr val="ECF1F6"/>
+                </a:solidFill>
+                <a:latin typeface="NanumGothic"/>
+                <a:ea typeface="NanumGothic"/>
+                <a:cs typeface="NanumGothic"/>
+              </a:rPr>
+              <a:t>멀티턴은 캐시 키에 컨텍스트를 포함</a:t>
+            </a:r>
+          </a:p>
+        </p:txBody>
+      </p:sp>
+      <p:sp>
+        <p:nvSpPr>
+          <p:cNvPr id="8" name="audit:body-1"/>
+          <p:cNvSpPr txBox="1"/>
+          <p:nvPr/>
+        </p:nvSpPr>
+        <p:spPr>
+          <a:xfrm>
+            <a:off x="777240" y="3502152"/>
+            <a:ext cx="10652760" cy="612648"/>
+          </a:xfrm>
+          <a:prstGeom prst="rect">
+            <a:avLst/>
+          </a:prstGeom>
+          <a:noFill/>
+        </p:spPr>
+        <p:txBody>
+          <a:bodyPr wrap="square" lIns="0" rIns="0" tIns="0" bIns="0">
+            <a:spAutoFit/>
+          </a:bodyPr>
+          <a:lstStyle/>
+          <a:p>
+            <a:r>
+              <a:rPr sz="1750" b="0">
+                <a:solidFill>
+                  <a:srgbClr val="ECF1F6"/>
+                </a:solidFill>
+                <a:latin typeface="NanumGothic"/>
+                <a:ea typeface="NanumGothic"/>
+                <a:cs typeface="NanumGothic"/>
+              </a:rPr>
+              <a:t>시맨틱 캐시 임계값이 느슨하면 '비슷하지만 틀린 답'을 준다</a:t>
+            </a:r>
+          </a:p>
+        </p:txBody>
+      </p:sp>
+      <p:sp>
+        <p:nvSpPr>
+          <p:cNvPr id="9" name="audit:body-2"/>
+          <p:cNvSpPr txBox="1"/>
+          <p:nvPr/>
+        </p:nvSpPr>
+        <p:spPr>
+          <a:xfrm>
+            <a:off x="777240" y="4142231"/>
+            <a:ext cx="10652760" cy="612648"/>
+          </a:xfrm>
+          <a:prstGeom prst="rect">
+            <a:avLst/>
+          </a:prstGeom>
+          <a:noFill/>
+        </p:spPr>
+        <p:txBody>
+          <a:bodyPr wrap="square" lIns="0" rIns="0" tIns="0" bIns="0">
+            <a:spAutoFit/>
+          </a:bodyPr>
+          <a:lstStyle/>
+          <a:p>
+            <a:r>
+              <a:rPr sz="1750" b="0">
+                <a:solidFill>
+                  <a:srgbClr val="ECF1F6"/>
+                </a:solidFill>
+                <a:latin typeface="NanumGothic"/>
+                <a:ea typeface="NanumGothic"/>
+                <a:cs typeface="NanumGothic"/>
+              </a:rPr>
+              <a:t>삭제·TTL 정책을 프롬프트 설계와 함께 정한다</a:t>
+            </a:r>
+          </a:p>
+        </p:txBody>
+      </p:sp>
+      <p:sp>
+        <p:nvSpPr>
+          <p:cNvPr id="10" name="audit:source"/>
+          <p:cNvSpPr txBox="1"/>
+          <p:nvPr/>
+        </p:nvSpPr>
+        <p:spPr>
+          <a:xfrm>
+            <a:off x="640080" y="6080760"/>
+            <a:ext cx="10972800" cy="274320"/>
+          </a:xfrm>
+          <a:prstGeom prst="rect">
+            <a:avLst/>
+          </a:prstGeom>
+          <a:noFill/>
+        </p:spPr>
+        <p:txBody>
+          <a:bodyPr wrap="square" lIns="0" rIns="0" tIns="0" bIns="0">
+            <a:spAutoFit/>
+          </a:bodyPr>
+          <a:lstStyle/>
+          <a:p>
+            <a:r>
+              <a:rPr sz="1000" b="0">
+                <a:solidFill>
+                  <a:srgbClr val="93A4B5"/>
+                </a:solidFill>
+                <a:latin typeface="NanumGothic"/>
+                <a:ea typeface="NanumGothic"/>
+                <a:cs typeface="NanumGothic"/>
+              </a:rPr>
+              <a:t>experiments/exp06_other_levers.py</a:t>
+            </a:r>
+          </a:p>
+        </p:txBody>
+      </p:sp>
+      <p:sp>
+        <p:nvSpPr>
+          <p:cNvPr id="11" name="audit:footer"/>
+          <p:cNvSpPr txBox="1"/>
+          <p:nvPr/>
+        </p:nvSpPr>
+        <p:spPr>
+          <a:xfrm>
+            <a:off x="640080" y="6419088"/>
+            <a:ext cx="10972800" cy="256032"/>
+          </a:xfrm>
+          <a:prstGeom prst="rect">
+            <a:avLst/>
+          </a:prstGeom>
+          <a:noFill/>
+        </p:spPr>
+        <p:txBody>
+          <a:bodyPr wrap="square" lIns="0" rIns="0" tIns="0" bIns="0">
+            <a:spAutoFit/>
+          </a:bodyPr>
+          <a:lstStyle/>
+          <a:p>
+            <a:r>
+              <a:rPr sz="1000" b="0">
+                <a:solidFill>
+                  <a:srgbClr val="93A4B5"/>
+                </a:solidFill>
+                <a:latin typeface="NanumGothic"/>
+                <a:ea typeface="NanumGothic"/>
+                <a:cs typeface="NanumGothic"/>
+              </a:rPr>
+              <a:t>2026-09-20  ·  근거와 조건을 함께 인용</a:t>
+            </a:r>
+          </a:p>
+        </p:txBody>
+      </p:sp>
+    </p:spTree>
+  </p:cSld>
+  <p:clrMapOvr>
+    <a:masterClrMapping/>
+  </p:clrMapOvr>
+</p:sld>
+</file>
+
+<file path=ppt/slides/slide26.xml><?xml version="1.0" encoding="utf-8"?>
+<p:sld xmlns:a="http://schemas.openxmlformats.org/drawingml/2006/main" xmlns:p="http://schemas.openxmlformats.org/presentationml/2006/main" xmlns:r="http://schemas.openxmlformats.org/officeDocument/2006/relationships">
+  <p:cSld>
+    <p:bg>
+      <p:bgPr>
+        <a:solidFill>
+          <a:srgbClr val="0E141B"/>
+        </a:solidFill>
+        <a:effectLst/>
+      </p:bgPr>
+    </p:bg>
+    <p:spTree>
+      <p:nvGrpSpPr>
+        <p:cNvPr id="1" name=""/>
+        <p:cNvGrpSpPr/>
+        <p:nvPr/>
+      </p:nvGrpSpPr>
+      <p:grpSpPr/>
+      <p:sp>
+        <p:nvSpPr>
+          <p:cNvPr id="2" name="Rectangle 1"/>
+          <p:cNvSpPr/>
+          <p:nvPr/>
+        </p:nvSpPr>
+        <p:spPr>
+          <a:xfrm>
+            <a:off x="0" y="0"/>
+            <a:ext cx="100584" cy="6858000"/>
+          </a:xfrm>
+          <a:prstGeom prst="rect">
+            <a:avLst/>
+          </a:prstGeom>
+          <a:solidFill>
+            <a:srgbClr val="36D399"/>
+          </a:solidFill>
+          <a:ln>
+            <a:noFill/>
+          </a:ln>
+        </p:spPr>
+        <p:style>
+          <a:lnRef idx="1">
+            <a:schemeClr val="accent1"/>
+          </a:lnRef>
+          <a:fillRef idx="3">
+            <a:schemeClr val="accent1"/>
+          </a:fillRef>
+          <a:effectRef idx="2">
+            <a:schemeClr val="accent1"/>
+          </a:effectRef>
+          <a:fontRef idx="minor">
+            <a:schemeClr val="lt1"/>
+          </a:fontRef>
+        </p:style>
+        <p:txBody>
+          <a:bodyPr rtlCol="0" anchor="ctr"/>
+          <a:lstStyle/>
+          <a:p>
+            <a:pPr algn="ctr"/>
+          </a:p>
+        </p:txBody>
+      </p:sp>
+      <p:sp>
+        <p:nvSpPr>
+          <p:cNvPr id="3" name="audit:index"/>
+          <p:cNvSpPr txBox="1"/>
+          <p:nvPr/>
+        </p:nvSpPr>
+        <p:spPr>
+          <a:xfrm>
+            <a:off x="640080" y="274320"/>
+            <a:ext cx="4572000" cy="274320"/>
+          </a:xfrm>
+          <a:prstGeom prst="rect">
+            <a:avLst/>
+          </a:prstGeom>
+          <a:noFill/>
+        </p:spPr>
+        <p:txBody>
+          <a:bodyPr wrap="square" lIns="0" rIns="0" tIns="0" bIns="0">
+            <a:spAutoFit/>
+          </a:bodyPr>
+          <a:lstStyle/>
+          <a:p>
+            <a:r>
+              <a:rPr sz="1100" b="0">
+                <a:solidFill>
+                  <a:srgbClr val="93A4B5"/>
+                </a:solidFill>
+                <a:latin typeface="NanumGothic"/>
+                <a:ea typeface="NanumGothic"/>
+                <a:cs typeface="NanumGothic"/>
+              </a:rPr>
+              <a:t>TOKEN COST LAB  /  26</a:t>
+            </a:r>
+          </a:p>
+        </p:txBody>
+      </p:sp>
+      <p:sp>
+        <p:nvSpPr>
+          <p:cNvPr id="4" name="audit:scope"/>
+          <p:cNvSpPr txBox="1"/>
+          <p:nvPr/>
+        </p:nvSpPr>
+        <p:spPr>
+          <a:xfrm>
+            <a:off x="5760720" y="274320"/>
+            <a:ext cx="5760720" cy="274320"/>
+          </a:xfrm>
+          <a:prstGeom prst="rect">
+            <a:avLst/>
+          </a:prstGeom>
+          <a:noFill/>
+        </p:spPr>
+        <p:txBody>
+          <a:bodyPr wrap="square" lIns="0" rIns="0" tIns="0" bIns="0">
+            <a:spAutoFit/>
+          </a:bodyPr>
+          <a:lstStyle/>
+          <a:p>
+            <a:r>
+              <a:rPr sz="1100" b="0">
+                <a:solidFill>
+                  <a:srgbClr val="36D399"/>
+                </a:solidFill>
+                <a:latin typeface="NanumGothic"/>
+                <a:ea typeface="NanumGothic"/>
+                <a:cs typeface="NanumGothic"/>
+              </a:rPr>
+              <a:t>재현</a:t>
+            </a:r>
+          </a:p>
+        </p:txBody>
+      </p:sp>
+      <p:sp>
+        <p:nvSpPr>
+          <p:cNvPr id="5" name="audit:title"/>
+          <p:cNvSpPr txBox="1"/>
+          <p:nvPr/>
+        </p:nvSpPr>
+        <p:spPr>
+          <a:xfrm>
+            <a:off x="640080" y="822960"/>
+            <a:ext cx="10881360" cy="822960"/>
+          </a:xfrm>
+          <a:prstGeom prst="rect">
+            <a:avLst/>
+          </a:prstGeom>
+          <a:noFill/>
+        </p:spPr>
+        <p:txBody>
+          <a:bodyPr wrap="square" lIns="0" rIns="0" tIns="0" bIns="0">
+            <a:spAutoFit/>
+          </a:bodyPr>
+          <a:lstStyle/>
+          <a:p>
+            <a:r>
+              <a:rPr sz="2900" b="1">
+                <a:solidFill>
+                  <a:srgbClr val="ECF1F6"/>
+                </a:solidFill>
+                <a:latin typeface="NanumGothic"/>
+                <a:ea typeface="NanumGothic"/>
+                <a:cs typeface="NanumGothic"/>
+              </a:rPr>
+              <a:t>직접 확인하는 방법</a:t>
+            </a:r>
+          </a:p>
+        </p:txBody>
+      </p:sp>
+      <p:sp>
+        <p:nvSpPr>
+          <p:cNvPr id="6" name="audit:hero"/>
+          <p:cNvSpPr txBox="1"/>
+          <p:nvPr/>
+        </p:nvSpPr>
+        <p:spPr>
+          <a:xfrm>
+            <a:off x="640080" y="1783080"/>
+            <a:ext cx="10881360" cy="777240"/>
+          </a:xfrm>
+          <a:prstGeom prst="rect">
+            <a:avLst/>
+          </a:prstGeom>
+          <a:noFill/>
+        </p:spPr>
+        <p:txBody>
+          <a:bodyPr wrap="square" lIns="0" rIns="0" tIns="0" bIns="0">
+            <a:spAutoFit/>
+          </a:bodyPr>
+          <a:lstStyle/>
+          <a:p>
+            <a:r>
+              <a:rPr sz="2900" b="1">
+                <a:solidFill>
+                  <a:srgbClr val="36D399"/>
+                </a:solidFill>
+                <a:latin typeface="NanumGothic"/>
+                <a:ea typeface="NanumGothic"/>
+                <a:cs typeface="NanumGothic"/>
+              </a:rPr>
+              <a:t>python run_all.py (유료 호출 0)</a:t>
+            </a:r>
+          </a:p>
+        </p:txBody>
+      </p:sp>
+      <p:sp>
+        <p:nvSpPr>
+          <p:cNvPr id="7" name="audit:body-0"/>
+          <p:cNvSpPr txBox="1"/>
+          <p:nvPr/>
+        </p:nvSpPr>
+        <p:spPr>
+          <a:xfrm>
+            <a:off x="777240" y="2862072"/>
+            <a:ext cx="10652760" cy="612648"/>
+          </a:xfrm>
+          <a:prstGeom prst="rect">
+            <a:avLst/>
+          </a:prstGeom>
+          <a:noFill/>
+        </p:spPr>
+        <p:txBody>
+          <a:bodyPr wrap="square" lIns="0" rIns="0" tIns="0" bIns="0">
+            <a:spAutoFit/>
+          </a:bodyPr>
+          <a:lstStyle/>
+          <a:p>
+            <a:r>
+              <a:rPr sz="1750" b="0">
+                <a:solidFill>
+                  <a:srgbClr val="ECF1F6"/>
+                </a:solidFill>
+                <a:latin typeface="NanumGothic"/>
+                <a:ea typeface="NanumGothic"/>
+                <a:cs typeface="NanumGothic"/>
+              </a:rPr>
+              <a:t>실험 11종이 오프라인으로 전부 재현된다</a:t>
+            </a:r>
+          </a:p>
+        </p:txBody>
+      </p:sp>
+      <p:sp>
+        <p:nvSpPr>
+          <p:cNvPr id="8" name="audit:body-1"/>
+          <p:cNvSpPr txBox="1"/>
+          <p:nvPr/>
+        </p:nvSpPr>
+        <p:spPr>
+          <a:xfrm>
+            <a:off x="777240" y="3502152"/>
+            <a:ext cx="10652760" cy="612648"/>
+          </a:xfrm>
+          <a:prstGeom prst="rect">
+            <a:avLst/>
+          </a:prstGeom>
+          <a:noFill/>
+        </p:spPr>
+        <p:txBody>
+          <a:bodyPr wrap="square" lIns="0" rIns="0" tIns="0" bIns="0">
+            <a:spAutoFit/>
+          </a:bodyPr>
+          <a:lstStyle/>
+          <a:p>
+            <a:r>
+              <a:rPr sz="1750" b="0">
+                <a:solidFill>
+                  <a:srgbClr val="ECF1F6"/>
+                </a:solidFill>
+                <a:latin typeface="NanumGothic"/>
+                <a:ea typeface="NanumGothic"/>
+                <a:cs typeface="NanumGothic"/>
+              </a:rPr>
+              <a:t>원자료 · 로그 · 검증 스크립트 · 발표 덱 생성기를 함께 공개</a:t>
+            </a:r>
+          </a:p>
+        </p:txBody>
+      </p:sp>
+      <p:sp>
+        <p:nvSpPr>
+          <p:cNvPr id="9" name="audit:body-2"/>
+          <p:cNvSpPr txBox="1"/>
+          <p:nvPr/>
+        </p:nvSpPr>
+        <p:spPr>
+          <a:xfrm>
+            <a:off x="777240" y="4142231"/>
+            <a:ext cx="10652760" cy="612648"/>
+          </a:xfrm>
+          <a:prstGeom prst="rect">
+            <a:avLst/>
+          </a:prstGeom>
+          <a:noFill/>
+        </p:spPr>
+        <p:txBody>
+          <a:bodyPr wrap="square" lIns="0" rIns="0" tIns="0" bIns="0">
+            <a:spAutoFit/>
+          </a:bodyPr>
+          <a:lstStyle/>
+          <a:p>
+            <a:r>
+              <a:rPr sz="1750" b="0">
+                <a:solidFill>
+                  <a:srgbClr val="ECF1F6"/>
+                </a:solidFill>
+                <a:latin typeface="NanumGothic"/>
+                <a:ea typeface="NanumGothic"/>
+                <a:cs typeface="NanumGothic"/>
+              </a:rPr>
+              <a:t>덱과 대본도 같은 원천에서 생성된다</a:t>
+            </a:r>
+          </a:p>
+        </p:txBody>
+      </p:sp>
+      <p:sp>
+        <p:nvSpPr>
+          <p:cNvPr id="10" name="audit:source"/>
+          <p:cNvSpPr txBox="1"/>
+          <p:nvPr/>
+        </p:nvSpPr>
+        <p:spPr>
+          <a:xfrm>
+            <a:off x="640080" y="6080760"/>
+            <a:ext cx="10972800" cy="274320"/>
+          </a:xfrm>
+          <a:prstGeom prst="rect">
+            <a:avLst/>
+          </a:prstGeom>
+          <a:noFill/>
+        </p:spPr>
+        <p:txBody>
+          <a:bodyPr wrap="square" lIns="0" rIns="0" tIns="0" bIns="0">
+            <a:spAutoFit/>
+          </a:bodyPr>
+          <a:lstStyle/>
+          <a:p>
+            <a:r>
+              <a:rPr sz="1000" b="0">
+                <a:solidFill>
+                  <a:srgbClr val="93A4B5"/>
+                </a:solidFill>
+                <a:latin typeface="NanumGothic"/>
+                <a:ea typeface="NanumGothic"/>
+                <a:cs typeface="NanumGothic"/>
+              </a:rPr>
+              <a:t>tools/reproduce_audit.py</a:t>
+            </a:r>
+          </a:p>
+        </p:txBody>
+      </p:sp>
+      <p:sp>
+        <p:nvSpPr>
+          <p:cNvPr id="11" name="audit:footer"/>
+          <p:cNvSpPr txBox="1"/>
+          <p:nvPr/>
+        </p:nvSpPr>
+        <p:spPr>
+          <a:xfrm>
+            <a:off x="640080" y="6419088"/>
+            <a:ext cx="10972800" cy="256032"/>
+          </a:xfrm>
+          <a:prstGeom prst="rect">
+            <a:avLst/>
+          </a:prstGeom>
+          <a:noFill/>
+        </p:spPr>
+        <p:txBody>
+          <a:bodyPr wrap="square" lIns="0" rIns="0" tIns="0" bIns="0">
+            <a:spAutoFit/>
+          </a:bodyPr>
+          <a:lstStyle/>
+          <a:p>
+            <a:r>
+              <a:rPr sz="1000" b="0">
+                <a:solidFill>
+                  <a:srgbClr val="93A4B5"/>
+                </a:solidFill>
+                <a:latin typeface="NanumGothic"/>
+                <a:ea typeface="NanumGothic"/>
+                <a:cs typeface="NanumGothic"/>
+              </a:rPr>
+              <a:t>2026-09-20  ·  근거와 조건을 함께 인용</a:t>
+            </a:r>
+          </a:p>
+        </p:txBody>
+      </p:sp>
+    </p:spTree>
+  </p:cSld>
+  <p:clrMapOvr>
+    <a:masterClrMapping/>
+  </p:clrMapOvr>
+</p:sld>
+</file>
+
+<file path=ppt/slides/slide27.xml><?xml version="1.0" encoding="utf-8"?>
+<p:sld xmlns:a="http://schemas.openxmlformats.org/drawingml/2006/main" xmlns:p="http://schemas.openxmlformats.org/presentationml/2006/main" xmlns:r="http://schemas.openxmlformats.org/officeDocument/2006/relationships">
+  <p:cSld>
+    <p:bg>
+      <p:bgPr>
+        <a:solidFill>
+          <a:srgbClr val="0E141B"/>
+        </a:solidFill>
+        <a:effectLst/>
+      </p:bgPr>
+    </p:bg>
+    <p:spTree>
+      <p:nvGrpSpPr>
+        <p:cNvPr id="1" name=""/>
+        <p:cNvGrpSpPr/>
+        <p:nvPr/>
+      </p:nvGrpSpPr>
+      <p:grpSpPr/>
+      <p:sp>
+        <p:nvSpPr>
+          <p:cNvPr id="2" name="Rectangle 1"/>
+          <p:cNvSpPr/>
+          <p:nvPr/>
+        </p:nvSpPr>
+        <p:spPr>
+          <a:xfrm>
+            <a:off x="0" y="0"/>
+            <a:ext cx="100584" cy="6858000"/>
+          </a:xfrm>
+          <a:prstGeom prst="rect">
+            <a:avLst/>
+          </a:prstGeom>
+          <a:solidFill>
+            <a:srgbClr val="36D399"/>
+          </a:solidFill>
+          <a:ln>
+            <a:noFill/>
+          </a:ln>
+        </p:spPr>
+        <p:style>
+          <a:lnRef idx="1">
+            <a:schemeClr val="accent1"/>
+          </a:lnRef>
+          <a:fillRef idx="3">
+            <a:schemeClr val="accent1"/>
+          </a:fillRef>
+          <a:effectRef idx="2">
+            <a:schemeClr val="accent1"/>
+          </a:effectRef>
+          <a:fontRef idx="minor">
+            <a:schemeClr val="lt1"/>
+          </a:fontRef>
+        </p:style>
+        <p:txBody>
+          <a:bodyPr rtlCol="0" anchor="ctr"/>
+          <a:lstStyle/>
+          <a:p>
+            <a:pPr algn="ctr"/>
+          </a:p>
+        </p:txBody>
+      </p:sp>
+      <p:sp>
+        <p:nvSpPr>
+          <p:cNvPr id="3" name="audit:index"/>
+          <p:cNvSpPr txBox="1"/>
+          <p:nvPr/>
+        </p:nvSpPr>
+        <p:spPr>
+          <a:xfrm>
+            <a:off x="640080" y="274320"/>
+            <a:ext cx="4572000" cy="274320"/>
+          </a:xfrm>
+          <a:prstGeom prst="rect">
+            <a:avLst/>
+          </a:prstGeom>
+          <a:noFill/>
+        </p:spPr>
+        <p:txBody>
+          <a:bodyPr wrap="square" lIns="0" rIns="0" tIns="0" bIns="0">
+            <a:spAutoFit/>
+          </a:bodyPr>
+          <a:lstStyle/>
+          <a:p>
+            <a:r>
+              <a:rPr sz="1100" b="0">
+                <a:solidFill>
+                  <a:srgbClr val="93A4B5"/>
+                </a:solidFill>
+                <a:latin typeface="NanumGothic"/>
+                <a:ea typeface="NanumGothic"/>
+                <a:cs typeface="NanumGothic"/>
+              </a:rPr>
+              <a:t>TOKEN COST LAB  /  27</a:t>
+            </a:r>
+          </a:p>
+        </p:txBody>
+      </p:sp>
+      <p:sp>
+        <p:nvSpPr>
+          <p:cNvPr id="4" name="audit:scope"/>
+          <p:cNvSpPr txBox="1"/>
+          <p:nvPr/>
+        </p:nvSpPr>
+        <p:spPr>
+          <a:xfrm>
+            <a:off x="5760720" y="274320"/>
+            <a:ext cx="5760720" cy="274320"/>
+          </a:xfrm>
+          <a:prstGeom prst="rect">
+            <a:avLst/>
+          </a:prstGeom>
+          <a:noFill/>
+        </p:spPr>
+        <p:txBody>
+          <a:bodyPr wrap="square" lIns="0" rIns="0" tIns="0" bIns="0">
+            <a:spAutoFit/>
+          </a:bodyPr>
+          <a:lstStyle/>
+          <a:p>
+            <a:r>
+              <a:rPr sz="1100" b="0">
+                <a:solidFill>
+                  <a:srgbClr val="36D399"/>
+                </a:solidFill>
+                <a:latin typeface="NanumGothic"/>
+                <a:ea typeface="NanumGothic"/>
+                <a:cs typeface="NanumGothic"/>
+              </a:rPr>
               <a:t>마무리</a:t>
             </a:r>
           </a:p>
@@ -11865,7 +14381,7 @@
                 <a:ea typeface="NanumGothic"/>
                 <a:cs typeface="NanumGothic"/>
               </a:rPr>
-              <a:t>로컬 토크나이저 실측</a:t>
+              <a:t>가격표 스냅샷 (2026-09-20)</a:t>
             </a:r>
           </a:p>
         </p:txBody>
@@ -11878,7 +14394,7 @@
         </p:nvSpPr>
         <p:spPr>
           <a:xfrm>
-            <a:off x="640080" y="822960"/>
+            <a:off x="640080" y="566928"/>
             <a:ext cx="10881360" cy="822960"/>
           </a:xfrm>
           <a:prstGeom prst="rect">
@@ -11901,7 +14417,7 @@
                 <a:ea typeface="NanumGothic"/>
                 <a:cs typeface="NanumGothic"/>
               </a:rPr>
-              <a:t>원칙 1 · 영어로 생각하고, 필요한 언어로 답한다</a:t>
+              <a:t>같은 토큰, 다른 단가</a:t>
             </a:r>
           </a:p>
         </p:txBody>
@@ -11914,7 +14430,7 @@
         </p:nvSpPr>
         <p:spPr>
           <a:xfrm>
-            <a:off x="640080" y="1783080"/>
+            <a:off x="640080" y="1261872"/>
             <a:ext cx="10881360" cy="777240"/>
           </a:xfrm>
           <a:prstGeom prst="rect">
@@ -11937,7 +14453,7 @@
                 <a:ea typeface="NanumGothic"/>
                 <a:cs typeface="NanumGothic"/>
               </a:rPr>
-              <a:t>같은 내용에 1.4723배 · 구형 2.3669배</a:t>
+              <a:t>출력은 입력의 4~8배</a:t>
             </a:r>
           </a:p>
         </p:txBody>
@@ -11950,7 +14466,7 @@
         </p:nvSpPr>
         <p:spPr>
           <a:xfrm>
-            <a:off x="777240" y="2862072"/>
+            <a:off x="777240" y="2029968"/>
             <a:ext cx="10652760" cy="612648"/>
           </a:xfrm>
           <a:prstGeom prst="rect">
@@ -11973,7 +14489,7 @@
                 <a:ea typeface="NanumGothic"/>
                 <a:cs typeface="NanumGothic"/>
               </a:rPr>
-              <a:t>FLORES-200 대응 번역 1,012쌍을 전수 인코딩해 토큰 합계를 비교</a:t>
+              <a:t>비싼 쪽(출력)을 줄이는 습관이 먼저다</a:t>
             </a:r>
           </a:p>
         </p:txBody>
@@ -11986,7 +14502,7 @@
         </p:nvSpPr>
         <p:spPr>
           <a:xfrm>
-            <a:off x="777240" y="3502152"/>
+            <a:off x="777240" y="2542032"/>
             <a:ext cx="10652760" cy="612648"/>
           </a:xfrm>
           <a:prstGeom prst="rect">
@@ -12009,56 +14525,80 @@
                 <a:ea typeface="NanumGothic"/>
                 <a:cs typeface="NanumGothic"/>
               </a:rPr>
-              <a:t>짧고 압축된 문장일수록 격차가 커진다</a:t>
-            </a:r>
-          </a:p>
-        </p:txBody>
-      </p:sp>
-      <p:sp>
-        <p:nvSpPr>
-          <p:cNvPr id="9" name="audit:body-2"/>
-          <p:cNvSpPr txBox="1"/>
-          <p:nvPr/>
-        </p:nvSpPr>
-        <p:spPr>
-          <a:xfrm>
-            <a:off x="777240" y="4142231"/>
-            <a:ext cx="10652760" cy="612648"/>
-          </a:xfrm>
-          <a:prstGeom prst="rect">
-            <a:avLst/>
-          </a:prstGeom>
-          <a:noFill/>
-        </p:spPr>
-        <p:txBody>
-          <a:bodyPr wrap="square" lIns="0" rIns="0" tIns="0" bIns="0">
-            <a:spAutoFit/>
-          </a:bodyPr>
-          <a:lstStyle/>
-          <a:p>
-            <a:r>
-              <a:rPr sz="1750" b="0">
-                <a:solidFill>
-                  <a:srgbClr val="ECF1F6"/>
-                </a:solidFill>
-                <a:latin typeface="NanumGothic"/>
-                <a:ea typeface="NanumGothic"/>
-                <a:cs typeface="NanumGothic"/>
-              </a:rPr>
-              <a:t>사용자에게는 한국어로 답한다 — 안 보이는 사고만 영어로</a:t>
-            </a:r>
-          </a:p>
-        </p:txBody>
-      </p:sp>
-      <p:sp>
-        <p:nvSpPr>
-          <p:cNvPr id="10" name="audit:source"/>
-          <p:cNvSpPr txBox="1"/>
-          <p:nvPr/>
-        </p:nvSpPr>
-        <p:spPr>
-          <a:xfrm>
-            <a:off x="640080" y="6080760"/>
+              <a:t>캐시 읽기는 입력의 0.1배 — 캐시가 있는 이유</a:t>
+            </a:r>
+          </a:p>
+        </p:txBody>
+      </p:sp>
+      <p:pic>
+        <p:nvPicPr>
+          <p:cNvPr id="9" name="Picture 8" descr="prices.png"/>
+          <p:cNvPicPr>
+            <a:picLocks noChangeAspect="1"/>
+          </p:cNvPicPr>
+          <p:nvPr/>
+        </p:nvPicPr>
+        <p:blipFill>
+          <a:blip r:embed="rId2"/>
+          <a:stretch>
+            <a:fillRect/>
+          </a:stretch>
+        </p:blipFill>
+        <p:spPr>
+          <a:xfrm>
+            <a:off x="777240" y="3101593"/>
+            <a:ext cx="10652760" cy="2959100"/>
+          </a:xfrm>
+          <a:prstGeom prst="rect">
+            <a:avLst/>
+          </a:prstGeom>
+        </p:spPr>
+      </p:pic>
+      <p:sp>
+        <p:nvSpPr>
+          <p:cNvPr id="10" name="audit:chart-caption"/>
+          <p:cNvSpPr txBox="1"/>
+          <p:nvPr/>
+        </p:nvSpPr>
+        <p:spPr>
+          <a:xfrm>
+            <a:off x="777240" y="6135624"/>
+            <a:ext cx="10652760" cy="237744"/>
+          </a:xfrm>
+          <a:prstGeom prst="rect">
+            <a:avLst/>
+          </a:prstGeom>
+          <a:noFill/>
+        </p:spPr>
+        <p:txBody>
+          <a:bodyPr wrap="square" lIns="0" rIns="0" tIns="0" bIns="0">
+            <a:spAutoFit/>
+          </a:bodyPr>
+          <a:lstStyle/>
+          <a:p>
+            <a:r>
+              <a:rPr sz="950" b="0">
+                <a:solidFill>
+                  <a:srgbClr val="93A4B5"/>
+                </a:solidFill>
+                <a:latin typeface="NanumGothic"/>
+                <a:ea typeface="NanumGothic"/>
+                <a:cs typeface="NanumGothic"/>
+              </a:rPr>
+              <a:t>그래프 · 단가 스냅샷 (USD / 100만 토큰) · prices.png</a:t>
+            </a:r>
+          </a:p>
+        </p:txBody>
+      </p:sp>
+      <p:sp>
+        <p:nvSpPr>
+          <p:cNvPr id="11" name="audit:source"/>
+          <p:cNvSpPr txBox="1"/>
+          <p:nvPr/>
+        </p:nvSpPr>
+        <p:spPr>
+          <a:xfrm>
+            <a:off x="777240" y="6382512"/>
             <a:ext cx="10972800" cy="274320"/>
           </a:xfrm>
           <a:prstGeom prst="rect">
@@ -12081,20 +14621,20 @@
                 <a:ea typeface="NanumGothic"/>
                 <a:cs typeface="NanumGothic"/>
               </a:rPr>
-              <a:t>tools/parallel_tokenizer_bench.py · FLORES-200 devtest</a:t>
-            </a:r>
-          </a:p>
-        </p:txBody>
-      </p:sp>
-      <p:sp>
-        <p:nvSpPr>
-          <p:cNvPr id="11" name="audit:footer"/>
-          <p:cNvSpPr txBox="1"/>
-          <p:nvPr/>
-        </p:nvSpPr>
-        <p:spPr>
-          <a:xfrm>
-            <a:off x="640080" y="6419088"/>
+              <a:t>lab/pricing.py MODELS</a:t>
+            </a:r>
+          </a:p>
+        </p:txBody>
+      </p:sp>
+      <p:sp>
+        <p:nvSpPr>
+          <p:cNvPr id="12" name="audit:footer"/>
+          <p:cNvSpPr txBox="1"/>
+          <p:nvPr/>
+        </p:nvSpPr>
+        <p:spPr>
+          <a:xfrm>
+            <a:off x="777240" y="6583680"/>
             <a:ext cx="10972800" cy="256032"/>
           </a:xfrm>
           <a:prstGeom prst="rect">
@@ -12258,7 +14798,7 @@
                 <a:ea typeface="NanumGothic"/>
                 <a:cs typeface="NanumGothic"/>
               </a:rPr>
-              <a:t>인코딩 실측</a:t>
+              <a:t>로컬 토크나이저 실측</a:t>
             </a:r>
           </a:p>
         </p:txBody>
@@ -12294,7 +14834,7 @@
                 <a:ea typeface="NanumGothic"/>
                 <a:cs typeface="NanumGothic"/>
               </a:rPr>
-              <a:t>원칙 2 · 설명을 최소화한다</a:t>
+              <a:t>원칙 1 · 영어로 생각하고, 필요한 언어로 답한다</a:t>
             </a:r>
           </a:p>
         </p:txBody>
@@ -12330,7 +14870,7 @@
                 <a:ea typeface="NanumGothic"/>
                 <a:cs typeface="NanumGothic"/>
               </a:rPr>
-              <a:t>342 → 58 토큰 (83% 감소)</a:t>
+              <a:t>같은 내용에 1.4723배 · 구형 2.3669배</a:t>
             </a:r>
           </a:p>
         </p:txBody>
@@ -12366,7 +14906,7 @@
                 <a:ea typeface="NanumGothic"/>
                 <a:cs typeface="NanumGothic"/>
               </a:rPr>
-              <a:t>월 1,760건 기준 $9.03 → $1.53</a:t>
+              <a:t>FLORES-200 대응 번역 1,012쌍을 전수 인코딩해 토큰 합계를 비교</a:t>
             </a:r>
           </a:p>
         </p:txBody>
@@ -12402,7 +14942,7 @@
                 <a:ea typeface="NanumGothic"/>
                 <a:cs typeface="NanumGothic"/>
               </a:rPr>
-              <a:t>'코드를 읽으면 아는 문장'만 지운다 — 코드는 그대로</a:t>
+              <a:t>짧고 압축된 문장일수록 격차가 커진다</a:t>
             </a:r>
           </a:p>
         </p:txBody>
@@ -12438,7 +14978,7 @@
                 <a:ea typeface="NanumGothic"/>
                 <a:cs typeface="NanumGothic"/>
               </a:rPr>
-              <a:t>샘플은 차이를 보이려고 극단적으로 잡았다. 자기 작업으로 다시 재라</a:t>
+              <a:t>사용자에게는 한국어로 답한다 — 안 보이는 사고만 영어로</a:t>
             </a:r>
           </a:p>
         </p:txBody>
@@ -12474,7 +15014,7 @@
                 <a:ea typeface="NanumGothic"/>
                 <a:cs typeface="NanumGothic"/>
               </a:rPr>
-              <a:t>experiments/exp05_verbosity_effort.py</a:t>
+              <a:t>tools/parallel_tokenizer_bench.py · FLORES-200 devtest</a:t>
             </a:r>
           </a:p>
         </p:txBody>
@@ -12651,7 +15191,7 @@
                 <a:ea typeface="NanumGothic"/>
                 <a:cs typeface="NanumGothic"/>
               </a:rPr>
-              <a:t>시나리오 (사고 토큰 가정)</a:t>
+              <a:t>인코딩 실측</a:t>
             </a:r>
           </a:p>
         </p:txBody>
@@ -12687,7 +15227,7 @@
                 <a:ea typeface="NanumGothic"/>
                 <a:cs typeface="NanumGothic"/>
               </a:rPr>
-              <a:t>원칙 3 · 추론 강도를 작업에 맞춘다</a:t>
+              <a:t>왜 한국어가 더 쪼개지는가</a:t>
             </a:r>
           </a:p>
         </p:txBody>
@@ -12723,7 +15263,7 @@
                 <a:ea typeface="NanumGothic"/>
                 <a:cs typeface="NanumGothic"/>
               </a:rPr>
-              <a:t>월 $924 → $118 (70% 절감)</a:t>
+              <a:t>토큰/글자 0.204 vs 0.526</a:t>
             </a:r>
           </a:p>
         </p:txBody>
@@ -12759,7 +15299,7 @@
                 <a:ea typeface="NanumGothic"/>
                 <a:cs typeface="NanumGothic"/>
               </a:rPr>
-              <a:t>minimal $7.92 · medium $132 · max $924</a:t>
+              <a:t>어휘 20만 개 중 한글은 약 1.2%</a:t>
             </a:r>
           </a:p>
         </p:txBody>
@@ -12795,7 +15335,7 @@
                 <a:ea typeface="NanumGothic"/>
                 <a:cs typeface="NanumGothic"/>
               </a:rPr>
-              <a:t>설계 10%만 high, 정형·단순 작업은 low</a:t>
+              <a:t>'에이전트'는 4토큰, ' agent'는 1토큰</a:t>
             </a:r>
           </a:p>
         </p:txBody>
@@ -12831,7 +15371,7 @@
                 <a:ea typeface="NanumGothic"/>
                 <a:cs typeface="NanumGothic"/>
               </a:rPr>
-              <a:t>reasoning/output 비율이 0.8을 넘으면 과다 신호</a:t>
+              <a:t>512토큰이 영어 2,513자 · 한국어 973자 — 글자 수로 자르면 한국어 문서가 잘린다</a:t>
             </a:r>
           </a:p>
         </p:txBody>
@@ -12867,7 +15407,7 @@
                 <a:ea typeface="NanumGothic"/>
                 <a:cs typeface="NanumGothic"/>
               </a:rPr>
-              <a:t>experiments/exp05_verbosity_effort.py</a:t>
+              <a:t>experiments/exp01_tokenizer_ko_en.py</a:t>
             </a:r>
           </a:p>
         </p:txBody>
@@ -13044,7 +15584,7 @@
                 <a:ea typeface="NanumGothic"/>
                 <a:cs typeface="NanumGothic"/>
               </a:rPr>
-              <a:t>비용 시나리오 (턴 가정)</a:t>
+              <a:t>로컬 토크나이저 실측</a:t>
             </a:r>
           </a:p>
         </p:txBody>
@@ -13057,7 +15597,7 @@
         </p:nvSpPr>
         <p:spPr>
           <a:xfrm>
-            <a:off x="640080" y="822960"/>
+            <a:off x="640080" y="566928"/>
             <a:ext cx="10881360" cy="822960"/>
           </a:xfrm>
           <a:prstGeom prst="rect">
@@ -13080,7 +15620,7 @@
                 <a:ea typeface="NanumGothic"/>
                 <a:cs typeface="NanumGothic"/>
               </a:rPr>
-              <a:t>원칙 4 · 결정을 스펙으로 먼저 준다</a:t>
+              <a:t>한국어는 같은 내용에 토큰을 더 쓴다</a:t>
             </a:r>
           </a:p>
         </p:txBody>
@@ -13093,7 +15633,7 @@
         </p:nvSpPr>
         <p:spPr>
           <a:xfrm>
-            <a:off x="640080" y="1783080"/>
+            <a:off x="640080" y="1261872"/>
             <a:ext cx="10881360" cy="777240"/>
           </a:xfrm>
           <a:prstGeom prst="rect">
@@ -13116,7 +15656,7 @@
                 <a:ea typeface="NanumGothic"/>
                 <a:cs typeface="NanumGothic"/>
               </a:rPr>
-              <a:t>재작업 5 → 2 사이클, 68.7% 절감</a:t>
+              <a:t>1.4723배 · 2.3669배</a:t>
             </a:r>
           </a:p>
         </p:txBody>
@@ -13129,7 +15669,7 @@
         </p:nvSpPr>
         <p:spPr>
           <a:xfrm>
-            <a:off x="777240" y="2862072"/>
+            <a:off x="777240" y="2029968"/>
             <a:ext cx="10652760" cy="612648"/>
           </a:xfrm>
           <a:prstGeom prst="rect">
@@ -13152,7 +15692,7 @@
                 <a:ea typeface="NanumGothic"/>
                 <a:cs typeface="NanumGothic"/>
               </a:rPr>
-              <a:t>스펙 4,000토큰 작성 비용도 포함한 계산</a:t>
+              <a:t>FLORES-200 대응 번역 1,012쌍을 전수 인코딩</a:t>
             </a:r>
           </a:p>
         </p:txBody>
@@ -13165,7 +15705,7 @@
         </p:nvSpPr>
         <p:spPr>
           <a:xfrm>
-            <a:off x="777240" y="3502152"/>
+            <a:off x="777240" y="2542032"/>
             <a:ext cx="10652760" cy="612648"/>
           </a:xfrm>
           <a:prstGeom prst="rect">
@@ -13188,56 +15728,80 @@
                 <a:ea typeface="NanumGothic"/>
                 <a:cs typeface="NanumGothic"/>
               </a:rPr>
-              <a:t>얕은 스펙만으로도 36.9% 절감</a:t>
-            </a:r>
-          </a:p>
-        </p:txBody>
-      </p:sp>
-      <p:sp>
-        <p:nvSpPr>
-          <p:cNvPr id="9" name="audit:body-2"/>
-          <p:cNvSpPr txBox="1"/>
-          <p:nvPr/>
-        </p:nvSpPr>
-        <p:spPr>
-          <a:xfrm>
-            <a:off x="777240" y="4142231"/>
-            <a:ext cx="10652760" cy="612648"/>
-          </a:xfrm>
-          <a:prstGeom prst="rect">
-            <a:avLst/>
-          </a:prstGeom>
-          <a:noFill/>
-        </p:spPr>
-        <p:txBody>
-          <a:bodyPr wrap="square" lIns="0" rIns="0" tIns="0" bIns="0">
-            <a:spAutoFit/>
-          </a:bodyPr>
-          <a:lstStyle/>
-          <a:p>
-            <a:r>
-              <a:rPr sz="1750" b="0">
-                <a:solidFill>
-                  <a:srgbClr val="ECF1F6"/>
-                </a:solidFill>
-                <a:latin typeface="NanumGothic"/>
-                <a:ea typeface="NanumGothic"/>
-                <a:cs typeface="NanumGothic"/>
-              </a:rPr>
-              <a:t>설명이 아니라 결정을 적는다 — 페이지 · 스택 · 디자인 · 수용 기준</a:t>
-            </a:r>
-          </a:p>
-        </p:txBody>
-      </p:sp>
-      <p:sp>
-        <p:nvSpPr>
-          <p:cNvPr id="10" name="audit:source"/>
-          <p:cNvSpPr txBox="1"/>
-          <p:nvPr/>
-        </p:nvSpPr>
-        <p:spPr>
-          <a:xfrm>
-            <a:off x="640080" y="6080760"/>
+              <a:t>글자 수로 자르면 한국어가 먼저 잘린다</a:t>
+            </a:r>
+          </a:p>
+        </p:txBody>
+      </p:sp>
+      <p:pic>
+        <p:nvPicPr>
+          <p:cNvPr id="9" name="Picture 8" descr="tokenizer.png"/>
+          <p:cNvPicPr>
+            <a:picLocks noChangeAspect="1"/>
+          </p:cNvPicPr>
+          <p:nvPr/>
+        </p:nvPicPr>
+        <p:blipFill>
+          <a:blip r:embed="rId2"/>
+          <a:stretch>
+            <a:fillRect/>
+          </a:stretch>
+        </p:blipFill>
+        <p:spPr>
+          <a:xfrm>
+            <a:off x="777240" y="3101593"/>
+            <a:ext cx="10652760" cy="2959100"/>
+          </a:xfrm>
+          <a:prstGeom prst="rect">
+            <a:avLst/>
+          </a:prstGeom>
+        </p:spPr>
+      </p:pic>
+      <p:sp>
+        <p:nvSpPr>
+          <p:cNvPr id="10" name="audit:chart-caption"/>
+          <p:cNvSpPr txBox="1"/>
+          <p:nvPr/>
+        </p:nvSpPr>
+        <p:spPr>
+          <a:xfrm>
+            <a:off x="777240" y="6135624"/>
+            <a:ext cx="10652760" cy="237744"/>
+          </a:xfrm>
+          <a:prstGeom prst="rect">
+            <a:avLst/>
+          </a:prstGeom>
+          <a:noFill/>
+        </p:spPr>
+        <p:txBody>
+          <a:bodyPr wrap="square" lIns="0" rIns="0" tIns="0" bIns="0">
+            <a:spAutoFit/>
+          </a:bodyPr>
+          <a:lstStyle/>
+          <a:p>
+            <a:r>
+              <a:rPr sz="950" b="0">
+                <a:solidFill>
+                  <a:srgbClr val="93A4B5"/>
+                </a:solidFill>
+                <a:latin typeface="NanumGothic"/>
+                <a:ea typeface="NanumGothic"/>
+                <a:cs typeface="NanumGothic"/>
+              </a:rPr>
+              <a:t>그래프 · 토크나이저 실측 (토큰) · tokenizer.png</a:t>
+            </a:r>
+          </a:p>
+        </p:txBody>
+      </p:sp>
+      <p:sp>
+        <p:nvSpPr>
+          <p:cNvPr id="11" name="audit:source"/>
+          <p:cNvSpPr txBox="1"/>
+          <p:nvPr/>
+        </p:nvSpPr>
+        <p:spPr>
+          <a:xfrm>
+            <a:off x="777240" y="6382512"/>
             <a:ext cx="10972800" cy="274320"/>
           </a:xfrm>
           <a:prstGeom prst="rect">
@@ -13260,20 +15824,20 @@
                 <a:ea typeface="NanumGothic"/>
                 <a:cs typeface="NanumGothic"/>
               </a:rPr>
-              <a:t>experiments/exp04_agent_loop_sdd.py</a:t>
-            </a:r>
-          </a:p>
-        </p:txBody>
-      </p:sp>
-      <p:sp>
-        <p:nvSpPr>
-          <p:cNvPr id="11" name="audit:footer"/>
-          <p:cNvSpPr txBox="1"/>
-          <p:nvPr/>
-        </p:nvSpPr>
-        <p:spPr>
-          <a:xfrm>
-            <a:off x="640080" y="6419088"/>
+              <a:t>tools/parallel_tokenizer_bench.py · FLORES-200 devtest</a:t>
+            </a:r>
+          </a:p>
+        </p:txBody>
+      </p:sp>
+      <p:sp>
+        <p:nvSpPr>
+          <p:cNvPr id="12" name="audit:footer"/>
+          <p:cNvSpPr txBox="1"/>
+          <p:nvPr/>
+        </p:nvSpPr>
+        <p:spPr>
+          <a:xfrm>
+            <a:off x="777240" y="6583680"/>
             <a:ext cx="10972800" cy="256032"/>
           </a:xfrm>
           <a:prstGeom prst="rect">
@@ -13437,7 +16001,7 @@
                 <a:ea typeface="NanumGothic"/>
                 <a:cs typeface="NanumGothic"/>
               </a:rPr>
-              <a:t>비용 시나리오</a:t>
+              <a:t>인코딩 실측</a:t>
             </a:r>
           </a:p>
         </p:txBody>
@@ -13473,7 +16037,7 @@
                 <a:ea typeface="NanumGothic"/>
                 <a:cs typeface="NanumGothic"/>
               </a:rPr>
-              <a:t>원칙 5 · 턴 수가 비용을 지배한다</a:t>
+              <a:t>원칙 2 · 설명을 최소화한다</a:t>
             </a:r>
           </a:p>
         </p:txBody>
@@ -13509,7 +16073,7 @@
                 <a:ea typeface="NanumGothic"/>
                 <a:cs typeface="NanumGothic"/>
               </a:rPr>
-              <a:t>턴 2배 → 비용 3.1배</a:t>
+              <a:t>342 → 58 토큰 (83% 감소)</a:t>
             </a:r>
           </a:p>
         </p:txBody>
@@ -13545,7 +16109,7 @@
                 <a:ea typeface="NanumGothic"/>
                 <a:cs typeface="NanumGothic"/>
               </a:rPr>
-              <a:t>5턴 $0.26 · 20턴 $2.32 · 50턴 $12.09</a:t>
+              <a:t>월 1,760건 기준 $9.03 → $1.53</a:t>
             </a:r>
           </a:p>
         </p:txBody>
@@ -13581,7 +16145,7 @@
                 <a:ea typeface="NanumGothic"/>
                 <a:cs typeface="NanumGothic"/>
               </a:rPr>
-              <a:t>안 쓰는 코드도 매 턴 다시 실려 과금된다 (YAGNI)</a:t>
+              <a:t>'코드를 읽으면 아는 문장'만 지운다 — 코드는 그대로</a:t>
             </a:r>
           </a:p>
         </p:txBody>
@@ -13617,7 +16181,7 @@
                 <a:ea typeface="NanumGothic"/>
                 <a:cs typeface="NanumGothic"/>
               </a:rPr>
-              <a:t>컨텍스트는 길이보다 '반복'이 비쌉니다</a:t>
+              <a:t>샘플은 차이를 보이려고 극단적으로 잡았다. 자기 작업으로 다시 재라</a:t>
             </a:r>
           </a:p>
         </p:txBody>
@@ -13653,7 +16217,7 @@
                 <a:ea typeface="NanumGothic"/>
                 <a:cs typeface="NanumGothic"/>
               </a:rPr>
-              <a:t>experiments/exp04_agent_loop_sdd.py</a:t>
+              <a:t>experiments/exp05_verbosity_effort.py</a:t>
             </a:r>
           </a:p>
         </p:txBody>
@@ -13830,7 +16394,7 @@
                 <a:ea typeface="NanumGothic"/>
                 <a:cs typeface="NanumGothic"/>
               </a:rPr>
-              <a:t>비용 시나리오 (100콜)</a:t>
+              <a:t>시나리오 (사고 토큰 가정)</a:t>
             </a:r>
           </a:p>
         </p:txBody>
@@ -13866,7 +16430,7 @@
                 <a:ea typeface="NanumGothic"/>
                 <a:cs typeface="NanumGothic"/>
               </a:rPr>
-              <a:t>캐싱 · 오늘 바로 켤 수 있는 레버</a:t>
+              <a:t>원칙 3 · 추론 강도를 작업에 맞춘다</a:t>
             </a:r>
           </a:p>
         </p:txBody>
@@ -13902,7 +16466,7 @@
                 <a:ea typeface="NanumGothic"/>
                 <a:cs typeface="NanumGothic"/>
               </a:rPr>
-              <a:t>$8.55 → $3.22 (62.4% 절감)</a:t>
+              <a:t>월 $924 → $118 (70% 절감)</a:t>
             </a:r>
           </a:p>
         </p:txBody>
@@ -13938,7 +16502,7 @@
                 <a:ea typeface="NanumGothic"/>
                 <a:cs typeface="NanumGothic"/>
               </a:rPr>
-              <a:t>쓰기 프리미엄은 두 번째 호출에서 회수된다</a:t>
+              <a:t>minimal $7.92 · medium $132 · max $924</a:t>
             </a:r>
           </a:p>
         </p:txBody>
@@ -13974,7 +16538,7 @@
                 <a:ea typeface="NanumGothic"/>
                 <a:cs typeface="NanumGothic"/>
               </a:rPr>
-              <a:t>고정 블록(시스템 · 툴 정의 · 규약)을 맨 앞으로 모은다</a:t>
+              <a:t>설계 10%만 high, 정형·단순 작업은 low</a:t>
             </a:r>
           </a:p>
         </p:txBody>
@@ -14010,7 +16574,7 @@
                 <a:ea typeface="NanumGothic"/>
                 <a:cs typeface="NanumGothic"/>
               </a:rPr>
-              <a:t>최소 길이를 확인한다 — Haiku 4.5는 4,096토큰</a:t>
+              <a:t>reasoning/output 비율이 0.8을 넘으면 과다 신호</a:t>
             </a:r>
           </a:p>
         </p:txBody>
@@ -14046,7 +16610,7 @@
                 <a:ea typeface="NanumGothic"/>
                 <a:cs typeface="NanumGothic"/>
               </a:rPr>
-              <a:t>experiments/exp03_prompt_caching.py</a:t>
+              <a:t>experiments/exp05_verbosity_effort.py</a:t>
             </a:r>
           </a:p>
         </p:txBody>
